--- a/Präsentation/Final/WealthScope_Praesentation_v1.0_FINAL.pptx
+++ b/Präsentation/Final/WealthScope_Praesentation_v1.0_FINAL.pptx
@@ -31934,7 +31934,7 @@
           <p:nvPr/>
         </p:nvPicPr>
         <p:blipFill>
-          <a:blip r:embed="rId4"/>
+          <a:blip r:embed="rId5"/>
           <a:stretch/>
         </p:blipFill>
         <p:spPr>

--- a/Präsentation/Final/WealthScope_Praesentation_v1.0_FINAL.pptx
+++ b/Präsentation/Final/WealthScope_Praesentation_v1.0_FINAL.pptx
@@ -28948,7 +28948,7 @@
                 <a:ea typeface="Calibri"/>
                 <a:cs typeface="Calibri"/>
               </a:rPr>
-              <a:t>Soufiane Fedan  ·  soufiane.fedan@solvvision.de  ·  IU Internationale Hochschule Frankfurt</a:t>
+              <a:t>Soufiane Fedan  ·  fedan.soufiane@gmail.com  ·  IU Internationale Hochschule Frankfurt</a:t>
             </a:r>
           </a:p>
         </p:txBody>

--- a/Präsentation/Final/WealthScope_Praesentation_v1.0_FINAL.pptx
+++ b/Präsentation/Final/WealthScope_Praesentation_v1.0_FINAL.pptx
@@ -941,7 +941,7 @@
             </a:pPr>
             <a:r>
               <a:rPr lang="de-DE" sz="1200" dirty="0"/>
-              <a:t>Warum das kein akademisches Detail ist: Li und Kollegen zeigen 2024, dass bereits fünf bis zehn Prozent fehlende Werte den Genauigkeitsverlust um bis zu 15 Prozent erhöhen können. Die Wahl der Imputation ist also eine belegte Weichenstellung für die Modellgüte.</a:t>
+              <a:t>Warum das kein akademisches Detail ist: Li und Kollegen haben 2024 acht Imputationsverfahren an über zehntausend Kohortenfällen verglichen, bei zwanzig Prozent künstlich erzeugten Fehlwerten. Ihr Ergebnis: Das Verfahren macht einen messbaren Unterschied in der Modellgüte — am besten schnitten KNN und Random Forest ab. Die Wahl der Imputation ist also eine belegte Weichenstellung, keine Formalie.</a:t>
             </a:r>
           </a:p>
           <a:p>
@@ -1090,7 +1090,7 @@
             </a:pPr>
             <a:r>
               <a:rPr lang="de-DE" sz="1200" dirty="0"/>
-              <a:t>Ich benutze den StandardScaler. Der rechnet jedes Feature so um, dass es Mittelwert null und Standardabweichung eins hat — das nennt man Z-Score-Normierung. Ohne das würde ein Merkmal, das in Tausendern misst, ein Merkmal, das in Prozent misst, schlicht überstimmen. Pinheiro und Kollegen beziffern den Effekt korrekter Skalierung 2025 auf bis zu 25 Prozent Modell-Performance.</a:t>
+              <a:t>Ich benutze den StandardScaler. Der rechnet jedes Feature so um, dass es Mittelwert null und Standardabweichung eins hat — das nennt man Z-Score-Normierung. Ohne das würde ein Merkmal, das in Tausendern misst, ein Merkmal, das in Prozent misst, schlicht überstimmen. Pinheiro und Kollegen haben das 2025 systematisch vermessen — zwölf Skalierungsverfahren über vierzehn Algorithmen und sechzehn Datensätze. Ihr Befund: Ensembles wie der Random Forest bleiben weitgehend unbeeinflusst, während Logistische Regression, SVM und neuronale Netze stark auf die Wahl des Scalers reagieren. Genau deshalb skaliere ich nur die beiden linearen Modelle.</a:t>
             </a:r>
           </a:p>
           <a:p>
@@ -10939,7 +10939,7 @@
                 <a:ea typeface="Calibri"/>
                 <a:cs typeface="Calibri"/>
               </a:rPr>
-              <a:t>Li et al. (2024), BMC: bereits 5–10 % fehlende Werte können den Accuracy-Verlust um bis zu 15 % erhöhen. Median-Imputation ist damit nicht Beiwerk, sondern eine belegte Weichenstellung für die Modellgüte.</a:t>
+              <a:t>Li et al. (2024), BMC: acht Imputationsverfahren auf 10.164 Kohortenfällen bei 20 % Fehlwerten — die Wahl des Verfahrens verändert die Modellgüte messbar. Median-Imputation ist damit nicht Beiwerk, sondern eine belegte Weichenstellung.</a:t>
             </a:r>
           </a:p>
         </p:txBody>
@@ -15716,7 +15716,7 @@
                 <a:ea typeface="Calibri"/>
                 <a:cs typeface="Calibri"/>
               </a:rPr>
-              <a:t>Imputation  →  Scaling  →  Modell   —   Pipeline verhindert Leakage innerhalb jedes Trainingsfensters; Zeitordnung und Sperrzone schützen zusätzlich.</a:t>
+              <a:t>Imputation  →  Scaling (nur LogReg/SVM)  →  Modell   —   Pipeline verhindert Leakage innerhalb jedes Trainingsfensters; Zeitordnung und Sperrzone schützen zusätzlich.</a:t>
             </a:r>
           </a:p>
         </p:txBody>

--- a/Präsentation/Final/WealthScope_Praesentation_v1.0_FINAL.pptx
+++ b/Präsentation/Final/WealthScope_Praesentation_v1.0_FINAL.pptx
@@ -30279,15 +30279,17 @@
       </p:sp>
       <p:pic>
         <p:nvPicPr>
-          <p:cNvPr id="29" name="Grafik 28"/>
+          <p:cNvPr id="31" name="Picture 30" descr="s29_new.png"/>
           <p:cNvPicPr>
             <a:picLocks noChangeAspect="1"/>
           </p:cNvPicPr>
           <p:nvPr/>
         </p:nvPicPr>
         <p:blipFill>
-          <a:blip r:embed="rId4"/>
-          <a:stretch/>
+          <a:blip r:embed="rId6"/>
+          <a:stretch>
+            <a:fillRect/>
+          </a:stretch>
         </p:blipFill>
         <p:spPr>
           <a:xfrm>
@@ -31927,15 +31929,17 @@
       </p:sp>
       <p:pic>
         <p:nvPicPr>
-          <p:cNvPr id="25" name="Grafik 24"/>
+          <p:cNvPr id="26" name="Picture 25" descr="s30_new.png"/>
           <p:cNvPicPr>
             <a:picLocks noChangeAspect="1"/>
           </p:cNvPicPr>
           <p:nvPr/>
         </p:nvPicPr>
         <p:blipFill>
-          <a:blip r:embed="rId5"/>
-          <a:stretch/>
+          <a:blip r:embed="rId6"/>
+          <a:stretch>
+            <a:fillRect/>
+          </a:stretch>
         </p:blipFill>
         <p:spPr>
           <a:xfrm>

--- a/Präsentation/Final/WealthScope_Praesentation_v1.0_FINAL.pptx
+++ b/Präsentation/Final/WealthScope_Praesentation_v1.0_FINAL.pptx
@@ -5,7 +5,7 @@
     <p:sldMasterId id="2147483648" r:id="rId1"/>
   </p:sldMasterIdLst>
   <p:notesMasterIdLst>
-    <p:notesMasterId r:id="rId38"/>
+    <p:notesMasterId r:id="rId39"/>
   </p:notesMasterIdLst>
   <p:sldIdLst>
     <p:sldId id="256" r:id="rId2"/>
@@ -26,25 +26,25 @@
     <p:sldId id="270" r:id="rId17"/>
     <p:sldId id="271" r:id="rId18"/>
     <p:sldId id="272" r:id="rId19"/>
-    <p:sldId id="292" r:id="rId43"/>
-    <p:sldId id="278" r:id="rId20"/>
-    <p:sldId id="291" r:id="rId21"/>
-    <p:sldId id="276" r:id="rId22"/>
-    <p:sldId id="277" r:id="rId23"/>
-    <p:sldId id="285" r:id="rId24"/>
-    <p:sldId id="286" r:id="rId25"/>
-    <p:sldId id="287" r:id="rId26"/>
-    <p:sldId id="288" r:id="rId27"/>
-    <p:sldId id="289" r:id="rId28"/>
-    <p:sldId id="273" r:id="rId29"/>
-    <p:sldId id="274" r:id="rId30"/>
-    <p:sldId id="275" r:id="rId31"/>
-    <p:sldId id="279" r:id="rId32"/>
-    <p:sldId id="280" r:id="rId33"/>
-    <p:sldId id="281" r:id="rId34"/>
-    <p:sldId id="282" r:id="rId35"/>
-    <p:sldId id="283" r:id="rId36"/>
-    <p:sldId id="284" r:id="rId37"/>
+    <p:sldId id="292" r:id="rId20"/>
+    <p:sldId id="278" r:id="rId21"/>
+    <p:sldId id="291" r:id="rId22"/>
+    <p:sldId id="276" r:id="rId23"/>
+    <p:sldId id="277" r:id="rId24"/>
+    <p:sldId id="285" r:id="rId25"/>
+    <p:sldId id="286" r:id="rId26"/>
+    <p:sldId id="287" r:id="rId27"/>
+    <p:sldId id="288" r:id="rId28"/>
+    <p:sldId id="289" r:id="rId29"/>
+    <p:sldId id="273" r:id="rId30"/>
+    <p:sldId id="274" r:id="rId31"/>
+    <p:sldId id="275" r:id="rId32"/>
+    <p:sldId id="279" r:id="rId33"/>
+    <p:sldId id="280" r:id="rId34"/>
+    <p:sldId id="281" r:id="rId35"/>
+    <p:sldId id="282" r:id="rId36"/>
+    <p:sldId id="283" r:id="rId37"/>
+    <p:sldId id="284" r:id="rId38"/>
   </p:sldIdLst>
   <p:sldSz cx="12192000" cy="6858000"/>
   <p:notesSz cx="6858000" cy="9144000"/>
@@ -2215,7 +2215,7 @@
             </a:pPr>
             <a:r>
               <a:rPr lang="de-DE" sz="1200" b="1" dirty="0"/>
-              <a:t>TIMING  18:10–22:40  ·  ca. 270 Sek  ·  LIVE-DEMO  (Kernstück)</a:t>
+              <a:t>TIMING  17:25–18:10  ·  ca. 45 Sek  ·  HÖHEPUNKT DES VORTRAGS</a:t>
             </a:r>
           </a:p>
           <a:p>
@@ -2226,7 +2226,7 @@
             </a:pPr>
             <a:r>
               <a:rPr lang="de-DE" sz="1200" b="1" dirty="0"/>
-              <a:t>EINSTIEG  (ca. 10 Sek)</a:t>
+              <a:t>SPRECHTEXT</a:t>
             </a:r>
           </a:p>
           <a:p>
@@ -2237,7 +2237,51 @@
             </a:pPr>
             <a:r>
               <a:rPr lang="de-DE" sz="1200" dirty="0"/>
-              <a:t>Phase sieben: Knowledge Transfer. Sechs Stationen, viereinhalb Minuten. Fragt hier gern direkt dazwischen — dafür ist Zeit eingeplant.</a:t>
+              <a:t>Ich habe dasselbe Modell auf denselben Daten noch zweimal trainiert und ausschließlich die Aufteilung geändert.</a:t>
+            </a:r>
+          </a:p>
+          <a:p>
+            <a:pPr>
+              <a:spcBef>
+                <a:spcPts val="400"/>
+              </a:spcBef>
+            </a:pPr>
+            <a:r>
+              <a:rPr lang="de-DE" sz="1200" dirty="0"/>
+              <a:t>Zeile eins ist meine Variante: zeitlich getrennt, mit zwanzig Handelstagen Sperrzone. AUC 0,519. Zeile zwei: Ich nehme nur die Sperrzone heraus, dann reichen die letzten Trainingslabels in den Testzeitraum hinein — AUC 0,524. Und Zeile drei ist, wie man es macht, wenn man über Zeit nicht nachdenkt: ein naiver Zufalls-Split, achtzig zu zwanzig, quer durch alle Jahre. AUC 0,581.</a:t>
+            </a:r>
+          </a:p>
+          <a:p>
+            <a:pPr>
+              <a:spcBef>
+                <a:spcPts val="400"/>
+              </a:spcBef>
+            </a:pPr>
+            <a:r>
+              <a:rPr lang="de-DE" sz="1200" dirty="0"/>
+              <a:t>Von 0,519 auf 0,581 klingt nach wenig. Aber gemessen am Zufallsniveau 0,5 ist das ein scheinbares Signal von 0,081 statt 0,019 — es sieht also 4,2-mal größer aus, als es ist. Und dafür braucht es keine bessere Idee, nur eine Zeile Code.</a:t>
+            </a:r>
+          </a:p>
+          <a:p>
+            <a:pPr>
+              <a:spcBef>
+                <a:spcPts val="400"/>
+              </a:spcBef>
+            </a:pPr>
+            <a:r>
+              <a:rPr lang="de-DE" sz="1200" dirty="0"/>
+              <a:t>Ich hätte euch heute also 0,581 zeigen können. Ich zeige euch 0,519, weil das die Zahl ist, die übrig bleibt, wenn man dem Modell die Zukunft wegnimmt.</a:t>
+            </a:r>
+          </a:p>
+          <a:p>
+            <a:pPr>
+              <a:spcBef>
+                <a:spcPts val="400"/>
+              </a:spcBef>
+            </a:pPr>
+            <a:r>
+              <a:rPr lang="de-DE" sz="1200" dirty="0"/>
+              <a:t>Und damit ist die niedrige Zahl nicht die Schwäche dieses Projekts. Sie ist der Beleg, dass der Fehler nicht gemacht wurde.</a:t>
             </a:r>
           </a:p>
           <a:p>
@@ -2248,7 +2292,7 @@
             </a:pPr>
             <a:r>
               <a:rPr lang="de-DE" sz="1200" b="1" dirty="0"/>
-              <a:t>STATION 1 · START  (ca. 25 Sek)</a:t>
+              <a:t>REGIE</a:t>
             </a:r>
           </a:p>
           <a:p>
@@ -2259,7 +2303,29 @@
             </a:pPr>
             <a:r>
               <a:rPr lang="de-DE" sz="1200" dirty="0"/>
-              <a:t>„Das ist die Startseite. Oben das aktuelle Signal, darunter die Kennzahlen und der Kursverlauf. Wichtig: Das Signal ist eine Einordnung, keine Kaufempfehlung — der Hinweis steht bewusst direkt daneben.“</a:t>
+              <a:t>Die wichtigste Folie des Vortrags. Die drei Tabellenzeilen einzeln antippen. Der Satz „Ich hätte euch heute 0,581 zeigen können“ langsam und mit Blick ins Publikum — nicht auf die Folie. Danach zwei Sekunden Stille, bevor der Schlusssatz kommt.</a:t>
+            </a:r>
+          </a:p>
+          <a:p>
+            <a:pPr>
+              <a:spcBef>
+                <a:spcPts val="400"/>
+              </a:spcBef>
+            </a:pPr>
+            <a:r>
+              <a:rPr lang="de-DE" sz="1200" dirty="0"/>
+              <a:t>Falls jemand einwirft, 0,581 sei doch auch kaum besser als Zufall: zustimmen und nachlegen — „Richtig, und das ist der zweite Punkt: Selbst die geschönte Zahl trägt keine Strategie. Die Accuracy liegt auch dort mit 54,7 Prozent unter ihrer Baseline von 55,9 Prozent.“</a:t>
+            </a:r>
+          </a:p>
+          <a:p>
+            <a:pPr>
+              <a:spcBef>
+                <a:spcPts val="400"/>
+              </a:spcBef>
+            </a:pPr>
+            <a:r>
+              <a:rPr lang="de-DE" sz="1200" dirty="0"/>
+              <a:t>Falls nach der Reproduzierbarkeit gefragt wird: Die Tabelle stammt aus scripts/validation_experiments.py, die Zahlen liegen als models/validation_experiments.json im Repository.</a:t>
             </a:r>
           </a:p>
           <a:p>
@@ -2270,7 +2336,7 @@
             </a:pPr>
             <a:r>
               <a:rPr lang="de-DE" sz="1200" b="1" dirty="0"/>
-              <a:t>STATION 2 · MARKTANALYSE  (ca. 30 Sek)</a:t>
+              <a:t>ÜBERLEITUNG</a:t>
             </a:r>
           </a:p>
           <a:p>
@@ -2281,293 +2347,7 @@
             </a:pPr>
             <a:r>
               <a:rPr lang="de-DE" sz="1200" dirty="0"/>
-              <a:t>„Der Candlestick-Chart: Jede Kerze ist ein Handelstag, der Körper zeigt Eröffnung und Schluss, die Dochte Hoch und Tief. Dazu die drei gleitenden Durchschnitte über 20, 50 und 200 Tage. Und darunter der Drawdown — der Abstand zum letzten Allzeithoch. Das sind zwei der acht Features, live berechnet.“</a:t>
-            </a:r>
-          </a:p>
-          <a:p>
-            <a:pPr>
-              <a:spcBef>
-                <a:spcPts val="1200"/>
-              </a:spcBef>
-            </a:pPr>
-            <a:r>
-              <a:rPr lang="de-DE" sz="1200" b="1" dirty="0"/>
-              <a:t>STATION 3 · ML-INSIGHTS: KORRELATION  (ca. 15 Sek)</a:t>
-            </a:r>
-          </a:p>
-          <a:p>
-            <a:pPr>
-              <a:spcBef>
-                <a:spcPts val="400"/>
-              </a:spcBef>
-            </a:pPr>
-            <a:r>
-              <a:rPr lang="de-DE" sz="1200" dirty="0"/>
-              <a:t>„Hier die Korrelationsmatrix. Je dunkler ein Feld, desto stärker hängen zwei Merkmale zusammen. Wichtig ist, was man hier NICHT sieht: keine tiefdunklen Blöcke abseits der Diagonale. Also kein Multikollinearitätsproblem.“</a:t>
-            </a:r>
-          </a:p>
-          <a:p>
-            <a:pPr>
-              <a:spcBef>
-                <a:spcPts val="1200"/>
-              </a:spcBef>
-            </a:pPr>
-            <a:r>
-              <a:rPr lang="de-DE" sz="1200" b="1" dirty="0"/>
-              <a:t>STATION 4 · KONFUSIONSMATRIX &amp; ROC  (ca. 40 Sek)  ← ersetzt die alte Folie</a:t>
-            </a:r>
-          </a:p>
-          <a:p>
-            <a:pPr>
-              <a:spcBef>
-                <a:spcPts val="400"/>
-              </a:spcBef>
-            </a:pPr>
-            <a:r>
-              <a:rPr lang="de-DE" sz="1200" dirty="0"/>
-              <a:t>„Und hier sind die Zahlen von eben, interaktiv. Die Konfusionsmatrix zeigt, welche Art von Fehlern das Modell macht: Es tippt fast immer auf ‚steigend‘, weil 59 Prozent des Testzeitraums steigend waren. Genau deshalb ist Accuracy irreführend — sie belohnt das Nachplappern der Mehrheit.“</a:t>
-            </a:r>
-          </a:p>
-          <a:p>
-            <a:pPr>
-              <a:spcBef>
-                <a:spcPts val="400"/>
-              </a:spcBef>
-            </a:pPr>
-            <a:r>
-              <a:rPr lang="de-DE" sz="1200" dirty="0"/>
-              <a:t>„Daneben die ROC-Kurve. Die Diagonale hier ist der reine Zufall. Und unsere Kurve liegt fast darauf. Nicht dramatisch, aber eindeutig: ein sehr schwaches Trennsignal.“</a:t>
-            </a:r>
-          </a:p>
-          <a:p>
-            <a:pPr>
-              <a:spcBef>
-                <a:spcPts val="1200"/>
-              </a:spcBef>
-            </a:pPr>
-            <a:r>
-              <a:rPr lang="de-DE" sz="1200" b="1" dirty="0"/>
-              <a:t>STATION 5 · LERNKURVE  (ca. 40 Sek)  ← ersetzt die alte Folie</a:t>
-            </a:r>
-          </a:p>
-          <a:p>
-            <a:pPr>
-              <a:spcBef>
-                <a:spcPts val="400"/>
-              </a:spcBef>
-            </a:pPr>
-            <a:r>
-              <a:rPr lang="de-DE" sz="1200" dirty="0"/>
-              <a:t>„Die Lernkurve beantwortet die Frage: Liegt es am Modell oder an den Daten? Und hier sagt die App es selbst, lest die Diagnose mit: hohe Varianz, Overfitting-Tendenz. Trainings-AUC 0,637 gegen Validierung 0,525 — eine Lücke von 0,11. Das Modell lernt also Muster, die es nicht generalisieren kann.“</a:t>
-            </a:r>
-          </a:p>
-          <a:p>
-            <a:pPr>
-              <a:spcBef>
-                <a:spcPts val="400"/>
-              </a:spcBef>
-            </a:pPr>
-            <a:r>
-              <a:rPr lang="de-DE" sz="1200" dirty="0"/>
-              <a:t>„Jetzt kommt der interessante Teil. Normalerweise heißt Varianz: mehr Daten helfen. Hier nicht. Schaut auf die Validierungskurve — 0,530, dann 0,504, dann 0,498, dann 0,525. Über die 2,3-fache Datenmenge bewegt sie sich nicht. Die Lücke schließt sich von oben, weil der Trainings-Score fällt. Nicht von unten, weil das Modell besser wird.“</a:t>
-            </a:r>
-          </a:p>
-          <a:p>
-            <a:pPr>
-              <a:spcBef>
-                <a:spcPts val="400"/>
-              </a:spcBef>
-            </a:pPr>
-            <a:r>
-              <a:rPr lang="de-DE" sz="1200" dirty="0"/>
-              <a:t>„Was hier overfittet wird, ist also Rauschen — kein untersampeltes Signal. Genau das sagt die Effizienzmarkthypothese von Fama voraus.“</a:t>
-            </a:r>
-          </a:p>
-          <a:p>
-            <a:pPr>
-              <a:spcBef>
-                <a:spcPts val="1200"/>
-              </a:spcBef>
-            </a:pPr>
-            <a:r>
-              <a:rPr lang="de-DE" sz="1200" b="1" dirty="0"/>
-              <a:t>WICHTIG BEI DIESER STATION</a:t>
-            </a:r>
-          </a:p>
-          <a:p>
-            <a:pPr>
-              <a:spcBef>
-                <a:spcPts val="400"/>
-              </a:spcBef>
-            </a:pPr>
-            <a:r>
-              <a:rPr lang="de-DE" sz="1200" dirty="0"/>
-              <a:t>Die App zeigt hier sichtbar „Hohe Varianz (Overfitting-Tendenz)“. Benenne das selbst und zuerst — wer die Lücke im Chart sieht und dich sie zugeben hört, wertet es als Souveränität. Wer sie sieht, während du sie verschweigst, wertet es als Lücke im Verständnis.</a:t>
-            </a:r>
-          </a:p>
-          <a:p>
-            <a:pPr>
-              <a:spcBef>
-                <a:spcPts val="1200"/>
-              </a:spcBef>
-            </a:pPr>
-            <a:r>
-              <a:rPr lang="de-DE" sz="1200" b="1" dirty="0"/>
-              <a:t>STATION 6 · ERKLÄRBARKEIT / SHAP  (ca. 30 Sek)  ← ersetzt die alte Folie</a:t>
-            </a:r>
-          </a:p>
-          <a:p>
-            <a:pPr>
-              <a:spcBef>
-                <a:spcPts val="400"/>
-              </a:spcBef>
-            </a:pPr>
-            <a:r>
-              <a:rPr lang="de-DE" sz="1200" dirty="0"/>
-              <a:t>„Zwei Sichten auf dieselbe Frage: Worauf schaut das Modell? Links die Feature Importance — vereinfacht, wie oft ein Merkmal für eine Trennung benutzt wurde. Rechts SHAP, ein Verfahren aus der Spieltheorie, das für jede einzelne Vorhersage ausrechnet, wie viel jedes Merkmal beigetragen hat.“</a:t>
-            </a:r>
-          </a:p>
-          <a:p>
-            <a:pPr>
-              <a:spcBef>
-                <a:spcPts val="400"/>
-              </a:spcBef>
-            </a:pPr>
-            <a:r>
-              <a:rPr lang="de-DE" sz="1200" dirty="0"/>
-              <a:t>„Beide sagen dasselbe: Drawdown und Volatilität prägen das Modell stärker als reine Renditen. Risiko schlägt Rendite. Aber Vorsicht — das erklärt, wie das Modell entscheidet. Es beweist keine Ursache und keinen wirtschaftlichen Nutzen.“</a:t>
-            </a:r>
-          </a:p>
-          <a:p>
-            <a:pPr>
-              <a:spcBef>
-                <a:spcPts val="1200"/>
-              </a:spcBef>
-            </a:pPr>
-            <a:r>
-              <a:rPr lang="de-DE" sz="1200" b="1" dirty="0"/>
-              <a:t>STATION 7 · KAPITAL-KOMPASS  (ca. 30 Sek)</a:t>
-            </a:r>
-          </a:p>
-          <a:p>
-            <a:pPr>
-              <a:spcBef>
-                <a:spcPts val="400"/>
-              </a:spcBef>
-            </a:pPr>
-            <a:r>
-              <a:rPr lang="de-DE" sz="1200" dirty="0"/>
-              <a:t>„Jetzt wird es praktisch. Ich gebe Kapital, Risikotoleranz und Stop-Loss-Distanz ein — ein Stop-Loss ist die Verlustgrenze, bei der automatisch verkauft wird. Die App rechnet live den maximalen Risikobetrag und die passende Positionsgröße aus. Das ist keine Prognose, das ist Risikomathematik — und die funktioniert unabhängig davon, wie schwach das Modell ist.“</a:t>
-            </a:r>
-          </a:p>
-          <a:p>
-            <a:pPr>
-              <a:spcBef>
-                <a:spcPts val="1200"/>
-              </a:spcBef>
-            </a:pPr>
-            <a:r>
-              <a:rPr lang="de-DE" sz="1200" b="1" dirty="0"/>
-              <a:t>STATION 8 · PORTFOLIO-SIMULATOR  (ca. 25 Sek)</a:t>
-            </a:r>
-          </a:p>
-          <a:p>
-            <a:pPr>
-              <a:spcBef>
-                <a:spcPts val="400"/>
-              </a:spcBef>
-            </a:pPr>
-            <a:r>
-              <a:rPr lang="de-DE" sz="1200" dirty="0"/>
-              <a:t>„Kapital auf mehrere Titel verteilen, Gewichte live verändern. Der Herfindahl-Index unten misst die Konzentration: je höher, desto mehr hängt alles an einem einzigen Titel.“</a:t>
-            </a:r>
-          </a:p>
-          <a:p>
-            <a:pPr>
-              <a:spcBef>
-                <a:spcPts val="1200"/>
-              </a:spcBef>
-            </a:pPr>
-            <a:r>
-              <a:rPr lang="de-DE" sz="1200" b="1" dirty="0"/>
-              <a:t>STATION 9 · METHODIK &amp; EXPORT  (ca. 15 Sek)</a:t>
-            </a:r>
-          </a:p>
-          <a:p>
-            <a:pPr>
-              <a:spcBef>
-                <a:spcPts val="400"/>
-              </a:spcBef>
-            </a:pPr>
-            <a:r>
-              <a:rPr lang="de-DE" sz="1200" dirty="0"/>
-              <a:t>„Und hier ist der QUA³CK-Prozess selbst interaktiv erklärt, plus Export des kompletten Berichts als PDF, CSV oder ZIP.“</a:t>
-            </a:r>
-          </a:p>
-          <a:p>
-            <a:pPr>
-              <a:spcBef>
-                <a:spcPts val="1200"/>
-              </a:spcBef>
-            </a:pPr>
-            <a:r>
-              <a:rPr lang="de-DE" sz="1200" b="1" dirty="0"/>
-              <a:t>REGIE / TECHNIK</a:t>
-            </a:r>
-          </a:p>
-          <a:p>
-            <a:pPr>
-              <a:spcBef>
-                <a:spcPts val="400"/>
-              </a:spcBef>
-            </a:pPr>
-            <a:r>
-              <a:rPr lang="de-DE" sz="1200" dirty="0"/>
-              <a:t>Vorher: App starten, Ticker SPY vorladen, Browser-Zoom 110 Prozent, Zeitraum 1 Jahr, ML-Insights-Seite einmal aufrufen, damit sie im Cache ist. Nicht scrollen, während gesprochen wird.</a:t>
-            </a:r>
-          </a:p>
-          <a:p>
-            <a:pPr>
-              <a:spcBef>
-                <a:spcPts val="400"/>
-              </a:spcBef>
-            </a:pPr>
-            <a:r>
-              <a:rPr lang="de-DE" sz="1200" dirty="0"/>
-              <a:t>Etwa 10 Sekunden Puffer für Zwischenfragen sind eingerechnet. Station 5 ist die längste — wenn du bei Station 6 über 21:40 liegst, Stationen 8 und 9 in je einem Satz abhandeln.</a:t>
-            </a:r>
-          </a:p>
-          <a:p>
-            <a:pPr>
-              <a:spcBef>
-                <a:spcPts val="400"/>
-              </a:spcBef>
-            </a:pPr>
-            <a:r>
-              <a:rPr lang="de-DE" sz="1200" dirty="0"/>
-              <a:t>AUSFALLPLAN: Bei Ladezeit über 3 Sekunden oder Fehlermeldung sofort auf die Backup-Folien im Anhang wechseln — Stationen 4 bis 6 liegen als Folien 29, 30 und 31, die App-Screenshots als Folien 32 bis 37. Nicht kommentieren, dass etwas ausgefallen ist. Einfach weitersprechen.</a:t>
-            </a:r>
-          </a:p>
-          <a:p>
-            <a:pPr>
-              <a:spcBef>
-                <a:spcPts val="1200"/>
-              </a:spcBef>
-            </a:pPr>
-            <a:r>
-              <a:rPr lang="de-DE" sz="1200" b="1" dirty="0"/>
-              <a:t>ÜBERLEITUNG</a:t>
-            </a:r>
-          </a:p>
-          <a:p>
-            <a:pPr>
-              <a:spcBef>
-                <a:spcPts val="400"/>
-              </a:spcBef>
-            </a:pPr>
-            <a:r>
-              <a:rPr lang="de-DE" sz="1200" dirty="0"/>
-              <a:t>„Zurück zu den Folien. Bevor ich das Fazit ziehe: Fragen zum Modell oder zur App?“</a:t>
+              <a:t>„Diese Zahlen zeige ich euch jetzt nicht auf Folien — sondern dort, wo sie herkommen. Ich wechsle in die App.“</a:t>
             </a:r>
           </a:p>
         </p:txBody>
@@ -2821,7 +2601,7 @@
             </a:pPr>
             <a:r>
               <a:rPr lang="de-DE" sz="1200" b="1" dirty="0"/>
-              <a:t>TIMING  22:40–23:25  ·  45 Sek  ·  FRAGEFENSTER II</a:t>
+              <a:t>TIMING  18:10–22:40  ·  ca. 270 Sek  ·  LIVE-DEMO  (Kernstück)</a:t>
             </a:r>
           </a:p>
           <a:p>
@@ -2832,7 +2612,7 @@
             </a:pPr>
             <a:r>
               <a:rPr lang="de-DE" sz="1200" b="1" dirty="0"/>
-              <a:t>SPRECHTEXT</a:t>
+              <a:t>EINSTIEG  (ca. 10 Sek)</a:t>
             </a:r>
           </a:p>
           <a:p>
@@ -2843,7 +2623,7 @@
             </a:pPr>
             <a:r>
               <a:rPr lang="de-DE" sz="1200" dirty="0"/>
-              <a:t>Ihr habt jetzt die Zahlen gesehen und die App bedient. Bevor ich das Fazit ziehe: Was möchtet ihr zum Modell oder zur Anwendung wissen?</a:t>
+              <a:t>Phase sieben: Knowledge Transfer. Sechs Stationen, viereinhalb Minuten. Fragt hier gern direkt dazwischen — dafür ist Zeit eingeplant.</a:t>
             </a:r>
           </a:p>
           <a:p>
@@ -2854,7 +2634,7 @@
             </a:pPr>
             <a:r>
               <a:rPr lang="de-DE" sz="1200" b="1" dirty="0"/>
-              <a:t>MODERATION</a:t>
+              <a:t>STATION 1 · START  (ca. 25 Sek)</a:t>
             </a:r>
           </a:p>
           <a:p>
@@ -2865,7 +2645,18 @@
             </a:pPr>
             <a:r>
               <a:rPr lang="de-DE" sz="1200" dirty="0"/>
-              <a:t>Das ist das wahrscheinlichste Fragefenster des Vortrags — hier kommt fast sicher „Warum nur 0,519?“. Die ausformulierte Antwort steht in den Notizen zu Folie 28. Belegfolien 29 bis 31 sind bereit.</a:t>
+              <a:t>„Das ist die Startseite. Oben das aktuelle Signal, darunter die Kennzahlen und der Kursverlauf. Wichtig: Das Signal ist eine Einordnung, keine Kaufempfehlung — der Hinweis steht bewusst direkt daneben.“</a:t>
+            </a:r>
+          </a:p>
+          <a:p>
+            <a:pPr>
+              <a:spcBef>
+                <a:spcPts val="1200"/>
+              </a:spcBef>
+            </a:pPr>
+            <a:r>
+              <a:rPr lang="de-DE" sz="1200" b="1" dirty="0"/>
+              <a:t>STATION 2 · MARKTANALYSE  (ca. 30 Sek)</a:t>
             </a:r>
           </a:p>
           <a:p>
@@ -2876,7 +2667,7 @@
             </a:pPr>
             <a:r>
               <a:rPr lang="de-DE" sz="1200" dirty="0"/>
-              <a:t>Wenn niemand fragt: „Was mich selbst am meisten überrascht hat, war, dass Drawdown und Volatilität wichtiger sind als die Renditen — Risiko trägt mehr Information als Ertrag.“ Das lädt zur Diskussion ein und leitet gleichzeitig weiter.</a:t>
+              <a:t>„Der Candlestick-Chart: Jede Kerze ist ein Handelstag, der Körper zeigt Eröffnung und Schluss, die Dochte Hoch und Tief. Dazu die drei gleitenden Durchschnitte über 20, 50 und 200 Tage. Und darunter der Drawdown — der Abstand zum letzten Allzeithoch. Das sind zwei der acht Features, live berechnet.“</a:t>
             </a:r>
           </a:p>
           <a:p>
@@ -2887,7 +2678,7 @@
             </a:pPr>
             <a:r>
               <a:rPr lang="de-DE" sz="1200" b="1" dirty="0"/>
-              <a:t>ZEITDISZIPLIN</a:t>
+              <a:t>STATION 3 · ML-INSIGHTS: KORRELATION  (ca. 15 Sek)</a:t>
             </a:r>
           </a:p>
           <a:p>
@@ -2898,7 +2689,7 @@
             </a:pPr>
             <a:r>
               <a:rPr lang="de-DE" sz="1200" dirty="0"/>
-              <a:t>Harte Grenze 45 Sekunden. Alles Weitere in die offene Runde nach Folie 27 verschieben — die kommt in dreieinhalb Minuten.</a:t>
+              <a:t>„Hier die Korrelationsmatrix. Je dunkler ein Feld, desto stärker hängen zwei Merkmale zusammen. Wichtig ist, was man hier NICHT sieht: keine tiefdunklen Blöcke abseits der Diagonale. Also kein Multikollinearitätsproblem.“</a:t>
             </a:r>
           </a:p>
           <a:p>
@@ -2909,7 +2700,7 @@
             </a:pPr>
             <a:r>
               <a:rPr lang="de-DE" sz="1200" b="1" dirty="0"/>
-              <a:t>ÜBERLEITUNG</a:t>
+              <a:t>STATION 4 · KONFUSIONSMATRIX &amp; ROC  (ca. 40 Sek)  ← ersetzt die alte Folie</a:t>
             </a:r>
           </a:p>
           <a:p>
@@ -2920,7 +2711,249 @@
             </a:pPr>
             <a:r>
               <a:rPr lang="de-DE" sz="1200" dirty="0"/>
-              <a:t>„Dann rechnen wir ab: Was ist aus meinen drei Hypothesen geworden?“</a:t>
+              <a:t>„Und hier sind die Zahlen von eben, interaktiv. Die Konfusionsmatrix zeigt, welche Art von Fehlern das Modell macht: Es tippt fast immer auf ‚steigend‘, weil 59 Prozent des Testzeitraums steigend waren. Genau deshalb ist Accuracy irreführend — sie belohnt das Nachplappern der Mehrheit.“</a:t>
+            </a:r>
+          </a:p>
+          <a:p>
+            <a:pPr>
+              <a:spcBef>
+                <a:spcPts val="400"/>
+              </a:spcBef>
+            </a:pPr>
+            <a:r>
+              <a:rPr lang="de-DE" sz="1200" dirty="0"/>
+              <a:t>„Daneben die ROC-Kurve. Die Diagonale hier ist der reine Zufall. Und unsere Kurve liegt fast darauf. Nicht dramatisch, aber eindeutig: ein sehr schwaches Trennsignal.“</a:t>
+            </a:r>
+          </a:p>
+          <a:p>
+            <a:pPr>
+              <a:spcBef>
+                <a:spcPts val="1200"/>
+              </a:spcBef>
+            </a:pPr>
+            <a:r>
+              <a:rPr lang="de-DE" sz="1200" b="1" dirty="0"/>
+              <a:t>STATION 5 · LERNKURVE  (ca. 40 Sek)  ← ersetzt die alte Folie</a:t>
+            </a:r>
+          </a:p>
+          <a:p>
+            <a:pPr>
+              <a:spcBef>
+                <a:spcPts val="400"/>
+              </a:spcBef>
+            </a:pPr>
+            <a:r>
+              <a:rPr lang="de-DE" sz="1200" dirty="0"/>
+              <a:t>„Die Lernkurve beantwortet die Frage: Liegt es am Modell oder an den Daten? Und hier sagt die App es selbst, lest die Diagnose mit: hohe Varianz, Overfitting-Tendenz. Trainings-AUC 0,637 gegen Validierung 0,525 — eine Lücke von 0,11. Das Modell lernt also Muster, die es nicht generalisieren kann.“</a:t>
+            </a:r>
+          </a:p>
+          <a:p>
+            <a:pPr>
+              <a:spcBef>
+                <a:spcPts val="400"/>
+              </a:spcBef>
+            </a:pPr>
+            <a:r>
+              <a:rPr lang="de-DE" sz="1200" dirty="0"/>
+              <a:t>„Jetzt kommt der interessante Teil. Normalerweise heißt Varianz: mehr Daten helfen. Hier nicht. Schaut auf die Validierungskurve — 0,530, dann 0,504, dann 0,498, dann 0,525. Über die 2,3-fache Datenmenge bewegt sie sich nicht. Die Lücke schließt sich von oben, weil der Trainings-Score fällt. Nicht von unten, weil das Modell besser wird.“</a:t>
+            </a:r>
+          </a:p>
+          <a:p>
+            <a:pPr>
+              <a:spcBef>
+                <a:spcPts val="400"/>
+              </a:spcBef>
+            </a:pPr>
+            <a:r>
+              <a:rPr lang="de-DE" sz="1200" dirty="0"/>
+              <a:t>„Was hier overfittet wird, ist also Rauschen — kein untersampeltes Signal. Genau das sagt die Effizienzmarkthypothese von Fama voraus.“</a:t>
+            </a:r>
+          </a:p>
+          <a:p>
+            <a:pPr>
+              <a:spcBef>
+                <a:spcPts val="1200"/>
+              </a:spcBef>
+            </a:pPr>
+            <a:r>
+              <a:rPr lang="de-DE" sz="1200" b="1" dirty="0"/>
+              <a:t>WICHTIG BEI DIESER STATION</a:t>
+            </a:r>
+          </a:p>
+          <a:p>
+            <a:pPr>
+              <a:spcBef>
+                <a:spcPts val="400"/>
+              </a:spcBef>
+            </a:pPr>
+            <a:r>
+              <a:rPr lang="de-DE" sz="1200" dirty="0"/>
+              <a:t>Die App zeigt hier sichtbar „Hohe Varianz (Overfitting-Tendenz)“. Benenne das selbst und zuerst — wer die Lücke im Chart sieht und dich sie zugeben hört, wertet es als Souveränität. Wer sie sieht, während du sie verschweigst, wertet es als Lücke im Verständnis.</a:t>
+            </a:r>
+          </a:p>
+          <a:p>
+            <a:pPr>
+              <a:spcBef>
+                <a:spcPts val="1200"/>
+              </a:spcBef>
+            </a:pPr>
+            <a:r>
+              <a:rPr lang="de-DE" sz="1200" b="1" dirty="0"/>
+              <a:t>STATION 6 · ERKLÄRBARKEIT / SHAP  (ca. 30 Sek)  ← ersetzt die alte Folie</a:t>
+            </a:r>
+          </a:p>
+          <a:p>
+            <a:pPr>
+              <a:spcBef>
+                <a:spcPts val="400"/>
+              </a:spcBef>
+            </a:pPr>
+            <a:r>
+              <a:rPr lang="de-DE" sz="1200" dirty="0"/>
+              <a:t>„Zwei Sichten auf dieselbe Frage: Worauf schaut das Modell? Links die Feature Importance — vereinfacht, wie oft ein Merkmal für eine Trennung benutzt wurde. Rechts SHAP, ein Verfahren aus der Spieltheorie, das für jede einzelne Vorhersage ausrechnet, wie viel jedes Merkmal beigetragen hat.“</a:t>
+            </a:r>
+          </a:p>
+          <a:p>
+            <a:pPr>
+              <a:spcBef>
+                <a:spcPts val="400"/>
+              </a:spcBef>
+            </a:pPr>
+            <a:r>
+              <a:rPr lang="de-DE" sz="1200" dirty="0"/>
+              <a:t>„Beide sagen dasselbe: Drawdown und Volatilität prägen das Modell stärker als reine Renditen. Risiko schlägt Rendite. Aber Vorsicht — das erklärt, wie das Modell entscheidet. Es beweist keine Ursache und keinen wirtschaftlichen Nutzen.“</a:t>
+            </a:r>
+          </a:p>
+          <a:p>
+            <a:pPr>
+              <a:spcBef>
+                <a:spcPts val="1200"/>
+              </a:spcBef>
+            </a:pPr>
+            <a:r>
+              <a:rPr lang="de-DE" sz="1200" b="1" dirty="0"/>
+              <a:t>STATION 7 · KAPITAL-KOMPASS  (ca. 30 Sek)</a:t>
+            </a:r>
+          </a:p>
+          <a:p>
+            <a:pPr>
+              <a:spcBef>
+                <a:spcPts val="400"/>
+              </a:spcBef>
+            </a:pPr>
+            <a:r>
+              <a:rPr lang="de-DE" sz="1200" dirty="0"/>
+              <a:t>„Jetzt wird es praktisch. Ich gebe Kapital, Risikotoleranz und Stop-Loss-Distanz ein — ein Stop-Loss ist die Verlustgrenze, bei der automatisch verkauft wird. Die App rechnet live den maximalen Risikobetrag und die passende Positionsgröße aus. Das ist keine Prognose, das ist Risikomathematik — und die funktioniert unabhängig davon, wie schwach das Modell ist.“</a:t>
+            </a:r>
+          </a:p>
+          <a:p>
+            <a:pPr>
+              <a:spcBef>
+                <a:spcPts val="1200"/>
+              </a:spcBef>
+            </a:pPr>
+            <a:r>
+              <a:rPr lang="de-DE" sz="1200" b="1" dirty="0"/>
+              <a:t>STATION 8 · PORTFOLIO-SIMULATOR  (ca. 25 Sek)</a:t>
+            </a:r>
+          </a:p>
+          <a:p>
+            <a:pPr>
+              <a:spcBef>
+                <a:spcPts val="400"/>
+              </a:spcBef>
+            </a:pPr>
+            <a:r>
+              <a:rPr lang="de-DE" sz="1200" dirty="0"/>
+              <a:t>„Kapital auf mehrere Titel verteilen, Gewichte live verändern. Der Herfindahl-Index unten misst die Konzentration: je höher, desto mehr hängt alles an einem einzigen Titel.“</a:t>
+            </a:r>
+          </a:p>
+          <a:p>
+            <a:pPr>
+              <a:spcBef>
+                <a:spcPts val="1200"/>
+              </a:spcBef>
+            </a:pPr>
+            <a:r>
+              <a:rPr lang="de-DE" sz="1200" b="1" dirty="0"/>
+              <a:t>STATION 9 · METHODIK &amp; EXPORT  (ca. 15 Sek)</a:t>
+            </a:r>
+          </a:p>
+          <a:p>
+            <a:pPr>
+              <a:spcBef>
+                <a:spcPts val="400"/>
+              </a:spcBef>
+            </a:pPr>
+            <a:r>
+              <a:rPr lang="de-DE" sz="1200" dirty="0"/>
+              <a:t>„Und hier ist der QUA³CK-Prozess selbst interaktiv erklärt, plus Export des kompletten Berichts als PDF, CSV oder ZIP.“</a:t>
+            </a:r>
+          </a:p>
+          <a:p>
+            <a:pPr>
+              <a:spcBef>
+                <a:spcPts val="1200"/>
+              </a:spcBef>
+            </a:pPr>
+            <a:r>
+              <a:rPr lang="de-DE" sz="1200" b="1" dirty="0"/>
+              <a:t>REGIE / TECHNIK</a:t>
+            </a:r>
+          </a:p>
+          <a:p>
+            <a:pPr>
+              <a:spcBef>
+                <a:spcPts val="400"/>
+              </a:spcBef>
+            </a:pPr>
+            <a:r>
+              <a:rPr lang="de-DE" sz="1200" dirty="0"/>
+              <a:t>Vorher: App starten, Ticker SPY vorladen, Browser-Zoom 110 Prozent, Zeitraum 1 Jahr, ML-Insights-Seite einmal aufrufen, damit sie im Cache ist. Nicht scrollen, während gesprochen wird.</a:t>
+            </a:r>
+          </a:p>
+          <a:p>
+            <a:pPr>
+              <a:spcBef>
+                <a:spcPts val="400"/>
+              </a:spcBef>
+            </a:pPr>
+            <a:r>
+              <a:rPr lang="de-DE" sz="1200" dirty="0"/>
+              <a:t>Etwa 10 Sekunden Puffer für Zwischenfragen sind eingerechnet. Station 5 ist die längste — wenn du bei Station 6 über 21:40 liegst, Stationen 8 und 9 in je einem Satz abhandeln.</a:t>
+            </a:r>
+          </a:p>
+          <a:p>
+            <a:pPr>
+              <a:spcBef>
+                <a:spcPts val="400"/>
+              </a:spcBef>
+            </a:pPr>
+            <a:r>
+              <a:rPr lang="de-DE" sz="1200" dirty="0"/>
+              <a:t>AUSFALLPLAN: Bei Ladezeit über 3 Sekunden oder Fehlermeldung sofort auf die Backup-Folien im Anhang wechseln — Stationen 4 bis 6 liegen als Folien 29, 30 und 31, die App-Screenshots als Folien 32 bis 37. Nicht kommentieren, dass etwas ausgefallen ist. Einfach weitersprechen.</a:t>
+            </a:r>
+          </a:p>
+          <a:p>
+            <a:pPr>
+              <a:spcBef>
+                <a:spcPts val="1200"/>
+              </a:spcBef>
+            </a:pPr>
+            <a:r>
+              <a:rPr lang="de-DE" sz="1200" b="1" dirty="0"/>
+              <a:t>ÜBERLEITUNG</a:t>
+            </a:r>
+          </a:p>
+          <a:p>
+            <a:pPr>
+              <a:spcBef>
+                <a:spcPts val="400"/>
+              </a:spcBef>
+            </a:pPr>
+            <a:r>
+              <a:rPr lang="de-DE" sz="1200" dirty="0"/>
+              <a:t>„Zurück zu den Folien. Bevor ich das Fazit ziehe: Fragen zum Modell oder zur App?“</a:t>
             </a:r>
           </a:p>
         </p:txBody>
@@ -3003,7 +3036,7 @@
             </a:pPr>
             <a:r>
               <a:rPr lang="de-DE" sz="1200" b="1" dirty="0"/>
-              <a:t>TIMING  23:25–24:10  ·  ca. 45 Sek</a:t>
+              <a:t>TIMING  22:40–23:25  ·  45 Sek  ·  FRAGEFENSTER II</a:t>
             </a:r>
           </a:p>
           <a:p>
@@ -3025,7 +3058,18 @@
             </a:pPr>
             <a:r>
               <a:rPr lang="de-DE" sz="1200" dirty="0"/>
-              <a:t>H1, das Modell: nicht bestätigt. AUC 0,519 im Out-of-Time-Test, 0,514 über vier Walk-forward-Folds. Kein belastbares Handelssignal. Und wichtig für die Bewertung: „nicht bestätigt“ heißt hier falsifiziert, nicht ungeprüft. H1 war so formuliert, dass sie scheitern konnte — genau das macht sie zu einer wissenschaftlichen Hypothese. Eine Hypothese, die nicht scheitern kann, ist keine.</a:t>
+              <a:t>Ihr habt jetzt die Zahlen gesehen und die App bedient. Bevor ich das Fazit ziehe: Was möchtet ihr zum Modell oder zur Anwendung wissen?</a:t>
+            </a:r>
+          </a:p>
+          <a:p>
+            <a:pPr>
+              <a:spcBef>
+                <a:spcPts val="1200"/>
+              </a:spcBef>
+            </a:pPr>
+            <a:r>
+              <a:rPr lang="de-DE" sz="1200" b="1" dirty="0"/>
+              <a:t>MODERATION</a:t>
             </a:r>
           </a:p>
           <a:p>
@@ -3036,7 +3080,7 @@
             </a:pPr>
             <a:r>
               <a:rPr lang="de-DE" sz="1200" dirty="0"/>
-              <a:t>H2, die Zugänglichkeit: bestätigt — und das habt ihr gerade selbst überprüft. Die App erklärt jeden Schritt, inklusive eigener Methodik-Seite und Lernstudio.</a:t>
+              <a:t>Das ist das wahrscheinlichste Fragefenster des Vortrags — hier kommt fast sicher „Warum nur 0,519?“. Die ausformulierte Antwort steht in den Notizen zu Folie 28. Belegfolien 29 bis 31 sind bereit.</a:t>
             </a:r>
           </a:p>
           <a:p>
@@ -3047,7 +3091,7 @@
             </a:pPr>
             <a:r>
               <a:rPr lang="de-DE" sz="1200" dirty="0"/>
-              <a:t>H3, die Kombination: teilweise bestätigt. ML-Signal, Indikatoren und Portfolio-Werkzeuge ergeben zusammen ein sinnvolles Werkzeug — aber ich habe keine formale Nutzerstudie durchgeführt. Und ohne Beleg sage ich nicht „bestätigt“, sondern „teilweise“.</a:t>
+              <a:t>Wenn niemand fragt: „Was mich selbst am meisten überrascht hat, war, dass Drawdown und Volatilität wichtiger sind als die Renditen — Risiko trägt mehr Information als Ertrag.“ Das lädt zur Diskussion ein und leitet gleichzeitig weiter.</a:t>
             </a:r>
           </a:p>
           <a:p>
@@ -3058,7 +3102,7 @@
             </a:pPr>
             <a:r>
               <a:rPr lang="de-DE" sz="1200" b="1" dirty="0"/>
-              <a:t>REGIE</a:t>
+              <a:t>ZEITDISZIPLIN</a:t>
             </a:r>
           </a:p>
           <a:p>
@@ -3069,7 +3113,7 @@
             </a:pPr>
             <a:r>
               <a:rPr lang="de-DE" sz="1200" dirty="0"/>
-              <a:t>Genau in dieser Reihenfolge: erst die Absage, dann die beiden Erfolge. Bei H2 ans Publikum verweisen — die Demo ist gerade zwei Minuten her, das ist dein stärkster Beleg.</a:t>
+              <a:t>Harte Grenze 45 Sekunden. Alles Weitere in die offene Runde nach Folie 27 verschieben — die kommt in dreieinhalb Minuten.</a:t>
             </a:r>
           </a:p>
           <a:p>
@@ -3091,7 +3135,7 @@
             </a:pPr>
             <a:r>
               <a:rPr lang="de-DE" sz="1200" dirty="0"/>
-              <a:t>„Dazu gehören vier Grenzen, die ich offen benenne.“</a:t>
+              <a:t>„Dann rechnen wir ab: Was ist aus meinen drei Hypothesen geworden?“</a:t>
             </a:r>
           </a:p>
         </p:txBody>
@@ -3174,7 +3218,7 @@
             </a:pPr>
             <a:r>
               <a:rPr lang="de-DE" sz="1200" b="1" dirty="0"/>
-              <a:t>TIMING  24:10–24:55  ·  ca. 45 Sek</a:t>
+              <a:t>TIMING  23:25–24:10  ·  ca. 45 Sek</a:t>
             </a:r>
           </a:p>
           <a:p>
@@ -3196,7 +3240,7 @@
             </a:pPr>
             <a:r>
               <a:rPr lang="de-DE" sz="1200" dirty="0"/>
-              <a:t>Erstens: keine exogenen Faktoren. Zinsentscheidungen, Konjunkturdaten, Geopolitik — nichts davon steckt im Modell.</a:t>
+              <a:t>H1, das Modell: nicht bestätigt. AUC 0,519 im Out-of-Time-Test, 0,514 über vier Walk-forward-Folds. Kein belastbares Handelssignal. Und wichtig für die Bewertung: „nicht bestätigt“ heißt hier falsifiziert, nicht ungeprüft. H1 war so formuliert, dass sie scheitern konnte — genau das macht sie zu einer wissenschaftlichen Hypothese. Eine Hypothese, die nicht scheitern kann, ist keine.</a:t>
             </a:r>
           </a:p>
           <a:p>
@@ -3207,7 +3251,7 @@
             </a:pPr>
             <a:r>
               <a:rPr lang="de-DE" sz="1200" dirty="0"/>
-              <a:t>Zweitens: kein Sentiment. Die App zeigt Nachrichten an, aber ihre Tonalität ist kein ML-Feature.</a:t>
+              <a:t>H2, die Zugänglichkeit: bestätigt — und das habt ihr gerade selbst überprüft. Die App erklärt jeden Schritt, inklusive eigener Methodik-Seite und Lernstudio.</a:t>
             </a:r>
           </a:p>
           <a:p>
@@ -3218,7 +3262,18 @@
             </a:pPr>
             <a:r>
               <a:rPr lang="de-DE" sz="1200" dirty="0"/>
-              <a:t>Drittens: Das Modell ist statisch. Es trainiert sich bei neuen Daten nicht automatisch nach.</a:t>
+              <a:t>H3, die Kombination: teilweise bestätigt. ML-Signal, Indikatoren und Portfolio-Werkzeuge ergeben zusammen ein sinnvolles Werkzeug — aber ich habe keine formale Nutzerstudie durchgeführt. Und ohne Beleg sage ich nicht „bestätigt“, sondern „teilweise“.</a:t>
+            </a:r>
+          </a:p>
+          <a:p>
+            <a:pPr>
+              <a:spcBef>
+                <a:spcPts val="1200"/>
+              </a:spcBef>
+            </a:pPr>
+            <a:r>
+              <a:rPr lang="de-DE" sz="1200" b="1" dirty="0"/>
+              <a:t>REGIE</a:t>
             </a:r>
           </a:p>
           <a:p>
@@ -3229,7 +3284,18 @@
             </a:pPr>
             <a:r>
               <a:rPr lang="de-DE" sz="1200" dirty="0"/>
-              <a:t>Viertens, und das gilt für jedes Finanzmodell der Welt: Historie ist nicht Zukunft.</a:t>
+              <a:t>Genau in dieser Reihenfolge: erst die Absage, dann die beiden Erfolge. Bei H2 ans Publikum verweisen — die Demo ist gerade zwei Minuten her, das ist dein stärkster Beleg.</a:t>
+            </a:r>
+          </a:p>
+          <a:p>
+            <a:pPr>
+              <a:spcBef>
+                <a:spcPts val="1200"/>
+              </a:spcBef>
+            </a:pPr>
+            <a:r>
+              <a:rPr lang="de-DE" sz="1200" b="1" dirty="0"/>
+              <a:t>ÜBERLEITUNG</a:t>
             </a:r>
           </a:p>
           <a:p>
@@ -3240,51 +3306,7 @@
             </a:pPr>
             <a:r>
               <a:rPr lang="de-DE" sz="1200" dirty="0"/>
-              <a:t>Diese Grenzen sind kein Versagen des Projekts. Sie sind der ehrliche Abschluss eines wissenschaftlichen Projekts, das genau weiß, was es kann — und was nicht.</a:t>
-            </a:r>
-          </a:p>
-          <a:p>
-            <a:pPr>
-              <a:spcBef>
-                <a:spcPts val="1200"/>
-              </a:spcBef>
-            </a:pPr>
-            <a:r>
-              <a:rPr lang="de-DE" sz="1200" b="1" dirty="0"/>
-              <a:t>REGIE</a:t>
-            </a:r>
-          </a:p>
-          <a:p>
-            <a:pPr>
-              <a:spcBef>
-                <a:spcPts val="400"/>
-              </a:spcBef>
-            </a:pPr>
-            <a:r>
-              <a:rPr lang="de-DE" sz="1200" dirty="0"/>
-              <a:t>Kurze Pause vor dem Schlusssatz.</a:t>
-            </a:r>
-          </a:p>
-          <a:p>
-            <a:pPr>
-              <a:spcBef>
-                <a:spcPts val="1200"/>
-              </a:spcBef>
-            </a:pPr>
-            <a:r>
-              <a:rPr lang="de-DE" sz="1200" b="1" dirty="0"/>
-              <a:t>ÜBERLEITUNG</a:t>
-            </a:r>
-          </a:p>
-          <a:p>
-            <a:pPr>
-              <a:spcBef>
-                <a:spcPts val="400"/>
-              </a:spcBef>
-            </a:pPr>
-            <a:r>
-              <a:rPr lang="de-DE" sz="1200" dirty="0"/>
-              <a:t>„Was bleibt also?“</a:t>
+              <a:t>„Dazu gehören vier Grenzen, die ich offen benenne.“</a:t>
             </a:r>
           </a:p>
         </p:txBody>
@@ -3367,7 +3389,7 @@
             </a:pPr>
             <a:r>
               <a:rPr lang="de-DE" sz="1200" b="1" dirty="0"/>
-              <a:t>TIMING  24:55–25:50  ·  ca. 55 Sek</a:t>
+              <a:t>TIMING  24:10–24:55  ·  ca. 45 Sek</a:t>
             </a:r>
           </a:p>
           <a:p>
@@ -3389,7 +3411,7 @@
             </a:pPr>
             <a:r>
               <a:rPr lang="de-DE" sz="1200" dirty="0"/>
-              <a:t>Was bleibt?</a:t>
+              <a:t>Erstens: keine exogenen Faktoren. Zinsentscheidungen, Konjunkturdaten, Geopolitik — nichts davon steckt im Modell.</a:t>
             </a:r>
           </a:p>
           <a:p>
@@ -3400,7 +3422,7 @@
             </a:pPr>
             <a:r>
               <a:rPr lang="de-DE" sz="1200" dirty="0"/>
-              <a:t>Der Satz oben ist mein Kernsatz: Ein ehrliches Modell, das im Out-of-Time-Test kaum besser als Zufall ist, ist wissenschaftlich wertvoller als ein beeindruckender Wert, der nur durch Zukunftswissen zustande kam. Und heute habe ich euch beide Zahlen gezeigt — 0,519 und 0,581. Der Unterschied war kein Modell, sondern Methodik.</a:t>
+              <a:t>Zweitens: kein Sentiment. Die App zeigt Nachrichten an, aber ihre Tonalität ist kein ML-Feature.</a:t>
             </a:r>
           </a:p>
           <a:p>
@@ -3411,7 +3433,7 @@
             </a:pPr>
             <a:r>
               <a:rPr lang="de-DE" sz="1200" dirty="0"/>
-              <a:t>Damit ist das Ergebnis dieses Projekts nicht das Modell. Es ist eine Messung: Wie viel verwertbare Information steckt in rein kursbasierten technischen Indikatoren? Antwort: fast keine — und das gemessen an 190.527 Beobachtungen mit elf Jahren unangetasteter Zukunft. Das ist eine Replikation der Effizienzmarkthypothese von Fama, nicht zitiert, sondern nachgerechnet.</a:t>
+              <a:t>Drittens: Das Modell ist statisch. Es trainiert sich bei neuen Daten nicht automatisch nach.</a:t>
             </a:r>
           </a:p>
           <a:p>
@@ -3422,7 +3444,7 @@
             </a:pPr>
             <a:r>
               <a:rPr lang="de-DE" sz="1200" dirty="0"/>
-              <a:t>Technisch bleibt eine modulare Architektur mit über zwanzig fachlich getrennten Modulen statt einem Monolithen, acht vollständig kommentierte Jupyter-Notebooks — und die Zahlen 51,9 Prozent und 0,519, jederzeit reproduzierbar.</a:t>
+              <a:t>Viertens, und das gilt für jedes Finanzmodell der Welt: Historie ist nicht Zukunft.</a:t>
             </a:r>
           </a:p>
           <a:p>
@@ -3433,7 +3455,7 @@
             </a:pPr>
             <a:r>
               <a:rPr lang="de-DE" sz="1200" dirty="0"/>
-              <a:t>Und der größere Punkt: Moderne KI beschleunigt Entwicklung und Erklärung enorm. Wissenschaftliche Qualität entsteht aber genau wie früher — durch saubere Fragen, zeitliche Trennung, Baselines, reproduzierbare Tests und das offene Benennen von Grenzen.</a:t>
+              <a:t>Diese Grenzen sind kein Versagen des Projekts. Sie sind der ehrliche Abschluss eines wissenschaftlichen Projekts, das genau weiß, was es kann — und was nicht.</a:t>
             </a:r>
           </a:p>
           <a:p>
@@ -3455,7 +3477,7 @@
             </a:pPr>
             <a:r>
               <a:rPr lang="de-DE" sz="1200" dirty="0"/>
-              <a:t>Langsamste Folie des Vortrags. Das Zitat oben tatsächlich vorlesen — es ist die Botschaft, die hängenbleiben soll.</a:t>
+              <a:t>Kurze Pause vor dem Schlusssatz.</a:t>
             </a:r>
           </a:p>
           <a:p>
@@ -3477,7 +3499,7 @@
             </a:pPr>
             <a:r>
               <a:rPr lang="de-DE" sz="1200" dirty="0"/>
-              <a:t>„Wie ginge es weiter, wenn ich weitermachen würde?“</a:t>
+              <a:t>„Was bleibt also?“</a:t>
             </a:r>
           </a:p>
         </p:txBody>
@@ -3560,7 +3582,7 @@
             </a:pPr>
             <a:r>
               <a:rPr lang="de-DE" sz="1200" b="1" dirty="0"/>
-              <a:t>TIMING  25:50–26:30  ·  ca. 40 Sek</a:t>
+              <a:t>TIMING  24:55–25:50  ·  ca. 55 Sek</a:t>
             </a:r>
           </a:p>
           <a:p>
@@ -3582,7 +3604,7 @@
             </a:pPr>
             <a:r>
               <a:rPr lang="de-DE" sz="1200" dirty="0"/>
-              <a:t>Vier Ausbaustufen.</a:t>
+              <a:t>Was bleibt?</a:t>
             </a:r>
           </a:p>
           <a:p>
@@ -3593,7 +3615,7 @@
             </a:pPr>
             <a:r>
               <a:rPr lang="de-DE" sz="1200" dirty="0"/>
-              <a:t>Erstens Online Learning: Das Modell aktualisiert sich automatisch mit jedem neuen Kurstag, statt auf dem Stand des Trainings einzufrieren.</a:t>
+              <a:t>Der Satz oben ist mein Kernsatz: Ein ehrliches Modell, das im Out-of-Time-Test kaum besser als Zufall ist, ist wissenschaftlich wertvoller als ein beeindruckender Wert, der nur durch Zukunftswissen zustande kam. Und heute habe ich euch beide Zahlen gezeigt — 0,519 und 0,581. Der Unterschied war kein Modell, sondern Methodik.</a:t>
             </a:r>
           </a:p>
           <a:p>
@@ -3604,7 +3626,7 @@
             </a:pPr>
             <a:r>
               <a:rPr lang="de-DE" sz="1200" dirty="0"/>
-              <a:t>Zweitens Sentiment-Integration: die Tonalität von Nachrichten als zusätzliches Feature. Das wäre Information, die nicht schon im Kurs steckt — und damit der aussichtsreichste Hebel von allen vier.</a:t>
+              <a:t>Damit ist das Ergebnis dieses Projekts nicht das Modell. Es ist eine Messung: Wie viel verwertbare Information steckt in rein kursbasierten technischen Indikatoren? Antwort: fast keine — und das gemessen an 190.527 Beobachtungen mit elf Jahren unangetasteter Zukunft. Das ist eine Replikation der Effizienzmarkthypothese von Fama, nicht zitiert, sondern nachgerechnet.</a:t>
             </a:r>
           </a:p>
           <a:p>
@@ -3615,7 +3637,7 @@
             </a:pPr>
             <a:r>
               <a:rPr lang="de-DE" sz="1200" dirty="0"/>
-              <a:t>Drittens Multiklassen-Klassifikation: nicht nur auf oder ab, sondern stark, mäßig, neutral.</a:t>
+              <a:t>Technisch bleibt eine modulare Architektur mit über zwanzig fachlich getrennten Modulen statt einem Monolithen, acht vollständig kommentierte Jupyter-Notebooks — und die Zahlen 51,9 Prozent und 0,519, jederzeit reproduzierbar.</a:t>
             </a:r>
           </a:p>
           <a:p>
@@ -3626,7 +3648,7 @@
             </a:pPr>
             <a:r>
               <a:rPr lang="de-DE" sz="1200" dirty="0"/>
-              <a:t>Und viertens eine erweiterte Backtesting-Engine, die simulierte Handelsstrategien auf historischen Daten durchrechnet.</a:t>
+              <a:t>Und der größere Punkt: Moderne KI beschleunigt Entwicklung und Erklärung enorm. Wissenschaftliche Qualität entsteht aber genau wie früher — durch saubere Fragen, zeitliche Trennung, Baselines, reproduzierbare Tests und das offene Benennen von Grenzen.</a:t>
             </a:r>
           </a:p>
           <a:p>
@@ -3648,7 +3670,7 @@
             </a:pPr>
             <a:r>
               <a:rPr lang="de-DE" sz="1200" dirty="0"/>
-              <a:t>Zügig. Punkt zwei kurz begründen — das zeigt, dass die Roadmap durchdacht ist und nicht nur eine Wunschliste.</a:t>
+              <a:t>Langsamste Folie des Vortrags. Das Zitat oben tatsächlich vorlesen — es ist die Botschaft, die hängenbleiben soll.</a:t>
             </a:r>
           </a:p>
           <a:p>
@@ -3670,7 +3692,7 @@
             </a:pPr>
             <a:r>
               <a:rPr lang="de-DE" sz="1200" dirty="0"/>
-              <a:t>„Ganz kurz die wissenschaftliche Grundlage.“</a:t>
+              <a:t>„Wie ginge es weiter, wenn ich weitermachen würde?“</a:t>
             </a:r>
           </a:p>
         </p:txBody>
@@ -3753,7 +3775,7 @@
             </a:pPr>
             <a:r>
               <a:rPr lang="de-DE" sz="1200" b="1" dirty="0"/>
-              <a:t>TIMING  26:30–26:45  ·  ca. 15 Sek</a:t>
+              <a:t>TIMING  25:50–26:30  ·  ca. 40 Sek</a:t>
             </a:r>
           </a:p>
           <a:p>
@@ -3775,7 +3797,7 @@
             </a:pPr>
             <a:r>
               <a:rPr lang="de-DE" sz="1200" dirty="0"/>
-              <a:t>Kurslehrbuch ist der Géron, Kapitel 1 bis 9 — Klassifikationsmetriken, Pipelines, Support Vector Machines, Entscheidungsbäume, Random Forests, ROC und zeitliche Validierung. Alles davon steckt im Projekt.</a:t>
+              <a:t>Vier Ausbaustufen.</a:t>
             </a:r>
           </a:p>
           <a:p>
@@ -3786,7 +3808,40 @@
             </a:pPr>
             <a:r>
               <a:rPr lang="de-DE" sz="1200" dirty="0"/>
-              <a:t>Dazu fünf wissenschaftliche Quellen: Fama zur Markteffizienz, Lundberg und Lee zu SHAP, Li zur Imputation, Pinheiro zur Skalierung und Stock zum QUA³CK-Prozess. Die Datenbasis ist CC0, also gemeinfrei.</a:t>
+              <a:t>Erstens Online Learning: Das Modell aktualisiert sich automatisch mit jedem neuen Kurstag, statt auf dem Stand des Trainings einzufrieren.</a:t>
+            </a:r>
+          </a:p>
+          <a:p>
+            <a:pPr>
+              <a:spcBef>
+                <a:spcPts val="400"/>
+              </a:spcBef>
+            </a:pPr>
+            <a:r>
+              <a:rPr lang="de-DE" sz="1200" dirty="0"/>
+              <a:t>Zweitens Sentiment-Integration: die Tonalität von Nachrichten als zusätzliches Feature. Das wäre Information, die nicht schon im Kurs steckt — und damit der aussichtsreichste Hebel von allen vier.</a:t>
+            </a:r>
+          </a:p>
+          <a:p>
+            <a:pPr>
+              <a:spcBef>
+                <a:spcPts val="400"/>
+              </a:spcBef>
+            </a:pPr>
+            <a:r>
+              <a:rPr lang="de-DE" sz="1200" dirty="0"/>
+              <a:t>Drittens Multiklassen-Klassifikation: nicht nur auf oder ab, sondern stark, mäßig, neutral.</a:t>
+            </a:r>
+          </a:p>
+          <a:p>
+            <a:pPr>
+              <a:spcBef>
+                <a:spcPts val="400"/>
+              </a:spcBef>
+            </a:pPr>
+            <a:r>
+              <a:rPr lang="de-DE" sz="1200" dirty="0"/>
+              <a:t>Und viertens eine erweiterte Backtesting-Engine, die simulierte Handelsstrategien auf historischen Daten durchrechnet.</a:t>
             </a:r>
           </a:p>
           <a:p>
@@ -3808,7 +3863,7 @@
             </a:pPr>
             <a:r>
               <a:rPr lang="de-DE" sz="1200" dirty="0"/>
-              <a:t>Nicht vorlesen. Nur die Brücke zum Kurs benennen, die Folie steht als Beleg.</a:t>
+              <a:t>Zügig. Punkt zwei kurz begründen — das zeigt, dass die Roadmap durchdacht ist und nicht nur eine Wunschliste.</a:t>
             </a:r>
           </a:p>
           <a:p>
@@ -3830,7 +3885,7 @@
             </a:pPr>
             <a:r>
               <a:rPr lang="de-DE" sz="1200" dirty="0"/>
-              <a:t>„Damit bin ich am Ende.“</a:t>
+              <a:t>„Ganz kurz die wissenschaftliche Grundlage.“</a:t>
             </a:r>
           </a:p>
         </p:txBody>
@@ -3913,7 +3968,7 @@
             </a:pPr>
             <a:r>
               <a:rPr lang="de-DE" sz="1200" b="1" dirty="0"/>
-              <a:t>TIMING  26:45–27:00  ·  ca. 15 Sek  ·  danach offene Fragerunde</a:t>
+              <a:t>TIMING  26:30–26:45  ·  ca. 15 Sek</a:t>
             </a:r>
           </a:p>
           <a:p>
@@ -3935,7 +3990,7 @@
             </a:pPr>
             <a:r>
               <a:rPr lang="de-DE" sz="1200" dirty="0"/>
-              <a:t>Fünftausend Euro, acht Merkmale, fünf Modelle und elf Jahre unangetastete Testdaten — und die vielleicht wichtigste Erkenntnis daraus: Manchmal ist das ehrlichste Ergebnis das wertvollste.</a:t>
+              <a:t>Kurslehrbuch ist der Géron, Kapitel 1 bis 9 — Klassifikationsmetriken, Pipelines, Support Vector Machines, Entscheidungsbäume, Random Forests, ROC und zeitliche Validierung. Alles davon steckt im Projekt.</a:t>
             </a:r>
           </a:p>
           <a:p>
@@ -3946,7 +4001,7 @@
             </a:pPr>
             <a:r>
               <a:rPr lang="de-DE" sz="1200" dirty="0"/>
-              <a:t>Vielen Dank für eure Aufmerksamkeit. Jetzt habe ich alle Zeit für eure Fragen.</a:t>
+              <a:t>Dazu fünf wissenschaftliche Quellen: Fama zur Markteffizienz, Lundberg und Lee zu SHAP, Li zur Imputation, Pinheiro zur Skalierung und Stock zum QUA³CK-Prozess. Die Datenbasis ist CC0, also gemeinfrei.</a:t>
             </a:r>
           </a:p>
           <a:p>
@@ -3968,7 +4023,7 @@
             </a:pPr>
             <a:r>
               <a:rPr lang="de-DE" sz="1200" dirty="0"/>
-              <a:t>Klammer zum Einstieg schließen. Nach „Danke“ stehenbleiben, nicht sofort zum Laptop greifen. Publikum anschauen und die erste Frage abwarten.</a:t>
+              <a:t>Nicht vorlesen. Nur die Brücke zum Kurs benennen, die Folie steht als Beleg.</a:t>
             </a:r>
           </a:p>
           <a:p>
@@ -3979,7 +4034,7 @@
             </a:pPr>
             <a:r>
               <a:rPr lang="de-DE" sz="1200" b="1" dirty="0"/>
-              <a:t>FÜR DIE FRAGERUNDE</a:t>
+              <a:t>ÜBERLEITUNG</a:t>
             </a:r>
           </a:p>
           <a:p>
@@ -3990,7 +4045,7 @@
             </a:pPr>
             <a:r>
               <a:rPr lang="de-DE" sz="1200" dirty="0"/>
-              <a:t>Folie 28 hält die vier wahrscheinlichsten Prüferfragen mit ausformulierten Antworten. Belegfolien: 29 Konfusionsmatrix &amp; ROC, 30 Lernkurve, 31 Erklärbarkeit. App-Screenshots: 32 bis 37. Im Präsentationsmodus Foliennummer eintippen und Enter drücken, um direkt dorthin zu springen.</a:t>
+              <a:t>„Damit bin ich am Ende.“</a:t>
             </a:r>
           </a:p>
         </p:txBody>
@@ -4073,7 +4128,7 @@
             </a:pPr>
             <a:r>
               <a:rPr lang="de-DE" sz="1200" b="1" dirty="0"/>
-              <a:t>ANHANG  ·  Q&amp;A  ·  NICHT VORLESEN</a:t>
+              <a:t>TIMING  26:45–27:00  ·  ca. 15 Sek  ·  danach offene Fragerunde</a:t>
             </a:r>
           </a:p>
           <a:p>
@@ -4084,7 +4139,7 @@
             </a:pPr>
             <a:r>
               <a:rPr lang="de-DE" sz="1200" b="1" dirty="0"/>
-              <a:t>EINSATZ</a:t>
+              <a:t>SPRECHTEXT</a:t>
             </a:r>
           </a:p>
           <a:p>
@@ -4095,7 +4150,18 @@
             </a:pPr>
             <a:r>
               <a:rPr lang="de-DE" sz="1200" dirty="0"/>
-              <a:t>Backup-Folie für die Fragerunde. Nur einblenden, wenn eine dieser Fragen tatsächlich gestellt wird.</a:t>
+              <a:t>Fünftausend Euro, acht Merkmale, fünf Modelle und elf Jahre unangetastete Testdaten — und die vielleicht wichtigste Erkenntnis daraus: Manchmal ist das ehrlichste Ergebnis das wertvollste.</a:t>
+            </a:r>
+          </a:p>
+          <a:p>
+            <a:pPr>
+              <a:spcBef>
+                <a:spcPts val="400"/>
+              </a:spcBef>
+            </a:pPr>
+            <a:r>
+              <a:rPr lang="de-DE" sz="1200" dirty="0"/>
+              <a:t>Vielen Dank für eure Aufmerksamkeit. Jetzt habe ich alle Zeit für eure Fragen.</a:t>
             </a:r>
           </a:p>
           <a:p>
@@ -4106,7 +4172,7 @@
             </a:pPr>
             <a:r>
               <a:rPr lang="de-DE" sz="1200" b="1" dirty="0"/>
-              <a:t>ANTWORT · „Warum nur ROC-AUC 0,519?“</a:t>
+              <a:t>REGIE</a:t>
             </a:r>
           </a:p>
           <a:p>
@@ -4117,7 +4183,7 @@
             </a:pPr>
             <a:r>
               <a:rPr lang="de-DE" sz="1200" dirty="0"/>
-              <a:t>„Weil der Test zeitlich unangetastet ist. Sobald man Zukunftswissen entfernt, bleibt mit reinen historischen Kursmerkmalen gemäß Effizienzmarkthypothese nur ein sehr schwaches Signal übrig. 0,519 ist genau das — und die Walk-forward-Folds bestätigen es mit 0,514.“</a:t>
+              <a:t>Klammer zum Einstieg schließen. Nach „Danke“ stehenbleiben, nicht sofort zum Laptop greifen. Publikum anschauen und die erste Frage abwarten.</a:t>
             </a:r>
           </a:p>
           <a:p>
@@ -4128,7 +4194,7 @@
             </a:pPr>
             <a:r>
               <a:rPr lang="de-DE" sz="1200" b="1" dirty="0"/>
-              <a:t>ANTWORT · „Was ist Data Leakage und wie habt ihr es verhindert?“</a:t>
+              <a:t>FÜR DIE FRAGERUNDE</a:t>
             </a:r>
           </a:p>
           <a:p>
@@ -4139,216 +4205,7 @@
             </a:pPr>
             <a:r>
               <a:rPr lang="de-DE" sz="1200" dirty="0"/>
-              <a:t>„Leakage heißt, dass Information aus der Testperiode ins Training sickert. Drei Schutzmaßnahmen: strikte Zeitordnung, 20 Handelstage Sperrzone zwischen Training und Test, und eine Pipeline, in der Imputer und Scaler ausschließlich im jeweiligen Trainingsfenster gefittet werden.“</a:t>
-            </a:r>
-          </a:p>
-          <a:p>
-            <a:pPr>
-              <a:spcBef>
-                <a:spcPts val="1200"/>
-              </a:spcBef>
-            </a:pPr>
-            <a:r>
-              <a:rPr lang="de-DE" sz="1200" b="1" dirty="0"/>
-              <a:t>LEAKAGE-GEGENRECHNUNG  (Zahlen zum Zitieren)</a:t>
-            </a:r>
-          </a:p>
-          <a:p>
-            <a:pPr>
-              <a:spcBef>
-                <a:spcPts val="400"/>
-              </a:spcBef>
-            </a:pPr>
-            <a:r>
-              <a:rPr lang="de-DE" sz="1200" dirty="0"/>
-              <a:t>Random Forest, identische Parameter und Datenbasis, nur die Aufteilung variiert:</a:t>
-            </a:r>
-          </a:p>
-          <a:p>
-            <a:pPr>
-              <a:spcBef>
-                <a:spcPts val="400"/>
-              </a:spcBef>
-            </a:pPr>
-            <a:r>
-              <a:rPr lang="de-DE" sz="1200" dirty="0"/>
-              <a:t>zeitlich + 20 Tage Sperrzone (v1.0): AUC 0,5192 · BalAcc 0,5129 · Acc 0,5187 (Baseline 0,5915)   —   zeitlich ohne Sperrzone: AUC 0,5240 · BalAcc 0,5172 · Acc 0,5308   —   naiver Zufalls-Split 80/20: AUC 0,5813 · BalAcc 0,5512 · Acc 0,5467 (Baseline 0,5592)</a:t>
-            </a:r>
-          </a:p>
-          <a:p>
-            <a:pPr>
-              <a:spcBef>
-                <a:spcPts val="400"/>
-              </a:spcBef>
-            </a:pPr>
-            <a:r>
-              <a:rPr lang="de-DE" sz="1200" dirty="0"/>
-              <a:t>Kernaussage: Gemessen am Zufallsniveau 0,5 erscheint das Signal beim Zufalls-Split mit 0,081 statt 0,019 — also 4,2-mal größer. Bemerkenswert: Selbst dort liegt die Accuracy mit 0,5467 noch unter ihrer Baseline von 0,5592. Die Sperrzone allein macht 0,005 aus, der Split-Typ 0,062.</a:t>
-            </a:r>
-          </a:p>
-          <a:p>
-            <a:pPr>
-              <a:spcBef>
-                <a:spcPts val="1200"/>
-              </a:spcBef>
-            </a:pPr>
-            <a:r>
-              <a:rPr lang="de-DE" sz="1200" b="1" dirty="0"/>
-              <a:t>ANTWORT · „Warum binäre Klassifikation statt Regression?“</a:t>
-            </a:r>
-          </a:p>
-          <a:p>
-            <a:pPr>
-              <a:spcBef>
-                <a:spcPts val="400"/>
-              </a:spcBef>
-            </a:pPr>
-            <a:r>
-              <a:rPr lang="de-DE" sz="1200" dirty="0"/>
-              <a:t>„Weil die exakte Kurshöhe an effizienten Märkten praktisch nicht vorhersagbar ist. Die Richtungsfrage ist die realistischere Fragestellung und lässt sich mit Accuracy, Balanced Accuracy und ROC-AUC sauber bewerten.“</a:t>
-            </a:r>
-          </a:p>
-          <a:p>
-            <a:pPr>
-              <a:spcBef>
-                <a:spcPts val="1200"/>
-              </a:spcBef>
-            </a:pPr>
-            <a:r>
-              <a:rPr lang="de-DE" sz="1200" b="1" dirty="0"/>
-              <a:t>ANTWORT · „Warum Random Forest statt neuronalem Netz?“</a:t>
-            </a:r>
-          </a:p>
-          <a:p>
-            <a:pPr>
-              <a:spcBef>
-                <a:spcPts val="400"/>
-              </a:spcBef>
-            </a:pPr>
-            <a:r>
-              <a:rPr lang="de-DE" sz="1200" dirty="0"/>
-              <a:t>„Ich habe bewusst fünf Modellgenerationen verglichen. Der Random Forest bringt Nichtlinearität und Erklärbarkeit zusammen. Kein Modell erzeugt aber ein belastbares Signal — und bei acht Features rechtfertigt das kein neuronales Netz. Occam’s Razor.“</a:t>
-            </a:r>
-          </a:p>
-          <a:p>
-            <a:pPr>
-              <a:spcBef>
-                <a:spcPts val="1200"/>
-              </a:spcBef>
-            </a:pPr>
-            <a:r>
-              <a:rPr lang="de-DE" sz="1200" b="1" dirty="0"/>
-              <a:t>ANTWORT · „Ihre Lernkurve zeigt doch klares Overfitting?“  (WICHTIG)</a:t>
-            </a:r>
-          </a:p>
-          <a:p>
-            <a:pPr>
-              <a:spcBef>
-                <a:spcPts val="400"/>
-              </a:spcBef>
-            </a:pPr>
-            <a:r>
-              <a:rPr lang="de-DE" sz="1200" dirty="0"/>
-              <a:t>„Ja, völlig richtig — Trainings-AUC 0,637 gegen Validierung 0,525, Lücke 0,11. Die App weist das selbst als hohe Varianz aus. Der Punkt ist: Es ist hier nicht behebbar. Ich habe beide Standardhebel geprüft.“</a:t>
-            </a:r>
-          </a:p>
-          <a:p>
-            <a:pPr>
-              <a:spcBef>
-                <a:spcPts val="400"/>
-              </a:spcBef>
-            </a:pPr>
-            <a:r>
-              <a:rPr lang="de-DE" sz="1200" dirty="0"/>
-              <a:t>„Erster Hebel, mehr Daten: Die Validierungskurve läuft über die 2,3-fache Datenmenge von 0,530 auf 0,525 — sie bewegt sich nicht. Die Lücke schließt sich nur, weil der Trainings-Score fällt.“</a:t>
-            </a:r>
-          </a:p>
-          <a:p>
-            <a:pPr>
-              <a:spcBef>
-                <a:spcPts val="400"/>
-              </a:spcBef>
-            </a:pPr>
-            <a:r>
-              <a:rPr lang="de-DE" sz="1200" dirty="0"/>
-              <a:t>„Zweiter Hebel, stärkere Regularisierung: Ich habe sieben Konfigurationen auf demselben Out-of-Time-Fenster gerechnet. Ein unbeschränkter Forest erreicht Trainings-AUC 1,0 — er lernt alle 120.920 Zeilen perfekt auswendig — und im Test 0,512. Ganz am anderen Ende, bei Tiefe 2 und 200 Beobachtungen pro Blatt, schrumpft die Lücke auf 0,03, und der Test-AUC liegt bei 0,513. Über den kompletten Komplexitätsbereich bewegt sich der Test-AUC zwischen 0,512 und 0,519.“</a:t>
-            </a:r>
-          </a:p>
-          <a:p>
-            <a:pPr>
-              <a:spcBef>
-                <a:spcPts val="400"/>
-              </a:spcBef>
-            </a:pPr>
-            <a:r>
-              <a:rPr lang="de-DE" sz="1200" dirty="0"/>
-              <a:t>„Das heißt: Die Obergrenze setzt der Informationsgehalt der Features, nicht die Modellkapazität. Was overfittet wird, ist Rauschen. Und die gewählten Parameter — Tiefe 8, 5 pro Blatt — sind in diesem Vergleich mit 0,5192 der beste Wert.“</a:t>
-            </a:r>
-          </a:p>
-          <a:p>
-            <a:pPr>
-              <a:spcBef>
-                <a:spcPts val="1200"/>
-              </a:spcBef>
-            </a:pPr>
-            <a:r>
-              <a:rPr lang="de-DE" sz="1200" b="1" dirty="0"/>
-              <a:t>ABLATIONSTABELLE  (Zahlen zum Zitieren)</a:t>
-            </a:r>
-          </a:p>
-          <a:p>
-            <a:pPr>
-              <a:spcBef>
-                <a:spcPts val="400"/>
-              </a:spcBef>
-            </a:pPr>
-            <a:r>
-              <a:rPr lang="de-DE" sz="1200" dirty="0"/>
-              <a:t>Random Forest, 200 Bäume, identisches purged-OOT-Fenster — Train-AUC / Test-AUC / Lücke:</a:t>
-            </a:r>
-          </a:p>
-          <a:p>
-            <a:pPr>
-              <a:spcBef>
-                <a:spcPts val="400"/>
-              </a:spcBef>
-            </a:pPr>
-            <a:r>
-              <a:rPr lang="de-DE" sz="1200" dirty="0"/>
-              <a:t>unbeschränkt: 1,0000 / 0,5121 / 0,488   ·   Tiefe 16, Blatt 2: 0,9044 / 0,5180 / 0,386   ·   Tiefe 8, Blatt 5 (v1.0): 0,6327 / 0,5192 / 0,114   ·   Tiefe 6, Blatt 20: 0,5948 / 0,5158 / 0,079   ·   Tiefe 4, Blatt 50: 0,5672 / 0,5146 / 0,053   ·   Tiefe 3, Blatt 100: 0,5548 / 0,5161 / 0,039   ·   Tiefe 2, Blatt 200: 0,5426 / 0,5129 / 0,030</a:t>
-            </a:r>
-          </a:p>
-          <a:p>
-            <a:pPr>
-              <a:spcBef>
-                <a:spcPts val="400"/>
-              </a:spcBef>
-            </a:pPr>
-            <a:r>
-              <a:rPr lang="de-DE" sz="1200" dirty="0"/>
-              <a:t>Einschränkung, falls nachgefragt: gemessen auf dem OOT-Holdout, nicht zusätzlich über die vier Walk-forward-Folds. Bei einer Gesamtspanne von 0,007 ändert das die Aussage nicht.</a:t>
-            </a:r>
-          </a:p>
-          <a:p>
-            <a:pPr>
-              <a:spcBef>
-                <a:spcPts val="1200"/>
-              </a:spcBef>
-            </a:pPr>
-            <a:r>
-              <a:rPr lang="de-DE" sz="1200" b="1" dirty="0"/>
-              <a:t>WEITERE WAHRSCHEINLICHE FRAGEN</a:t>
-            </a:r>
-          </a:p>
-          <a:p>
-            <a:pPr>
-              <a:spcBef>
-                <a:spcPts val="400"/>
-              </a:spcBef>
-            </a:pPr>
-            <a:r>
-              <a:rPr lang="de-DE" sz="1200" dirty="0"/>
-              <a:t>Survivorship-Bias: offen zugeben, siehe Folie 10.  ·  Warum 20 Handelstage Horizont: rund ein Handelsmonat — lang genug für Trendwirkung, kurz genug für genügend Beobachtungen.  ·  Warum kein Hyperparameter-Tuning per Grid Search: siehe Ablationstabelle oben — der Test-AUC ist über den gesamten Komplexitätsbereich flach, Tuning würde nur Rauschen optimieren.  ·  Warum ist der Entscheidungsbaum im Walk-forward besser (0,5153 gegen 0,5141)? Differenz im Rauschbereich; der Random Forest ist als Demonstrator gewählt wegen Erklärbarkeit und Varianzreduktion, nicht wegen der besten Einzelmetrik.</a:t>
+              <a:t>Folie 28 hält die vier wahrscheinlichsten Prüferfragen mit ausformulierten Antworten. Belegfolien: 29 Konfusionsmatrix &amp; ROC, 30 Lernkurve, 31 Erklärbarkeit. App-Screenshots: 32 bis 37. Im Präsentationsmodus Foliennummer eintippen und Enter drücken, um direkt dorthin zu springen.</a:t>
             </a:r>
           </a:p>
         </p:txBody>
@@ -4431,7 +4288,7 @@
             </a:pPr>
             <a:r>
               <a:rPr lang="de-DE" sz="1200" b="1" dirty="0"/>
-              <a:t>ANHANG  ·  BELEGFOLIE  ·  nicht im Vortragsablauf</a:t>
+              <a:t>ANHANG  ·  Q&amp;A  ·  NICHT VORLESEN</a:t>
             </a:r>
           </a:p>
           <a:p>
@@ -4453,7 +4310,7 @@
             </a:pPr>
             <a:r>
               <a:rPr lang="de-DE" sz="1200" dirty="0"/>
-              <a:t>Diese Folie war früher im Hauptteil. Der Inhalt läuft jetzt live in der Demo (Station 4 der Live-Demo). Hier nur noch für zwei Fälle: als Ausfallplan, wenn die App nicht startet, oder als Beleg auf eine Nachfrage in der Fragerunde.</a:t>
+              <a:t>Backup-Folie für die Fragerunde. Nur einblenden, wenn eine dieser Fragen tatsächlich gestellt wird.</a:t>
             </a:r>
           </a:p>
           <a:p>
@@ -4464,7 +4321,7 @@
             </a:pPr>
             <a:r>
               <a:rPr lang="de-DE" sz="1200" b="1" dirty="0"/>
-              <a:t>SPRECHTEXT (falls gezeigt)</a:t>
+              <a:t>ANTWORT · „Warum nur ROC-AUC 0,519?“</a:t>
             </a:r>
           </a:p>
           <a:p>
@@ -4475,7 +4332,7 @@
             </a:pPr>
             <a:r>
               <a:rPr lang="de-DE" sz="1200" dirty="0"/>
-              <a:t>„Die Konfusionsmatrix zeigt, welche Art von Fehlern das Modell macht: Es tippt fast immer auf ‚steigend‘, weil 59,1 Prozent des Testzeitraums steigend waren. Genau deshalb ist Accuracy eine irreführende Kennzahl — sie belohnt das Nachplappern der Mehrheit. Die ROC-Kurve liegt fast auf der Diagonalen, und die Diagonale ist der reine Zufall.“</a:t>
+              <a:t>„Weil der Test zeitlich unangetastet ist. Sobald man Zukunftswissen entfernt, bleibt mit reinen historischen Kursmerkmalen gemäß Effizienzmarkthypothese nur ein sehr schwaches Signal übrig. 0,519 ist genau das — und die Walk-forward-Folds bestätigen es mit 0,514.“</a:t>
             </a:r>
           </a:p>
           <a:p>
@@ -4486,7 +4343,7 @@
             </a:pPr>
             <a:r>
               <a:rPr lang="de-DE" sz="1200" b="1" dirty="0"/>
-              <a:t>REGIE</a:t>
+              <a:t>ANTWORT · „Was ist Data Leakage und wie habt ihr es verhindert?“</a:t>
             </a:r>
           </a:p>
           <a:p>
@@ -4497,7 +4354,216 @@
             </a:pPr>
             <a:r>
               <a:rPr lang="de-DE" sz="1200" dirty="0"/>
-              <a:t>Im Präsentationsmodus Foliennummer eintippen und Enter — direkter Sprung, ohne durchzublättern.</a:t>
+              <a:t>„Leakage heißt, dass Information aus der Testperiode ins Training sickert. Drei Schutzmaßnahmen: strikte Zeitordnung, 20 Handelstage Sperrzone zwischen Training und Test, und eine Pipeline, in der Imputer und Scaler ausschließlich im jeweiligen Trainingsfenster gefittet werden.“</a:t>
+            </a:r>
+          </a:p>
+          <a:p>
+            <a:pPr>
+              <a:spcBef>
+                <a:spcPts val="1200"/>
+              </a:spcBef>
+            </a:pPr>
+            <a:r>
+              <a:rPr lang="de-DE" sz="1200" b="1" dirty="0"/>
+              <a:t>LEAKAGE-GEGENRECHNUNG  (Zahlen zum Zitieren)</a:t>
+            </a:r>
+          </a:p>
+          <a:p>
+            <a:pPr>
+              <a:spcBef>
+                <a:spcPts val="400"/>
+              </a:spcBef>
+            </a:pPr>
+            <a:r>
+              <a:rPr lang="de-DE" sz="1200" dirty="0"/>
+              <a:t>Random Forest, identische Parameter und Datenbasis, nur die Aufteilung variiert:</a:t>
+            </a:r>
+          </a:p>
+          <a:p>
+            <a:pPr>
+              <a:spcBef>
+                <a:spcPts val="400"/>
+              </a:spcBef>
+            </a:pPr>
+            <a:r>
+              <a:rPr lang="de-DE" sz="1200" dirty="0"/>
+              <a:t>zeitlich + 20 Tage Sperrzone (v1.0): AUC 0,5192 · BalAcc 0,5129 · Acc 0,5187 (Baseline 0,5915)   —   zeitlich ohne Sperrzone: AUC 0,5240 · BalAcc 0,5172 · Acc 0,5308   —   naiver Zufalls-Split 80/20: AUC 0,5813 · BalAcc 0,5512 · Acc 0,5467 (Baseline 0,5592)</a:t>
+            </a:r>
+          </a:p>
+          <a:p>
+            <a:pPr>
+              <a:spcBef>
+                <a:spcPts val="400"/>
+              </a:spcBef>
+            </a:pPr>
+            <a:r>
+              <a:rPr lang="de-DE" sz="1200" dirty="0"/>
+              <a:t>Kernaussage: Gemessen am Zufallsniveau 0,5 erscheint das Signal beim Zufalls-Split mit 0,081 statt 0,019 — also 4,2-mal größer. Bemerkenswert: Selbst dort liegt die Accuracy mit 0,5467 noch unter ihrer Baseline von 0,5592. Die Sperrzone allein macht 0,005 aus, der Split-Typ 0,062.</a:t>
+            </a:r>
+          </a:p>
+          <a:p>
+            <a:pPr>
+              <a:spcBef>
+                <a:spcPts val="1200"/>
+              </a:spcBef>
+            </a:pPr>
+            <a:r>
+              <a:rPr lang="de-DE" sz="1200" b="1" dirty="0"/>
+              <a:t>ANTWORT · „Warum binäre Klassifikation statt Regression?“</a:t>
+            </a:r>
+          </a:p>
+          <a:p>
+            <a:pPr>
+              <a:spcBef>
+                <a:spcPts val="400"/>
+              </a:spcBef>
+            </a:pPr>
+            <a:r>
+              <a:rPr lang="de-DE" sz="1200" dirty="0"/>
+              <a:t>„Weil die exakte Kurshöhe an effizienten Märkten praktisch nicht vorhersagbar ist. Die Richtungsfrage ist die realistischere Fragestellung und lässt sich mit Accuracy, Balanced Accuracy und ROC-AUC sauber bewerten.“</a:t>
+            </a:r>
+          </a:p>
+          <a:p>
+            <a:pPr>
+              <a:spcBef>
+                <a:spcPts val="1200"/>
+              </a:spcBef>
+            </a:pPr>
+            <a:r>
+              <a:rPr lang="de-DE" sz="1200" b="1" dirty="0"/>
+              <a:t>ANTWORT · „Warum Random Forest statt neuronalem Netz?“</a:t>
+            </a:r>
+          </a:p>
+          <a:p>
+            <a:pPr>
+              <a:spcBef>
+                <a:spcPts val="400"/>
+              </a:spcBef>
+            </a:pPr>
+            <a:r>
+              <a:rPr lang="de-DE" sz="1200" dirty="0"/>
+              <a:t>„Ich habe bewusst fünf Modellgenerationen verglichen. Der Random Forest bringt Nichtlinearität und Erklärbarkeit zusammen. Kein Modell erzeugt aber ein belastbares Signal — und bei acht Features rechtfertigt das kein neuronales Netz. Occam’s Razor.“</a:t>
+            </a:r>
+          </a:p>
+          <a:p>
+            <a:pPr>
+              <a:spcBef>
+                <a:spcPts val="1200"/>
+              </a:spcBef>
+            </a:pPr>
+            <a:r>
+              <a:rPr lang="de-DE" sz="1200" b="1" dirty="0"/>
+              <a:t>ANTWORT · „Ihre Lernkurve zeigt doch klares Overfitting?“  (WICHTIG)</a:t>
+            </a:r>
+          </a:p>
+          <a:p>
+            <a:pPr>
+              <a:spcBef>
+                <a:spcPts val="400"/>
+              </a:spcBef>
+            </a:pPr>
+            <a:r>
+              <a:rPr lang="de-DE" sz="1200" dirty="0"/>
+              <a:t>„Ja, völlig richtig — Trainings-AUC 0,637 gegen Validierung 0,525, Lücke 0,11. Die App weist das selbst als hohe Varianz aus. Der Punkt ist: Es ist hier nicht behebbar. Ich habe beide Standardhebel geprüft.“</a:t>
+            </a:r>
+          </a:p>
+          <a:p>
+            <a:pPr>
+              <a:spcBef>
+                <a:spcPts val="400"/>
+              </a:spcBef>
+            </a:pPr>
+            <a:r>
+              <a:rPr lang="de-DE" sz="1200" dirty="0"/>
+              <a:t>„Erster Hebel, mehr Daten: Die Validierungskurve läuft über die 2,3-fache Datenmenge von 0,530 auf 0,525 — sie bewegt sich nicht. Die Lücke schließt sich nur, weil der Trainings-Score fällt.“</a:t>
+            </a:r>
+          </a:p>
+          <a:p>
+            <a:pPr>
+              <a:spcBef>
+                <a:spcPts val="400"/>
+              </a:spcBef>
+            </a:pPr>
+            <a:r>
+              <a:rPr lang="de-DE" sz="1200" dirty="0"/>
+              <a:t>„Zweiter Hebel, stärkere Regularisierung: Ich habe sieben Konfigurationen auf demselben Out-of-Time-Fenster gerechnet. Ein unbeschränkter Forest erreicht Trainings-AUC 1,0 — er lernt alle 120.920 Zeilen perfekt auswendig — und im Test 0,512. Ganz am anderen Ende, bei Tiefe 2 und 200 Beobachtungen pro Blatt, schrumpft die Lücke auf 0,03, und der Test-AUC liegt bei 0,513. Über den kompletten Komplexitätsbereich bewegt sich der Test-AUC zwischen 0,512 und 0,519.“</a:t>
+            </a:r>
+          </a:p>
+          <a:p>
+            <a:pPr>
+              <a:spcBef>
+                <a:spcPts val="400"/>
+              </a:spcBef>
+            </a:pPr>
+            <a:r>
+              <a:rPr lang="de-DE" sz="1200" dirty="0"/>
+              <a:t>„Das heißt: Die Obergrenze setzt der Informationsgehalt der Features, nicht die Modellkapazität. Was overfittet wird, ist Rauschen. Und die gewählten Parameter — Tiefe 8, 5 pro Blatt — sind in diesem Vergleich mit 0,5192 der beste Wert.“</a:t>
+            </a:r>
+          </a:p>
+          <a:p>
+            <a:pPr>
+              <a:spcBef>
+                <a:spcPts val="1200"/>
+              </a:spcBef>
+            </a:pPr>
+            <a:r>
+              <a:rPr lang="de-DE" sz="1200" b="1" dirty="0"/>
+              <a:t>ABLATIONSTABELLE  (Zahlen zum Zitieren)</a:t>
+            </a:r>
+          </a:p>
+          <a:p>
+            <a:pPr>
+              <a:spcBef>
+                <a:spcPts val="400"/>
+              </a:spcBef>
+            </a:pPr>
+            <a:r>
+              <a:rPr lang="de-DE" sz="1200" dirty="0"/>
+              <a:t>Random Forest, 200 Bäume, identisches purged-OOT-Fenster — Train-AUC / Test-AUC / Lücke:</a:t>
+            </a:r>
+          </a:p>
+          <a:p>
+            <a:pPr>
+              <a:spcBef>
+                <a:spcPts val="400"/>
+              </a:spcBef>
+            </a:pPr>
+            <a:r>
+              <a:rPr lang="de-DE" sz="1200" dirty="0"/>
+              <a:t>unbeschränkt: 1,0000 / 0,5121 / 0,488   ·   Tiefe 16, Blatt 2: 0,9044 / 0,5180 / 0,386   ·   Tiefe 8, Blatt 5 (v1.0): 0,6327 / 0,5192 / 0,114   ·   Tiefe 6, Blatt 20: 0,5948 / 0,5158 / 0,079   ·   Tiefe 4, Blatt 50: 0,5672 / 0,5146 / 0,053   ·   Tiefe 3, Blatt 100: 0,5548 / 0,5161 / 0,039   ·   Tiefe 2, Blatt 200: 0,5426 / 0,5129 / 0,030</a:t>
+            </a:r>
+          </a:p>
+          <a:p>
+            <a:pPr>
+              <a:spcBef>
+                <a:spcPts val="400"/>
+              </a:spcBef>
+            </a:pPr>
+            <a:r>
+              <a:rPr lang="de-DE" sz="1200" dirty="0"/>
+              <a:t>Einschränkung, falls nachgefragt: gemessen auf dem OOT-Holdout, nicht zusätzlich über die vier Walk-forward-Folds. Bei einer Gesamtspanne von 0,007 ändert das die Aussage nicht.</a:t>
+            </a:r>
+          </a:p>
+          <a:p>
+            <a:pPr>
+              <a:spcBef>
+                <a:spcPts val="1200"/>
+              </a:spcBef>
+            </a:pPr>
+            <a:r>
+              <a:rPr lang="de-DE" sz="1200" b="1" dirty="0"/>
+              <a:t>WEITERE WAHRSCHEINLICHE FRAGEN</a:t>
+            </a:r>
+          </a:p>
+          <a:p>
+            <a:pPr>
+              <a:spcBef>
+                <a:spcPts val="400"/>
+              </a:spcBef>
+            </a:pPr>
+            <a:r>
+              <a:rPr lang="de-DE" sz="1200" dirty="0"/>
+              <a:t>Survivorship-Bias: offen zugeben, siehe Folie 10.  ·  Warum 20 Handelstage Horizont: rund ein Handelsmonat — lang genug für Trendwirkung, kurz genug für genügend Beobachtungen.  ·  Warum kein Hyperparameter-Tuning per Grid Search: siehe Ablationstabelle oben — der Test-AUC ist über den gesamten Komplexitätsbereich flach, Tuning würde nur Rauschen optimieren.  ·  Warum ist der Entscheidungsbaum im Walk-forward besser (0,5153 gegen 0,5141)? Differenz im Rauschbereich; der Random Forest ist als Demonstrator gewählt wegen Erklärbarkeit und Varianzreduktion, nicht wegen der besten Einzelmetrik.</a:t>
             </a:r>
           </a:p>
         </p:txBody>
@@ -4602,7 +4668,7 @@
             </a:pPr>
             <a:r>
               <a:rPr lang="de-DE" sz="1200" dirty="0"/>
-              <a:t>Diese Folie war früher im Hauptteil. Der Inhalt läuft jetzt live in der Demo (Station 5 der Live-Demo). Hier nur noch für zwei Fälle: als Ausfallplan, wenn die App nicht startet, oder als Beleg auf eine Nachfrage in der Fragerunde.</a:t>
+              <a:t>Diese Folie war früher im Hauptteil. Der Inhalt läuft jetzt live in der Demo (Station 4 der Live-Demo). Hier nur noch für zwei Fälle: als Ausfallplan, wenn die App nicht startet, oder als Beleg auf eine Nachfrage in der Fragerunde.</a:t>
             </a:r>
           </a:p>
           <a:p>
@@ -4624,7 +4690,7 @@
             </a:pPr>
             <a:r>
               <a:rPr lang="de-DE" sz="1200" dirty="0"/>
-              <a:t>„Die Antwort ist eindeutig Varianz: Trainings-AUC 0,637 gegen Validierung 0,525, Lücke 0,11 — das ist Overfitting, und die App weist es selbst so aus. Entscheidend ist aber, dass es hier nicht behebbar ist: Über die 2,3-fache Datenmenge bewegt sich die Validierung nicht von rund 0,51 weg, und über sieben Regularisierungsstufen bleibt der Test-AUC zwischen 0,512 und 0,519. Was overfittet wird, ist Rauschen — genau das erwartet die Effizienzmarkthypothese.“</a:t>
+              <a:t>„Die Konfusionsmatrix zeigt, welche Art von Fehlern das Modell macht: Es tippt fast immer auf ‚steigend‘, weil 59,1 Prozent des Testzeitraums steigend waren. Genau deshalb ist Accuracy eine irreführende Kennzahl — sie belohnt das Nachplappern der Mehrheit. Die ROC-Kurve liegt fast auf der Diagonalen, und die Diagonale ist der reine Zufall.“</a:t>
             </a:r>
           </a:p>
           <a:p>
@@ -4944,7 +5010,7 @@
             </a:pPr>
             <a:r>
               <a:rPr lang="de-DE" sz="1200" dirty="0"/>
-              <a:t>Diese Folie war früher im Hauptteil. Der Inhalt läuft jetzt live in der Demo (Station 6 der Live-Demo). Hier nur noch für zwei Fälle: als Ausfallplan, wenn die App nicht startet, oder als Beleg auf eine Nachfrage in der Fragerunde.</a:t>
+              <a:t>Diese Folie war früher im Hauptteil. Der Inhalt läuft jetzt live in der Demo (Station 5 der Live-Demo). Hier nur noch für zwei Fälle: als Ausfallplan, wenn die App nicht startet, oder als Beleg auf eine Nachfrage in der Fragerunde.</a:t>
             </a:r>
           </a:p>
           <a:p>
@@ -4966,7 +5032,7 @@
             </a:pPr>
             <a:r>
               <a:rPr lang="de-DE" sz="1200" dirty="0"/>
-              <a:t>„Links die Feature Importance des Random Forest, rechts SHAP — ein Verfahren aus der Spieltheorie, das je Vorhersage den Beitrag jedes Merkmals berechnet. Beide zeigen: Drawdown und Volatilität prägen das Modell stärker als reine Renditen. Erklärbarkeit erklärt aber nur, wie entschieden wird — sie beweist keine Kausalität.“</a:t>
+              <a:t>„Die Antwort ist eindeutig Varianz: Trainings-AUC 0,637 gegen Validierung 0,525, Lücke 0,11 — das ist Overfitting, und die App weist es selbst so aus. Entscheidend ist aber, dass es hier nicht behebbar ist: Über die 2,3-fache Datenmenge bewegt sich die Validierung nicht von rund 0,51 weg, und über sieben Regularisierungsstufen bleibt der Test-AUC zwischen 0,512 und 0,519. Was overfittet wird, ist Rauschen — genau das erwartet die Effizienzmarkthypothese.“</a:t>
             </a:r>
           </a:p>
           <a:p>
@@ -5071,7 +5137,7 @@
             </a:pPr>
             <a:r>
               <a:rPr lang="de-DE" sz="1200" b="1" dirty="0"/>
-              <a:t>ANHANG  ·  AUSFALLPLAN LIVE-DEMO  ·  normalerweise übersprungen</a:t>
+              <a:t>ANHANG  ·  BELEGFOLIE  ·  nicht im Vortragsablauf</a:t>
             </a:r>
           </a:p>
           <a:p>
@@ -5093,7 +5159,7 @@
             </a:pPr>
             <a:r>
               <a:rPr lang="de-DE" sz="1200" dirty="0"/>
-              <a:t>Screenshot-Ersatz für „Marktanalyse 1/2“ (Station 2 der Live-Demo), falls Netz, App oder Beamer nicht mitspielen.</a:t>
+              <a:t>Diese Folie war früher im Hauptteil. Der Inhalt läuft jetzt live in der Demo (Station 6 der Live-Demo). Hier nur noch für zwei Fälle: als Ausfallplan, wenn die App nicht startet, oder als Beleg auf eine Nachfrage in der Fragerunde.</a:t>
             </a:r>
           </a:p>
           <a:p>
@@ -5115,7 +5181,7 @@
             </a:pPr>
             <a:r>
               <a:rPr lang="de-DE" sz="1200" dirty="0"/>
-              <a:t>„SPY über ein Jahr, Schlusskurs mit den gleitenden Durchschnitten über 20, 50 und 200 Tage. Der Kurs liegt über allen dreien — ein intakter Aufwärtstrend, und genau der speist den hohen Trend-Score in der App.“</a:t>
+              <a:t>„Links die Feature Importance des Random Forest, rechts SHAP — ein Verfahren aus der Spieltheorie, das je Vorhersage den Beitrag jedes Merkmals berechnet. Beide zeigen: Drawdown und Volatilität prägen das Modell stärker als reine Renditen. Erklärbarkeit erklärt aber nur, wie entschieden wird — sie beweist keine Kausalität.“</a:t>
             </a:r>
           </a:p>
           <a:p>
@@ -5137,7 +5203,7 @@
             </a:pPr>
             <a:r>
               <a:rPr lang="de-DE" sz="1200" dirty="0"/>
-              <a:t>Foliennummer eintippen und Enter. Nicht kommentieren, dass die Demo ausgefallen ist — einfach weitersprechen.</a:t>
+              <a:t>Im Präsentationsmodus Foliennummer eintippen und Enter — direkter Sprung, ohne durchzublättern.</a:t>
             </a:r>
           </a:p>
         </p:txBody>
@@ -5242,7 +5308,7 @@
             </a:pPr>
             <a:r>
               <a:rPr lang="de-DE" sz="1200" dirty="0"/>
-              <a:t>Screenshot-Ersatz für „Marktanalyse 2/2“ (Station 2 der Live-Demo), falls Netz, App oder Beamer nicht mitspielen.</a:t>
+              <a:t>Screenshot-Ersatz für „Marktanalyse 1/2“ (Station 2 der Live-Demo), falls Netz, App oder Beamer nicht mitspielen.</a:t>
             </a:r>
           </a:p>
           <a:p>
@@ -5264,7 +5330,7 @@
             </a:pPr>
             <a:r>
               <a:rPr lang="de-DE" sz="1200" dirty="0"/>
-              <a:t>„Links die Candlesticks: Jede Kerze ist ein Handelstag, Körper gleich Eröffnung bis Schluss, Dochte gleich Hoch und Tief. Rechts der Drawdown, also der Abstand zum letzten Allzeithoch — die Grundlage des Risiko-Scores.“</a:t>
+              <a:t>„SPY über ein Jahr, Schlusskurs mit den gleitenden Durchschnitten über 20, 50 und 200 Tage. Der Kurs liegt über allen dreien — ein intakter Aufwärtstrend, und genau der speist den hohen Trend-Score in der App.“</a:t>
             </a:r>
           </a:p>
           <a:p>
@@ -5391,7 +5457,7 @@
             </a:pPr>
             <a:r>
               <a:rPr lang="de-DE" sz="1200" dirty="0"/>
-              <a:t>Screenshot-Ersatz für „ML-Insights 1/2“ (Stationen 3 und 4 der Live-Demo), falls Netz, App oder Beamer nicht mitspielen.</a:t>
+              <a:t>Screenshot-Ersatz für „Marktanalyse 2/2“ (Station 2 der Live-Demo), falls Netz, App oder Beamer nicht mitspielen.</a:t>
             </a:r>
           </a:p>
           <a:p>
@@ -5413,7 +5479,7 @@
             </a:pPr>
             <a:r>
               <a:rPr lang="de-DE" sz="1200" dirty="0"/>
-              <a:t>„Links alle fünf Modellgenerationen unter identischen Zeitfenstern. Rechts die Fehleranalyse im Out-of-Time-Test: Accuracy unter der Majority-Baseline, AUC 0,519. Transparent statt beschönigt.“</a:t>
+              <a:t>„Links die Candlesticks: Jede Kerze ist ein Handelstag, Körper gleich Eröffnung bis Schluss, Dochte gleich Hoch und Tief. Rechts der Drawdown, also der Abstand zum letzten Allzeithoch — die Grundlage des Risiko-Scores.“</a:t>
             </a:r>
           </a:p>
           <a:p>
@@ -5540,7 +5606,7 @@
             </a:pPr>
             <a:r>
               <a:rPr lang="de-DE" sz="1200" dirty="0"/>
-              <a:t>Screenshot-Ersatz für „ML-Insights 2/2“ (Stationen 5 und 6 der Live-Demo), falls Netz, App oder Beamer nicht mitspielen.</a:t>
+              <a:t>Screenshot-Ersatz für „ML-Insights 1/2“ (Stationen 3 und 4 der Live-Demo), falls Netz, App oder Beamer nicht mitspielen.</a:t>
             </a:r>
           </a:p>
           <a:p>
@@ -5562,7 +5628,7 @@
             </a:pPr>
             <a:r>
               <a:rPr lang="de-DE" sz="1200" dirty="0"/>
-              <a:t>„Links die Lernkurve: Mehr Daten schließen die Lücke nur begrenzt. Rechts die Erklärbarkeit: Sie zeigt, welche Variablen das schwache Signal treiben — ohne eine Ursache zu behaupten.“</a:t>
+              <a:t>„Links alle fünf Modellgenerationen unter identischen Zeitfenstern. Rechts die Fehleranalyse im Out-of-Time-Test: Accuracy unter der Majority-Baseline, AUC 0,519. Transparent statt beschönigt.“</a:t>
             </a:r>
           </a:p>
           <a:p>
@@ -5689,7 +5755,7 @@
             </a:pPr>
             <a:r>
               <a:rPr lang="de-DE" sz="1200" dirty="0"/>
-              <a:t>Screenshot-Ersatz für „Kapital-Kompass“ (Station 7 der Live-Demo), falls Netz, App oder Beamer nicht mitspielen.</a:t>
+              <a:t>Screenshot-Ersatz für „ML-Insights 2/2“ (Stationen 5 und 6 der Live-Demo), falls Netz, App oder Beamer nicht mitspielen.</a:t>
             </a:r>
           </a:p>
           <a:p>
@@ -5711,7 +5777,7 @@
             </a:pPr>
             <a:r>
               <a:rPr lang="de-DE" sz="1200" dirty="0"/>
-              <a:t>„Aus Kapital, Risikotoleranz und Stop-Loss-Distanz berechnet die App live den Risikobetrag und die maximale Positionsgröße — abgestimmt auf die Volatilitätsklasse der Aktie.“</a:t>
+              <a:t>„Links die Lernkurve: Mehr Daten schließen die Lücke nur begrenzt. Rechts die Erklärbarkeit: Sie zeigt, welche Variablen das schwache Signal treiben — ohne eine Ursache zu behaupten.“</a:t>
             </a:r>
           </a:p>
           <a:p>
@@ -5838,7 +5904,7 @@
             </a:pPr>
             <a:r>
               <a:rPr lang="de-DE" sz="1200" dirty="0"/>
-              <a:t>Screenshot-Ersatz für „Portfolio-Simulator“ (Station 8 der Live-Demo), falls Netz, App oder Beamer nicht mitspielen.</a:t>
+              <a:t>Screenshot-Ersatz für „Kapital-Kompass“ (Station 7 der Live-Demo), falls Netz, App oder Beamer nicht mitspielen.</a:t>
             </a:r>
           </a:p>
           <a:p>
@@ -5860,7 +5926,7 @@
             </a:pPr>
             <a:r>
               <a:rPr lang="de-DE" sz="1200" dirty="0"/>
-              <a:t>„Kapital wird über mehrere Titel verteilt, die Allokation ist live editierbar. Tortendiagramm und Herfindahl-Index zeigen sofort, wie konzentriert das Portfolio ist.“</a:t>
+              <a:t>„Aus Kapital, Risikotoleranz und Stop-Loss-Distanz berechnet die App live den Risikobetrag und die maximale Positionsgröße — abgestimmt auf die Volatilitätsklasse der Aktie.“</a:t>
             </a:r>
           </a:p>
           <a:p>
@@ -5965,7 +6031,7 @@
             </a:pPr>
             <a:r>
               <a:rPr lang="de-DE" sz="1200" b="1" dirty="0"/>
-              <a:t>TIMING  17:25–18:10  ·  ca. 45 Sek  ·  HÖHEPUNKT DES VORTRAGS</a:t>
+              <a:t>ANHANG  ·  AUSFALLPLAN LIVE-DEMO  ·  normalerweise übersprungen</a:t>
             </a:r>
           </a:p>
           <a:p>
@@ -5976,7 +6042,7 @@
             </a:pPr>
             <a:r>
               <a:rPr lang="de-DE" sz="1200" b="1" dirty="0"/>
-              <a:t>SPRECHTEXT</a:t>
+              <a:t>EINSATZ</a:t>
             </a:r>
           </a:p>
           <a:p>
@@ -5987,7 +6053,18 @@
             </a:pPr>
             <a:r>
               <a:rPr lang="de-DE" sz="1200" dirty="0"/>
-              <a:t>Ich habe dasselbe Modell auf denselben Daten noch zweimal trainiert und ausschließlich die Aufteilung geändert.</a:t>
+              <a:t>Screenshot-Ersatz für „Portfolio-Simulator“ (Station 8 der Live-Demo), falls Netz, App oder Beamer nicht mitspielen.</a:t>
+            </a:r>
+          </a:p>
+          <a:p>
+            <a:pPr>
+              <a:spcBef>
+                <a:spcPts val="1200"/>
+              </a:spcBef>
+            </a:pPr>
+            <a:r>
+              <a:rPr lang="de-DE" sz="1200" b="1" dirty="0"/>
+              <a:t>SPRECHTEXT (falls gezeigt)</a:t>
             </a:r>
           </a:p>
           <a:p>
@@ -5998,7 +6075,18 @@
             </a:pPr>
             <a:r>
               <a:rPr lang="de-DE" sz="1200" dirty="0"/>
-              <a:t>Zeile eins ist meine Variante: zeitlich getrennt, mit zwanzig Handelstagen Sperrzone. AUC 0,519. Zeile zwei: Ich nehme nur die Sperrzone heraus, dann reichen die letzten Trainingslabels in den Testzeitraum hinein — AUC 0,524. Und Zeile drei ist, wie man es macht, wenn man über Zeit nicht nachdenkt: ein naiver Zufalls-Split, achtzig zu zwanzig, quer durch alle Jahre. AUC 0,581.</a:t>
+              <a:t>„Kapital wird über mehrere Titel verteilt, die Allokation ist live editierbar. Tortendiagramm und Herfindahl-Index zeigen sofort, wie konzentriert das Portfolio ist.“</a:t>
+            </a:r>
+          </a:p>
+          <a:p>
+            <a:pPr>
+              <a:spcBef>
+                <a:spcPts val="1200"/>
+              </a:spcBef>
+            </a:pPr>
+            <a:r>
+              <a:rPr lang="de-DE" sz="1200" b="1" dirty="0"/>
+              <a:t>REGIE</a:t>
             </a:r>
           </a:p>
           <a:p>
@@ -6009,95 +6097,7 @@
             </a:pPr>
             <a:r>
               <a:rPr lang="de-DE" sz="1200" dirty="0"/>
-              <a:t>Von 0,519 auf 0,581 klingt nach wenig. Aber gemessen am Zufallsniveau 0,5 ist das ein scheinbares Signal von 0,081 statt 0,019 — es sieht also 4,2-mal größer aus, als es ist. Und dafür braucht es keine bessere Idee, nur eine Zeile Code.</a:t>
-            </a:r>
-          </a:p>
-          <a:p>
-            <a:pPr>
-              <a:spcBef>
-                <a:spcPts val="400"/>
-              </a:spcBef>
-            </a:pPr>
-            <a:r>
-              <a:rPr lang="de-DE" sz="1200" dirty="0"/>
-              <a:t>Ich hätte euch heute also 0,581 zeigen können. Ich zeige euch 0,519, weil das die Zahl ist, die übrig bleibt, wenn man dem Modell die Zukunft wegnimmt.</a:t>
-            </a:r>
-          </a:p>
-          <a:p>
-            <a:pPr>
-              <a:spcBef>
-                <a:spcPts val="400"/>
-              </a:spcBef>
-            </a:pPr>
-            <a:r>
-              <a:rPr lang="de-DE" sz="1200" dirty="0"/>
-              <a:t>Und damit ist die niedrige Zahl nicht die Schwäche dieses Projekts. Sie ist der Beleg, dass der Fehler nicht gemacht wurde.</a:t>
-            </a:r>
-          </a:p>
-          <a:p>
-            <a:pPr>
-              <a:spcBef>
-                <a:spcPts val="1200"/>
-              </a:spcBef>
-            </a:pPr>
-            <a:r>
-              <a:rPr lang="de-DE" sz="1200" b="1" dirty="0"/>
-              <a:t>REGIE</a:t>
-            </a:r>
-          </a:p>
-          <a:p>
-            <a:pPr>
-              <a:spcBef>
-                <a:spcPts val="400"/>
-              </a:spcBef>
-            </a:pPr>
-            <a:r>
-              <a:rPr lang="de-DE" sz="1200" dirty="0"/>
-              <a:t>Die wichtigste Folie des Vortrags. Die drei Tabellenzeilen einzeln antippen. Der Satz „Ich hätte euch heute 0,581 zeigen können“ langsam und mit Blick ins Publikum — nicht auf die Folie. Danach zwei Sekunden Stille, bevor der Schlusssatz kommt.</a:t>
-            </a:r>
-          </a:p>
-          <a:p>
-            <a:pPr>
-              <a:spcBef>
-                <a:spcPts val="400"/>
-              </a:spcBef>
-            </a:pPr>
-            <a:r>
-              <a:rPr lang="de-DE" sz="1200" dirty="0"/>
-              <a:t>Falls jemand einwirft, 0,581 sei doch auch kaum besser als Zufall: zustimmen und nachlegen — „Richtig, und das ist der zweite Punkt: Selbst die geschönte Zahl trägt keine Strategie. Die Accuracy liegt auch dort mit 54,7 Prozent unter ihrer Baseline von 55,9 Prozent.“</a:t>
-            </a:r>
-          </a:p>
-          <a:p>
-            <a:pPr>
-              <a:spcBef>
-                <a:spcPts val="400"/>
-              </a:spcBef>
-            </a:pPr>
-            <a:r>
-              <a:rPr lang="de-DE" sz="1200" dirty="0"/>
-              <a:t>Falls nach der Reproduzierbarkeit gefragt wird: Die Tabelle stammt aus scripts/validation_experiments.py, die Zahlen liegen als models/validation_experiments.json im Repository.</a:t>
-            </a:r>
-          </a:p>
-          <a:p>
-            <a:pPr>
-              <a:spcBef>
-                <a:spcPts val="1200"/>
-              </a:spcBef>
-            </a:pPr>
-            <a:r>
-              <a:rPr lang="de-DE" sz="1200" b="1" dirty="0"/>
-              <a:t>ÜBERLEITUNG</a:t>
-            </a:r>
-          </a:p>
-          <a:p>
-            <a:pPr>
-              <a:spcBef>
-                <a:spcPts val="400"/>
-              </a:spcBef>
-            </a:pPr>
-            <a:r>
-              <a:rPr lang="de-DE" sz="1200" dirty="0"/>
-              <a:t>„Diese Zahlen zeige ich euch jetzt nicht auf Folien — sondern dort, wo sie herkommen. Ich wechsle in die App.“</a:t>
+              <a:t>Foliennummer eintippen und Enter. Nicht kommentieren, dass die Demo ausgefallen ist — einfach weitersprechen.</a:t>
             </a:r>
           </a:p>
         </p:txBody>
@@ -30286,7 +30286,7 @@
           <p:nvPr/>
         </p:nvPicPr>
         <p:blipFill>
-          <a:blip r:embed="rId6"/>
+          <a:blip r:embed="rId4"/>
           <a:stretch>
             <a:fillRect/>
           </a:stretch>
@@ -31936,7 +31936,7 @@
           <p:nvPr/>
         </p:nvPicPr>
         <p:blipFill>
-          <a:blip r:embed="rId6"/>
+          <a:blip r:embed="rId4"/>
           <a:stretch>
             <a:fillRect/>
           </a:stretch>

--- a/Präsentation/Final/WealthScope_Praesentation_v1.0_FINAL.pptx
+++ b/Präsentation/Final/WealthScope_Praesentation_v1.0_FINAL.pptx
@@ -406,7 +406,7 @@
             </a:pPr>
             <a:r>
               <a:rPr lang="de-DE" sz="1200" dirty="0"/>
-              <a:t>Genau da fängt diese Geschichte an. Mein Name ist Soufiane Fedan, und ich stelle euch in den nächsten 27 Minuten WealthScope AI vor: eine Finanzanalyse-App, die mit Machine Learning arbeitet — und die, das ist der ungewöhnliche Teil, am Ende ehrlich zugibt, wo Machine Learning versagt.</a:t>
+              <a:t>Genau da fängt diese Geschichte an. Mein Name ist Soufiane Fedan, und ich stelle euch in den nächsten 24 Minuten WealthScope AI vor: eine Finanzanalyse-App, die mit Machine Learning arbeitet.</a:t>
             </a:r>
           </a:p>
           <a:p>
@@ -2463,7 +2463,7 @@
             </a:pPr>
             <a:r>
               <a:rPr lang="de-DE" sz="1200" dirty="0"/>
-              <a:t>In der Mitte, bei etwa achtzehn Minuten, klappe ich die Folien zu und wir gehen live in die App. Danach kommen Fazit, Grenzen und Ausblick.</a:t>
+              <a:t>In der Mitte, bei etwa sechzehn Minuten, klappe ich die Folien zu und wir gehen live in die App. Danach kommen Fazit und Grenzen.</a:t>
             </a:r>
           </a:p>
           <a:p>
@@ -2496,7 +2496,7 @@
             </a:pPr>
             <a:r>
               <a:rPr lang="de-DE" sz="1200" dirty="0"/>
-              <a:t>Die Tabelle nicht vorlesen. Auf drei Punkte zeigen: den Demo-Block bei 18:10 und die zwei Fragefenster. Die Frageregel ausdrücklich ansagen — sie ist später deine Zeitversicherung.</a:t>
+              <a:t>Die Tabelle nicht vorlesen. Auf drei Punkte zeigen: den Demo-Block bei 16:20 und die zwei Fragefenster. Die Frageregel ausdrücklich ansagen — sie ist später deine Zeitversicherung.</a:t>
             </a:r>
           </a:p>
           <a:p>
@@ -3670,7 +3670,7 @@
             </a:pPr>
             <a:r>
               <a:rPr lang="de-DE" sz="1200" dirty="0"/>
-              <a:t>„Wie ginge es weiter, wenn ich weitermachen würde?“</a:t>
+              <a:t>„Zum Schluss die Grundlage, auf der das alles steht.“</a:t>
             </a:r>
           </a:p>
         </p:txBody>
@@ -6246,7 +6246,7 @@
             </a:pPr>
             <a:r>
               <a:rPr lang="de-DE" sz="1200" dirty="0"/>
-              <a:t>„Konkret besteht die App aus fünf Bausteinen.“</a:t>
+              <a:t>„Wie kommen die Daten überhaupt in diese App? Der Weg in einem Bild.“</a:t>
             </a:r>
           </a:p>
         </p:txBody>
@@ -6362,7 +6362,7 @@
             </a:pPr>
             <a:r>
               <a:rPr lang="de-DE" sz="1200" dirty="0"/>
-              <a:t>Diese fünf Bausteine sehen wir uns nachher live an. Der entscheidende Satz steht unten: Das Besondere ist nicht, dass die App bessere Prognosen macht. Das Besondere ist, dass sie zeigt, warum Machine Learning bei Aktienkursen an seine Grenzen stößt — und was man trotzdem sinnvoll damit anfangen kann.</a:t>
+              <a:t>Backup-Folie. Einblenden, wenn nach dem Funktionsumfang gefragt wird — in der Demo hast du diese fünf Bausteine bereits gezeigt. Der entscheidende Satz steht unten: Das Besondere ist nicht, dass die App bessere Prognosen macht, sondern dass sie zeigt, warum Machine Learning bei Aktienkursen an seine Grenzen stößt.</a:t>
             </a:r>
           </a:p>
           <a:p>
@@ -6566,7 +6566,7 @@
             </a:pPr>
             <a:r>
               <a:rPr lang="de-DE" sz="1200" dirty="0"/>
-              <a:t>„Kurz, womit das gebaut ist.“</a:t>
+              <a:t>„Jetzt zur Methode — dem roten Faden für den ganzen Rest.“</a:t>
             </a:r>
           </a:p>
         </p:txBody>
@@ -6671,7 +6671,7 @@
             </a:pPr>
             <a:r>
               <a:rPr lang="de-DE" sz="1200" dirty="0"/>
-              <a:t>Der Stack in zwanzig Sekunden: Python und Streamlit für die App. pandas für die Daten, gespeichert in Parquet — ein spaltenorientiertes Format, das deutlich schneller lädt als CSV. scikit-learn für die Modelle, Plotly für die interaktiven Charts, SHAP für die Erklärbarkeit, pytest für die Tests.</a:t>
+              <a:t>Backup-Folie für die Frage „Womit hast du das gebaut?“. Python und Streamlit für die App, pandas und Parquet für die Daten, scikit-learn für die Modelle, Plotly für die Charts, SHAP für die Erklärbarkeit, pytest für die Tests. Alles Open Source, alles reproduzierbar.</a:t>
             </a:r>
           </a:p>
           <a:p>
@@ -8194,7 +8194,7 @@
                 <a:ea typeface="Calibri"/>
                 <a:cs typeface="Calibri"/>
               </a:rPr>
-              <a:t>Referat  ·  27 Minuten</a:t>
+              <a:t>Referat  ·  24 Minuten</a:t>
             </a:r>
           </a:p>
         </p:txBody>

--- a/Präsentation/Final/WealthScope_Praesentation_v1.0_FINAL.pptx
+++ b/Präsentation/Final/WealthScope_Praesentation_v1.0_FINAL.pptx
@@ -366,90 +366,19 @@
           <a:bodyPr/>
           <a:lstStyle/>
           <a:p>
-            <a:pPr>
-              <a:spcBef>
-                <a:spcPts val="1200"/>
-              </a:spcBef>
-            </a:pPr>
-            <a:r>
-              <a:rPr lang="de-DE" sz="1200" b="1" dirty="0"/>
-              <a:t>TIMING  0:00–0:25  ·  ca. 25 Sek</a:t>
-            </a:r>
-          </a:p>
-          <a:p>
-            <a:pPr>
-              <a:spcBef>
-                <a:spcPts val="1200"/>
-              </a:spcBef>
-            </a:pPr>
-            <a:r>
-              <a:rPr lang="de-DE" sz="1200" b="1" dirty="0"/>
-              <a:t>SPRECHTEXT</a:t>
-            </a:r>
-          </a:p>
-          <a:p>
-            <a:pPr>
-              <a:spcBef>
-                <a:spcPts val="400"/>
-              </a:spcBef>
-            </a:pPr>
-            <a:r>
-              <a:rPr lang="de-DE" sz="1200" dirty="0"/>
+            <a:r>
               <a:t>Stellt euch vor, ihr habt gerade euer erstes eigenes Geld gespart. Fünftausend Euro. Und ihr wollt es nicht auf dem Konto verrotten lassen.</a:t>
             </a:r>
           </a:p>
-          <a:p>
-            <a:pPr>
-              <a:spcBef>
-                <a:spcPts val="400"/>
-              </a:spcBef>
-            </a:pPr>
-            <a:r>
-              <a:rPr lang="de-DE" sz="1200" dirty="0"/>
+          <a:p/>
+          <a:p>
+            <a:r>
               <a:t>Genau da fängt diese Geschichte an. Mein Name ist Soufiane Fedan, und ich stelle euch in den nächsten 24 Minuten WealthScope AI vor: eine Finanzanalyse-App, die mit Machine Learning arbeitet.</a:t>
             </a:r>
           </a:p>
-          <a:p>
-            <a:pPr>
-              <a:spcBef>
-                <a:spcPts val="1200"/>
-              </a:spcBef>
-            </a:pPr>
-            <a:r>
-              <a:rPr lang="de-DE" sz="1200" b="1" dirty="0"/>
-              <a:t>REGIE</a:t>
-            </a:r>
-          </a:p>
-          <a:p>
-            <a:pPr>
-              <a:spcBef>
-                <a:spcPts val="400"/>
-              </a:spcBef>
-            </a:pPr>
-            <a:r>
-              <a:rPr lang="de-DE" sz="1200" dirty="0"/>
-              <a:t>Ruhig starten, Blickkontakt ins Publikum, noch nicht auf die Folie schauen. „Fünftausend Euro“ ist der Aufhänger — kurze Pause danach.</a:t>
-            </a:r>
-          </a:p>
-          <a:p>
-            <a:pPr>
-              <a:spcBef>
-                <a:spcPts val="1200"/>
-              </a:spcBef>
-            </a:pPr>
-            <a:r>
-              <a:rPr lang="de-DE" sz="1200" b="1" dirty="0"/>
-              <a:t>ÜBERLEITUNG</a:t>
-            </a:r>
-          </a:p>
-          <a:p>
-            <a:pPr>
-              <a:spcBef>
-                <a:spcPts val="400"/>
-              </a:spcBef>
-            </a:pPr>
-            <a:r>
-              <a:rPr lang="de-DE" sz="1200" dirty="0"/>
+          <a:p/>
+          <a:p>
+            <a:r>
               <a:t>„Damit ihr wisst, wo wir hinlaufen — hier der Fahrplan.“</a:t>
             </a:r>
           </a:p>
@@ -526,112 +455,31 @@
           <a:bodyPr/>
           <a:lstStyle/>
           <a:p>
-            <a:pPr>
-              <a:spcBef>
-                <a:spcPts val="1200"/>
-              </a:spcBef>
-            </a:pPr>
-            <a:r>
-              <a:rPr lang="de-DE" sz="1200" b="1" dirty="0"/>
-              <a:t>TIMING  4:40–5:40  ·  ca. 60 Sek</a:t>
-            </a:r>
-          </a:p>
-          <a:p>
-            <a:pPr>
-              <a:spcBef>
-                <a:spcPts val="1200"/>
-              </a:spcBef>
-            </a:pPr>
-            <a:r>
-              <a:rPr lang="de-DE" sz="1200" b="1" dirty="0"/>
-              <a:t>SPRECHTEXT</a:t>
-            </a:r>
-          </a:p>
-          <a:p>
-            <a:pPr>
-              <a:spcBef>
-                <a:spcPts val="400"/>
-              </a:spcBef>
-            </a:pPr>
-            <a:r>
-              <a:rPr lang="de-DE" sz="1200" dirty="0"/>
+            <a:r>
               <a:t>Die Basis ist ein Kaggle-Datensatz von Boris Marjanovic, lizenziert als CC0 — also gemeinfrei. Kein Lizenzrisiko, volle Nutzungsfreiheit.</a:t>
             </a:r>
           </a:p>
-          <a:p>
-            <a:pPr>
-              <a:spcBef>
-                <a:spcPts val="400"/>
-              </a:spcBef>
-            </a:pPr>
-            <a:r>
-              <a:rPr lang="de-DE" sz="1200" dirty="0"/>
+          <a:p/>
+          <a:p>
+            <a:r>
               <a:t>192.119 Feature-Datenpunkte, 26 Blue-Chip-Ticker, 1962 bis 2017, gespeichert als Parquet.</a:t>
             </a:r>
           </a:p>
-          <a:p>
-            <a:pPr>
-              <a:spcBef>
-                <a:spcPts val="400"/>
-              </a:spcBef>
-            </a:pPr>
-            <a:r>
-              <a:rPr lang="de-DE" sz="1200" dirty="0"/>
+          <a:p/>
+          <a:p>
+            <a:r>
               <a:t>Warum 26 verschiedene Titel und nicht nur einer? Nicht wegen der Menge. Sondern weil unterschiedliche Branchen und unterschiedliche Marktphasen — Boom, Crash, Seitwärtsmarkt — das Modell zwingen, allgemeine Muster zu lernen statt der Eigenheiten einer einzigen Aktie. Von Apple und Microsoft über Coca-Cola und McDonald’s bis Boeing und General Electric.</a:t>
             </a:r>
           </a:p>
-          <a:p>
-            <a:pPr>
-              <a:spcBef>
-                <a:spcPts val="400"/>
-              </a:spcBef>
-            </a:pPr>
-            <a:r>
-              <a:rPr lang="de-DE" sz="1200" dirty="0"/>
+          <a:p/>
+          <a:p>
+            <a:r>
               <a:t>Eine Einschränkung nenne ich direkt hier, nicht erst im Fazit: Survivorship-Bias, die Überlebenden-Verzerrung. Im Datensatz sind nur Unternehmen, die es heute noch gibt. Die pleitegegangenen fehlen — und das schönt systematisch jedes Ergebnis.</a:t>
             </a:r>
           </a:p>
-          <a:p>
-            <a:pPr>
-              <a:spcBef>
-                <a:spcPts val="1200"/>
-              </a:spcBef>
-            </a:pPr>
-            <a:r>
-              <a:rPr lang="de-DE" sz="1200" b="1" dirty="0"/>
-              <a:t>REGIE</a:t>
-            </a:r>
-          </a:p>
-          <a:p>
-            <a:pPr>
-              <a:spcBef>
-                <a:spcPts val="400"/>
-              </a:spcBef>
-            </a:pPr>
-            <a:r>
-              <a:rPr lang="de-DE" sz="1200" dirty="0"/>
-              <a:t>Survivorship-Bias ist ein Punkt, der oft in der Fragerunde kommt. Wer ihn selbst nennt, nimmt ihm die Schärfe.</a:t>
-            </a:r>
-          </a:p>
-          <a:p>
-            <a:pPr>
-              <a:spcBef>
-                <a:spcPts val="1200"/>
-              </a:spcBef>
-            </a:pPr>
-            <a:r>
-              <a:rPr lang="de-DE" sz="1200" b="1" dirty="0"/>
-              <a:t>ÜBERLEITUNG</a:t>
-            </a:r>
-          </a:p>
-          <a:p>
-            <a:pPr>
-              <a:spcBef>
-                <a:spcPts val="400"/>
-              </a:spcBef>
-            </a:pPr>
-            <a:r>
-              <a:rPr lang="de-DE" sz="1200" dirty="0"/>
+          <a:p/>
+          <a:p>
+            <a:r>
               <a:t>„Bevor gerechnet wird, wird geschaut — explorative Datenanalyse.“</a:t>
             </a:r>
           </a:p>
@@ -708,101 +556,25 @@
           <a:bodyPr/>
           <a:lstStyle/>
           <a:p>
-            <a:pPr>
-              <a:spcBef>
-                <a:spcPts val="1200"/>
-              </a:spcBef>
-            </a:pPr>
-            <a:r>
-              <a:rPr lang="de-DE" sz="1200" b="1" dirty="0"/>
-              <a:t>TIMING  5:40–6:20  ·  ca. 40 Sek</a:t>
-            </a:r>
-          </a:p>
-          <a:p>
-            <a:pPr>
-              <a:spcBef>
-                <a:spcPts val="1200"/>
-              </a:spcBef>
-            </a:pPr>
-            <a:r>
-              <a:rPr lang="de-DE" sz="1200" b="1" dirty="0"/>
-              <a:t>SPRECHTEXT</a:t>
-            </a:r>
-          </a:p>
-          <a:p>
-            <a:pPr>
-              <a:spcBef>
-                <a:spcPts val="400"/>
-              </a:spcBef>
-            </a:pPr>
-            <a:r>
-              <a:rPr lang="de-DE" sz="1200" dirty="0"/>
+            <a:r>
               <a:t>Explorative Datenanalyse ist der Schritt, in dem man die Daten anschaut, bevor man rechnet.</a:t>
             </a:r>
           </a:p>
-          <a:p>
-            <a:pPr>
-              <a:spcBef>
-                <a:spcPts val="400"/>
-              </a:spcBef>
-            </a:pPr>
-            <a:r>
-              <a:rPr lang="de-DE" sz="1200" dirty="0"/>
+          <a:p/>
+          <a:p>
+            <a:r>
               <a:t>Ich habe für alle acht Features Histogramme mit Dichteschätzung erstellt, Boxplots zur Ausreißer-Erkennung, Streudiagramme gegen die Zielvariable und zwei Korrelationsmatrizen — Pearson für lineare, Spearman für rangbasierte Zusammenhänge.</a:t>
             </a:r>
           </a:p>
-          <a:p>
-            <a:pPr>
-              <a:spcBef>
-                <a:spcPts val="400"/>
-              </a:spcBef>
-            </a:pPr>
-            <a:r>
-              <a:rPr lang="de-DE" sz="1200" dirty="0"/>
+          <a:p/>
+          <a:p>
+            <a:r>
               <a:t>Das Ergebnis in zwei Sätzen: Die Verteilungen sind leicht schief — deshalb fällt später die Entscheidung für den Median statt für den Mittelwert. Und die Korrelationen sind nur moderat, es gibt also kein Multikollinearitätsproblem: Keine zwei Features sagen im Kern dasselbe aus.</a:t>
             </a:r>
           </a:p>
-          <a:p>
-            <a:pPr>
-              <a:spcBef>
-                <a:spcPts val="1200"/>
-              </a:spcBef>
-            </a:pPr>
-            <a:r>
-              <a:rPr lang="de-DE" sz="1200" b="1" dirty="0"/>
-              <a:t>REGIE</a:t>
-            </a:r>
-          </a:p>
-          <a:p>
-            <a:pPr>
-              <a:spcBef>
-                <a:spcPts val="400"/>
-              </a:spcBef>
-            </a:pPr>
-            <a:r>
-              <a:rPr lang="de-DE" sz="1200" dirty="0"/>
-              <a:t>Zwischenschritt — zügig sprechen, Blick auf die Charts lenken. Bei Zeitdruck kürzbar.</a:t>
-            </a:r>
-          </a:p>
-          <a:p>
-            <a:pPr>
-              <a:spcBef>
-                <a:spcPts val="1200"/>
-              </a:spcBef>
-            </a:pPr>
-            <a:r>
-              <a:rPr lang="de-DE" sz="1200" b="1" dirty="0"/>
-              <a:t>ÜBERLEITUNG</a:t>
-            </a:r>
-          </a:p>
-          <a:p>
-            <a:pPr>
-              <a:spcBef>
-                <a:spcPts val="400"/>
-              </a:spcBef>
-            </a:pPr>
-            <a:r>
-              <a:rPr lang="de-DE" sz="1200" dirty="0"/>
+          <a:p/>
+          <a:p>
+            <a:r>
               <a:t>„Ein Befund aus der EDA war aber wichtig genug für eine eigene Folie: fehlende Werte.“</a:t>
             </a:r>
           </a:p>
@@ -879,112 +651,31 @@
           <a:bodyPr/>
           <a:lstStyle/>
           <a:p>
-            <a:pPr>
-              <a:spcBef>
-                <a:spcPts val="1200"/>
-              </a:spcBef>
-            </a:pPr>
-            <a:r>
-              <a:rPr lang="de-DE" sz="1200" b="1" dirty="0"/>
-              <a:t>TIMING  6:20–7:20  ·  ca. 60 Sek</a:t>
-            </a:r>
-          </a:p>
-          <a:p>
-            <a:pPr>
-              <a:spcBef>
-                <a:spcPts val="1200"/>
-              </a:spcBef>
-            </a:pPr>
-            <a:r>
-              <a:rPr lang="de-DE" sz="1200" b="1" dirty="0"/>
-              <a:t>SPRECHTEXT</a:t>
-            </a:r>
-          </a:p>
-          <a:p>
-            <a:pPr>
-              <a:spcBef>
-                <a:spcPts val="400"/>
-              </a:spcBef>
-            </a:pPr>
-            <a:r>
-              <a:rPr lang="de-DE" sz="1200" dirty="0"/>
+            <a:r>
               <a:t>In den Moving-Average-Features fehlen Werte — und zwar systematisch am Anfang jeder Aktie. Ein 200-Tage-Durchschnitt braucht eben erst einmal 200 Handelstage, bevor er überhaupt existiert.</a:t>
             </a:r>
           </a:p>
-          <a:p>
-            <a:pPr>
-              <a:spcBef>
-                <a:spcPts val="400"/>
-              </a:spcBef>
-            </a:pPr>
-            <a:r>
-              <a:rPr lang="de-DE" sz="1200" dirty="0"/>
+          <a:p/>
+          <a:p>
+            <a:r>
               <a:t>In der Statistik unterscheidet man drei Arten fehlender Werte: MCAR, MAR und MNAR. MCAR heißt Missing Completely At Random — das Fehlen hängt weder vom Wert selbst noch von anderen Variablen ab. Genau das ist hier der Fall, und das ist der günstigste Fall überhaupt, weil man die Lücken dann gefahrlos auffüllen darf.</a:t>
             </a:r>
           </a:p>
-          <a:p>
-            <a:pPr>
-              <a:spcBef>
-                <a:spcPts val="400"/>
-              </a:spcBef>
-            </a:pPr>
-            <a:r>
-              <a:rPr lang="de-DE" sz="1200" dirty="0"/>
+          <a:p/>
+          <a:p>
+            <a:r>
               <a:t>Dieses Auffüllen heißt Imputation. Ich habe drei Strategien verglichen: Mittelwert, Median und KNN mit fünf Nachbarn. Der Median hat gewonnen — robust gegen Ausreißer und rechnerisch günstig.</a:t>
             </a:r>
           </a:p>
-          <a:p>
-            <a:pPr>
-              <a:spcBef>
-                <a:spcPts val="400"/>
-              </a:spcBef>
-            </a:pPr>
-            <a:r>
-              <a:rPr lang="de-DE" sz="1200" dirty="0"/>
+          <a:p/>
+          <a:p>
+            <a:r>
               <a:t>Warum das kein akademisches Detail ist: Li und Kollegen haben 2024 acht Imputationsverfahren an über zehntausend Kohortenfällen verglichen, bei zwanzig Prozent künstlich erzeugten Fehlwerten. Ihr Ergebnis: Das Verfahren macht einen messbaren Unterschied in der Modellgüte — am besten schnitten KNN und Random Forest ab. Die Wahl der Imputation ist also eine belegte Weichenstellung, keine Formalie.</a:t>
             </a:r>
           </a:p>
-          <a:p>
-            <a:pPr>
-              <a:spcBef>
-                <a:spcPts val="1200"/>
-              </a:spcBef>
-            </a:pPr>
-            <a:r>
-              <a:rPr lang="de-DE" sz="1200" b="1" dirty="0"/>
-              <a:t>REGIE</a:t>
-            </a:r>
-          </a:p>
-          <a:p>
-            <a:pPr>
-              <a:spcBef>
-                <a:spcPts val="400"/>
-              </a:spcBef>
-            </a:pPr>
-            <a:r>
-              <a:rPr lang="de-DE" sz="1200" dirty="0"/>
-              <a:t>MCAR unbedingt auflösen und übersetzen — nicht als Abkürzung stehen lassen.</a:t>
-            </a:r>
-          </a:p>
-          <a:p>
-            <a:pPr>
-              <a:spcBef>
-                <a:spcPts val="1200"/>
-              </a:spcBef>
-            </a:pPr>
-            <a:r>
-              <a:rPr lang="de-DE" sz="1200" b="1" dirty="0"/>
-              <a:t>ÜBERLEITUNG</a:t>
-            </a:r>
-          </a:p>
-          <a:p>
-            <a:pPr>
-              <a:spcBef>
-                <a:spcPts val="400"/>
-              </a:spcBef>
-            </a:pPr>
-            <a:r>
-              <a:rPr lang="de-DE" sz="1200" dirty="0"/>
+          <a:p/>
+          <a:p>
+            <a:r>
               <a:t>„Zweites Qualitätsthema — und das wichtigste des ganzen Projekts.“</a:t>
             </a:r>
           </a:p>
@@ -1061,112 +752,31 @@
           <a:bodyPr/>
           <a:lstStyle/>
           <a:p>
-            <a:pPr>
-              <a:spcBef>
-                <a:spcPts val="1200"/>
-              </a:spcBef>
-            </a:pPr>
-            <a:r>
-              <a:rPr lang="de-DE" sz="1200" b="1" dirty="0"/>
-              <a:t>TIMING  7:20–8:20  ·  ca. 60 Sek</a:t>
-            </a:r>
-          </a:p>
-          <a:p>
-            <a:pPr>
-              <a:spcBef>
-                <a:spcPts val="1200"/>
-              </a:spcBef>
-            </a:pPr>
-            <a:r>
-              <a:rPr lang="de-DE" sz="1200" b="1" dirty="0"/>
-              <a:t>SPRECHTEXT</a:t>
-            </a:r>
-          </a:p>
-          <a:p>
-            <a:pPr>
-              <a:spcBef>
-                <a:spcPts val="400"/>
-              </a:spcBef>
-            </a:pPr>
-            <a:r>
-              <a:rPr lang="de-DE" sz="1200" dirty="0"/>
+            <a:r>
               <a:t>Ich benutze den StandardScaler. Der rechnet jedes Feature so um, dass es Mittelwert null und Standardabweichung eins hat — das nennt man Z-Score-Normierung. Ohne das würde ein Merkmal, das in Tausendern misst, ein Merkmal, das in Prozent misst, schlicht überstimmen. Pinheiro und Kollegen haben das 2025 systematisch vermessen — zwölf Skalierungsverfahren über vierzehn Algorithmen und sechzehn Datensätze. Ihr Befund: Ensembles wie der Random Forest bleiben weitgehend unbeeinflusst, während Logistische Regression, SVM und neuronale Netze stark auf die Wahl des Scalers reagieren. Genau deshalb skaliere ich nur die beiden linearen Modelle.</a:t>
             </a:r>
           </a:p>
-          <a:p>
-            <a:pPr>
-              <a:spcBef>
-                <a:spcPts val="400"/>
-              </a:spcBef>
-            </a:pPr>
-            <a:r>
-              <a:rPr lang="de-DE" sz="1200" dirty="0"/>
+          <a:p/>
+          <a:p>
+            <a:r>
               <a:t>Und jetzt der wichtigste Satz des Vortrags: Data Leakage. Das ist, wenn Information aus den Testdaten ins Training sickert — zum Beispiel, wenn man den Scaler auf dem Gesamtdatensatz anpasst. Dann kennt das Modell indirekt schon den Mittelwert der Zukunft.</a:t>
             </a:r>
           </a:p>
-          <a:p>
-            <a:pPr>
-              <a:spcBef>
-                <a:spcPts val="400"/>
-              </a:spcBef>
-            </a:pPr>
-            <a:r>
-              <a:rPr lang="de-DE" sz="1200" dirty="0"/>
+          <a:p/>
+          <a:p>
+            <a:r>
               <a:t>Deshalb wird der Scaler ausschließlich auf den Trainingsdaten gefittet. Nur auf X_train. Das ist der Unterschied zwischen einem Modell, das in der Realität funktioniert, und einem, das nur im Labor gut aussieht.</a:t>
             </a:r>
           </a:p>
-          <a:p>
-            <a:pPr>
-              <a:spcBef>
-                <a:spcPts val="400"/>
-              </a:spcBef>
-            </a:pPr>
-            <a:r>
-              <a:rPr lang="de-DE" sz="1200" dirty="0"/>
+          <a:p/>
+          <a:p>
+            <a:r>
               <a:t>Und weil das sonst wie eine Formalie klingt: Ich habe gegengerechnet, wie viel man sich ohne diese Disziplin erschwindeln würde. Die Zahl zeige ich euch bei den Ergebnissen — sie hat mich selbst überrascht.</a:t>
             </a:r>
           </a:p>
-          <a:p>
-            <a:pPr>
-              <a:spcBef>
-                <a:spcPts val="1200"/>
-              </a:spcBef>
-            </a:pPr>
-            <a:r>
-              <a:rPr lang="de-DE" sz="1200" b="1" dirty="0"/>
-              <a:t>REGIE</a:t>
-            </a:r>
-          </a:p>
-          <a:p>
-            <a:pPr>
-              <a:spcBef>
-                <a:spcPts val="400"/>
-              </a:spcBef>
-            </a:pPr>
-            <a:r>
-              <a:rPr lang="de-DE" sz="1200" dirty="0"/>
-              <a:t>Beim Leakage-Absatz langsamer werden und das Publikum direkt ansprechen. Das ist der Kern der wissenschaftlichen Sauberkeit. Der letzte Satz ist ein bewusster Cliffhanger auf Folie 19, wo die Auflösung mit 0,581 kommt.</a:t>
-            </a:r>
-          </a:p>
-          <a:p>
-            <a:pPr>
-              <a:spcBef>
-                <a:spcPts val="1200"/>
-              </a:spcBef>
-            </a:pPr>
-            <a:r>
-              <a:rPr lang="de-DE" sz="1200" b="1" dirty="0"/>
-              <a:t>ÜBERLEITUNG</a:t>
-            </a:r>
-          </a:p>
-          <a:p>
-            <a:pPr>
-              <a:spcBef>
-                <a:spcPts val="400"/>
-              </a:spcBef>
-            </a:pPr>
-            <a:r>
-              <a:rPr lang="de-DE" sz="1200" dirty="0"/>
+          <a:p/>
+          <a:p>
+            <a:r>
               <a:t>„Damit ist der Methodikteil durch. Kurzer Halt — was ist bis hierhin unklar?“</a:t>
             </a:r>
           </a:p>
@@ -1243,101 +853,13 @@
           <a:bodyPr/>
           <a:lstStyle/>
           <a:p>
-            <a:pPr>
-              <a:spcBef>
-                <a:spcPts val="1200"/>
-              </a:spcBef>
-            </a:pPr>
-            <a:r>
-              <a:rPr lang="de-DE" sz="1200" b="1" dirty="0"/>
-              <a:t>TIMING  8:20–9:05  ·  ca. 45 Sek  ·  FRAGEFENSTER I</a:t>
-            </a:r>
-          </a:p>
-          <a:p>
-            <a:pPr>
-              <a:spcBef>
-                <a:spcPts val="1200"/>
-              </a:spcBef>
-            </a:pPr>
-            <a:r>
-              <a:rPr lang="de-DE" sz="1200" b="1" dirty="0"/>
-              <a:t>SPRECHTEXT</a:t>
-            </a:r>
-          </a:p>
-          <a:p>
-            <a:pPr>
-              <a:spcBef>
-                <a:spcPts val="400"/>
-              </a:spcBef>
-            </a:pPr>
-            <a:r>
-              <a:rPr lang="de-DE" sz="1200" dirty="0"/>
+            <a:r>
               <a:t>Kurzer Halt. Wir haben jetzt die Daten, die fehlenden Werte, die Skalierung und Data Leakage durch — das war der methodisch dichteste Teil. Was ist bis hierhin unklar?</a:t>
             </a:r>
           </a:p>
-          <a:p>
-            <a:pPr>
-              <a:spcBef>
-                <a:spcPts val="1200"/>
-              </a:spcBef>
-            </a:pPr>
-            <a:r>
-              <a:rPr lang="de-DE" sz="1200" b="1" dirty="0"/>
-              <a:t>MODERATION</a:t>
-            </a:r>
-          </a:p>
-          <a:p>
-            <a:pPr>
-              <a:spcBef>
-                <a:spcPts val="400"/>
-              </a:spcBef>
-            </a:pPr>
-            <a:r>
-              <a:rPr lang="de-DE" sz="1200" dirty="0"/>
-              <a:t>Nach der Frage bis fünf zählen und das Publikum anschauen. Stille ist hier normal und kein Misserfolg. Wenn niemand fragt, selbst eine Frage aufwerfen: „Die häufigste Rückfrage an dieser Stelle ist, warum der Median und nicht KNN — kurz gesagt: gleichwertige Güte, deutlich weniger Rechenaufwand.“</a:t>
-            </a:r>
-          </a:p>
-          <a:p>
-            <a:pPr>
-              <a:spcBef>
-                <a:spcPts val="1200"/>
-              </a:spcBef>
-            </a:pPr>
-            <a:r>
-              <a:rPr lang="de-DE" sz="1200" b="1" dirty="0"/>
-              <a:t>ZEITDISZIPLIN</a:t>
-            </a:r>
-          </a:p>
-          <a:p>
-            <a:pPr>
-              <a:spcBef>
-                <a:spcPts val="400"/>
-              </a:spcBef>
-            </a:pPr>
-            <a:r>
-              <a:rPr lang="de-DE" sz="1200" dirty="0"/>
-              <a:t>Harte Grenze 45 Sekunden. Maximal zwei Fragen. Bei der dritten: „Die nehme ich mit in die Runde am Ende“ — und weiter. Wenn eine Antwort tiefer geht, liegen die Belegfolien 29, 30 und 31 im Anhang bereit.</a:t>
-            </a:r>
-          </a:p>
-          <a:p>
-            <a:pPr>
-              <a:spcBef>
-                <a:spcPts val="1200"/>
-              </a:spcBef>
-            </a:pPr>
-            <a:r>
-              <a:rPr lang="de-DE" sz="1200" b="1" dirty="0"/>
-              <a:t>ÜBERLEITUNG</a:t>
-            </a:r>
-          </a:p>
-          <a:p>
-            <a:pPr>
-              <a:spcBef>
-                <a:spcPts val="400"/>
-              </a:spcBef>
-            </a:pPr>
-            <a:r>
-              <a:rPr lang="de-DE" sz="1200" dirty="0"/>
+          <a:p/>
+          <a:p>
+            <a:r>
               <a:t>„Daten verstanden. Jetzt bauen wir daraus die Merkmale.“</a:t>
             </a:r>
           </a:p>
@@ -1414,145 +936,49 @@
           <a:bodyPr/>
           <a:lstStyle/>
           <a:p>
-            <a:pPr>
-              <a:spcBef>
-                <a:spcPts val="1200"/>
-              </a:spcBef>
-            </a:pPr>
-            <a:r>
-              <a:rPr lang="de-DE" sz="1200" b="1" dirty="0"/>
-              <a:t>TIMING  9:05–11:35  ·  ca. 150 Sek</a:t>
-            </a:r>
-          </a:p>
-          <a:p>
-            <a:pPr>
-              <a:spcBef>
-                <a:spcPts val="1200"/>
-              </a:spcBef>
-            </a:pPr>
-            <a:r>
-              <a:rPr lang="de-DE" sz="1200" b="1" dirty="0"/>
-              <a:t>SPRECHTEXT</a:t>
-            </a:r>
-          </a:p>
-          <a:p>
-            <a:pPr>
-              <a:spcBef>
-                <a:spcPts val="400"/>
-              </a:spcBef>
-            </a:pPr>
-            <a:r>
-              <a:rPr lang="de-DE" sz="1200" dirty="0"/>
+            <a:r>
               <a:t>Phase drei: Analytics — Feature Engineering. Das ist der Schritt, in dem aus Rohdaten die Merkmale werden, mit denen ein Modell überhaupt etwas anfangen kann.</a:t>
             </a:r>
           </a:p>
-          <a:p>
-            <a:pPr>
-              <a:spcBef>
-                <a:spcPts val="400"/>
-              </a:spcBef>
-            </a:pPr>
-            <a:r>
-              <a:rPr lang="de-DE" sz="1200" dirty="0"/>
+          <a:p/>
+          <a:p>
+            <a:r>
               <a:t>Die Rohdaten sind OHLCV: Open, High, Low, Close, Volume — Eröffnungskurs, Tageshoch, Tagestief, Schlusskurs und Handelsvolumen. Ein Modell kann mit dem nackten Kurs nichts anfangen: „Apple steht bei 180“ ist ohne Kontext bedeutungslos. Also destilliere ich daraus acht Features in drei Gruppen.</a:t>
             </a:r>
           </a:p>
-          <a:p>
-            <a:pPr>
-              <a:spcBef>
-                <a:spcPts val="400"/>
-              </a:spcBef>
-            </a:pPr>
-            <a:r>
-              <a:rPr lang="de-DE" sz="1200" dirty="0"/>
+          <a:p/>
+          <a:p>
+            <a:r>
               <a:t>Gruppe eins, die Rendite-Features: Tagesrendite, 5-Tages-Rendite und 20-Tages-Rendite. Also: Wie stark hat sich der Kurs kurz-, mittel- und etwas längerfristig bewegt — in Prozent, nicht in Dollar. Erst dadurch werden Apple und Coca-Cola überhaupt vergleichbar.</a:t>
             </a:r>
           </a:p>
-          <a:p>
-            <a:pPr>
-              <a:spcBef>
-                <a:spcPts val="400"/>
-              </a:spcBef>
-            </a:pPr>
-            <a:r>
-              <a:rPr lang="de-DE" sz="1200" dirty="0"/>
+          <a:p/>
+          <a:p>
+            <a:r>
               <a:t>Gruppe zwei, die Trend-Features: der Abstand zum gleitenden Durchschnitt über 20, 50 und 200 Tage. Ein gleitender Durchschnitt ist einfach der Mittelwert der letzten N Schlusskurse — er glättet das Rauschen. Liegt der aktuelle Kurs deutlich über dem 200-Tage-Durchschnitt, ist das entweder ein intakter Aufwärtstrend oder eine Übertreibung, die zurückkommt. Dieses Zurücklaufen zum Mittelwert nennt man Mean Reversion.</a:t>
             </a:r>
           </a:p>
-          <a:p>
-            <a:pPr>
-              <a:spcBef>
-                <a:spcPts val="400"/>
-              </a:spcBef>
-            </a:pPr>
-            <a:r>
-              <a:rPr lang="de-DE" sz="1200" dirty="0"/>
+          <a:p/>
+          <a:p>
+            <a:r>
               <a:t>Gruppe drei, die Risiko-Features: die Volatilität über 20 Tage — also wie stark der Kurs schwankt — und der Drawdown, der Abstand zum letzten Allzeithoch. Der Drawdown beantwortet die Frage: Wie viel Schmerz hätte ich gerade, wenn ich am Hoch gekauft hätte?</a:t>
             </a:r>
           </a:p>
-          <a:p>
-            <a:pPr>
-              <a:spcBef>
-                <a:spcPts val="400"/>
-              </a:spcBef>
-            </a:pPr>
-            <a:r>
-              <a:rPr lang="de-DE" sz="1200" dirty="0"/>
+          <a:p/>
+          <a:p>
+            <a:r>
               <a:t>Und dann die Zielvariable, also das, was das Modell vorhersagen soll: target_20d. Sie ist binär, kennt also nur ja oder nein — steht der Kurs in 20 Handelstagen, das ist rund ein Handelsmonat, höher als heute?</a:t>
             </a:r>
           </a:p>
-          <a:p>
-            <a:pPr>
-              <a:spcBef>
-                <a:spcPts val="400"/>
-              </a:spcBef>
-            </a:pPr>
-            <a:r>
-              <a:rPr lang="de-DE" sz="1200" dirty="0"/>
+          <a:p/>
+          <a:p>
+            <a:r>
               <a:t>Warum eine Richtungsfrage und keine Kursprognose? Weil an effizienten Märkten die exakte Zahl praktisch nicht vorhersagbar ist. „Rauf oder runter“ ist die ehrlichere, robustere und sauber messbare Frage — und sie lässt sich mit Klassifikationsmetriken seriös bewerten.</a:t>
             </a:r>
           </a:p>
-          <a:p>
-            <a:pPr>
-              <a:spcBef>
-                <a:spcPts val="1200"/>
-              </a:spcBef>
-            </a:pPr>
-            <a:r>
-              <a:rPr lang="de-DE" sz="1200" b="1" dirty="0"/>
-              <a:t>REGIE</a:t>
-            </a:r>
-          </a:p>
-          <a:p>
-            <a:pPr>
-              <a:spcBef>
-                <a:spcPts val="400"/>
-              </a:spcBef>
-            </a:pPr>
-            <a:r>
-              <a:rPr lang="de-DE" sz="1200" dirty="0"/>
-              <a:t>Die drei Gruppen einzeln antippen, je ca. 30 Sekunden. Beim Drawdown ruhig die Publikumsfrage stellen — das erzeugt Aufmerksamkeit. Diese acht Features tauchen in der Demo bei SHAP namentlich wieder auf; das kurz ankündigen zahlt sich aus.</a:t>
-            </a:r>
-          </a:p>
-          <a:p>
-            <a:pPr>
-              <a:spcBef>
-                <a:spcPts val="1200"/>
-              </a:spcBef>
-            </a:pPr>
-            <a:r>
-              <a:rPr lang="de-DE" sz="1200" b="1" dirty="0"/>
-              <a:t>ÜBERLEITUNG</a:t>
-            </a:r>
-          </a:p>
-          <a:p>
-            <a:pPr>
-              <a:spcBef>
-                <a:spcPts val="400"/>
-              </a:spcBef>
-            </a:pPr>
-            <a:r>
-              <a:rPr lang="de-DE" sz="1200" dirty="0"/>
+          <a:p/>
+          <a:p>
+            <a:r>
               <a:t>„Acht Merkmale, eine Zielvariable. Welches Modell lernt daraus?“</a:t>
             </a:r>
           </a:p>
@@ -1629,134 +1055,43 @@
           <a:bodyPr/>
           <a:lstStyle/>
           <a:p>
-            <a:pPr>
-              <a:spcBef>
-                <a:spcPts val="1200"/>
-              </a:spcBef>
-            </a:pPr>
-            <a:r>
-              <a:rPr lang="de-DE" sz="1200" b="1" dirty="0"/>
-              <a:t>TIMING  11:35–14:05  ·  ca. 150 Sek</a:t>
-            </a:r>
-          </a:p>
-          <a:p>
-            <a:pPr>
-              <a:spcBef>
-                <a:spcPts val="1200"/>
-              </a:spcBef>
-            </a:pPr>
-            <a:r>
-              <a:rPr lang="de-DE" sz="1200" b="1" dirty="0"/>
-              <a:t>SPRECHTEXT</a:t>
-            </a:r>
-          </a:p>
-          <a:p>
-            <a:pPr>
-              <a:spcBef>
-                <a:spcPts val="400"/>
-              </a:spcBef>
-            </a:pPr>
-            <a:r>
-              <a:rPr lang="de-DE" sz="1200" dirty="0"/>
+            <a:r>
               <a:t>Phase vier: Algorithm. Und hier steckt meine wichtigste Designentscheidung: Ich habe nicht ein Modell gebaut, sondern fünf Modellgenerationen verglichen.</a:t>
             </a:r>
           </a:p>
-          <a:p>
-            <a:pPr>
-              <a:spcBef>
-                <a:spcPts val="400"/>
-              </a:spcBef>
-            </a:pPr>
-            <a:r>
-              <a:rPr lang="de-DE" sz="1200" dirty="0"/>
+          <a:p/>
+          <a:p>
+            <a:r>
               <a:t>Ganz links die Baseline, der DummyClassifier. Der kann genau eines: immer die häufigste Klasse raten. In meinem Testzeitraum waren 59 Prozent aller Zeitpunkte steigend — also sagt der Dummy stur „rauf“ und liegt in 59 Prozent der Fälle richtig, ohne irgendetwas gelernt zu haben. Diese Zahl ist mein Nullpunkt: Alles, was ich baue, muss besser sein als stumpfes Raten. Und ich sage schon jetzt: Diese Latte liegt höher, als sie aussieht.</a:t>
             </a:r>
           </a:p>
-          <a:p>
-            <a:pPr>
-              <a:spcBef>
-                <a:spcPts val="400"/>
-              </a:spcBef>
-            </a:pPr>
-            <a:r>
-              <a:rPr lang="de-DE" sz="1200" dirty="0"/>
+          <a:p/>
+          <a:p>
+            <a:r>
               <a:t>Dann die linearen Modelle: logistische Regression und Linear SVM. Beide ziehen im Kern eine gerade Trennlinie durch den Merkmalsraum. Sie beantworten die Frage: Gibt es überhaupt eine einfache, lineare Struktur im Signal?</a:t>
             </a:r>
           </a:p>
-          <a:p>
-            <a:pPr>
-              <a:spcBef>
-                <a:spcPts val="400"/>
-              </a:spcBef>
-            </a:pPr>
-            <a:r>
-              <a:rPr lang="de-DE" sz="1200" dirty="0"/>
+          <a:p/>
+          <a:p>
+            <a:r>
               <a:t>Dann die Baumfamilie. Ein Entscheidungsbaum stellt verschachtelte Ja-Nein-Fragen: Liegt der Kurs über dem 200-Tage-Schnitt? Wenn ja, ist die Volatilität hoch? Damit bildet er auch nichtlineare Zusammenhänge ab. Sein Problem: Ein einzelner Baum lernt die Trainingsdaten gern auswendig — das nennt man Overfitting.</a:t>
             </a:r>
           </a:p>
-          <a:p>
-            <a:pPr>
-              <a:spcBef>
-                <a:spcPts val="400"/>
-              </a:spcBef>
-            </a:pPr>
-            <a:r>
-              <a:rPr lang="de-DE" sz="1200" dirty="0"/>
+          <a:p/>
+          <a:p>
+            <a:r>
               <a:t>Deshalb der Random Forest. Der baut 200 leicht unterschiedliche Bäume auf zufälligen Teilmengen der Daten und lässt sie abstimmen. Die Einzelfehler mitteln sich weg — das ist Varianzreduktion. Und als Nebenprodukt verrät er mir, welche Merkmale er am häufigsten benutzt hat: die Feature Importance.</a:t>
             </a:r>
           </a:p>
-          <a:p>
-            <a:pPr>
-              <a:spcBef>
-                <a:spcPts val="400"/>
-              </a:spcBef>
-            </a:pPr>
-            <a:r>
-              <a:rPr lang="de-DE" sz="1200" dirty="0"/>
+          <a:p/>
+          <a:p>
+            <a:r>
               <a:t>Und was ich bewusst nicht gemacht habe: ein neuronales Netz. Bei acht Features und einem so schwachen Signal bringt zusätzliche Komplexität keinen Erkenntnisgewinn — sie macht das Ergebnis nur schwerer erklärbar. Occam’s Razor: Von zwei Erklärungen mit gleicher Leistung gewinnt die einfachere.</a:t>
             </a:r>
           </a:p>
-          <a:p>
-            <a:pPr>
-              <a:spcBef>
-                <a:spcPts val="1200"/>
-              </a:spcBef>
-            </a:pPr>
-            <a:r>
-              <a:rPr lang="de-DE" sz="1200" b="1" dirty="0"/>
-              <a:t>REGIE</a:t>
-            </a:r>
-          </a:p>
-          <a:p>
-            <a:pPr>
-              <a:spcBef>
-                <a:spcPts val="400"/>
-              </a:spcBef>
-            </a:pPr>
-            <a:r>
-              <a:rPr lang="de-DE" sz="1200" dirty="0"/>
-              <a:t>Die Kette Baseline – linear – Bäume abschreiten. Der Satz „Diese Latte liegt höher, als sie aussieht“ ist der Cliffhanger auf das Ergebnis.</a:t>
-            </a:r>
-          </a:p>
-          <a:p>
-            <a:pPr>
-              <a:spcBef>
-                <a:spcPts val="1200"/>
-              </a:spcBef>
-            </a:pPr>
-            <a:r>
-              <a:rPr lang="de-DE" sz="1200" b="1" dirty="0"/>
-              <a:t>ÜBERLEITUNG</a:t>
-            </a:r>
-          </a:p>
-          <a:p>
-            <a:pPr>
-              <a:spcBef>
-                <a:spcPts val="400"/>
-              </a:spcBef>
-            </a:pPr>
-            <a:r>
-              <a:rPr lang="de-DE" sz="1200" dirty="0"/>
+          <a:p/>
+          <a:p>
+            <a:r>
               <a:t>„Jetzt wird trainiert — und zwar ohne einen einzigen Blick in die Zukunft.“</a:t>
             </a:r>
           </a:p>
@@ -1833,112 +1168,31 @@
           <a:bodyPr/>
           <a:lstStyle/>
           <a:p>
-            <a:pPr>
-              <a:spcBef>
-                <a:spcPts val="1200"/>
-              </a:spcBef>
-            </a:pPr>
-            <a:r>
-              <a:rPr lang="de-DE" sz="1200" b="1" dirty="0"/>
-              <a:t>TIMING  14:05–14:50  ·  ca. 45 Sek</a:t>
-            </a:r>
-          </a:p>
-          <a:p>
-            <a:pPr>
-              <a:spcBef>
-                <a:spcPts val="1200"/>
-              </a:spcBef>
-            </a:pPr>
-            <a:r>
-              <a:rPr lang="de-DE" sz="1200" b="1" dirty="0"/>
-              <a:t>SPRECHTEXT</a:t>
-            </a:r>
-          </a:p>
-          <a:p>
-            <a:pPr>
-              <a:spcBef>
-                <a:spcPts val="400"/>
-              </a:spcBef>
-            </a:pPr>
-            <a:r>
-              <a:rPr lang="de-DE" sz="1200" dirty="0"/>
+            <a:r>
               <a:t>Phase fünf: Adaption. Die Hyperparameter: 200 Bäume, maximale Tiefe 8, mindestens 5 Beobachtungen pro Blatt. Die letzten beiden sind Bremsen gegen das Auswendiglernen — je flacher der Baum und je voller das Blatt, desto weniger Rauschen lernt er mit.</a:t>
             </a:r>
           </a:p>
-          <a:p>
-            <a:pPr>
-              <a:spcBef>
-                <a:spcPts val="400"/>
-              </a:spcBef>
-            </a:pPr>
-            <a:r>
-              <a:rPr lang="de-DE" sz="1200" dirty="0"/>
+          <a:p/>
+          <a:p>
+            <a:r>
               <a:t>Alles läuft in einer Pipeline: erst Imputation, dann Skalierung, dann Modell — als ein einziges Objekt. Dadurch kann in keinem Trainingsfenster Wissen aus den Testdaten in die Vorverarbeitung sickern.</a:t>
             </a:r>
           </a:p>
-          <a:p>
-            <a:pPr>
-              <a:spcBef>
-                <a:spcPts val="400"/>
-              </a:spcBef>
-            </a:pPr>
-            <a:r>
-              <a:rPr lang="de-DE" sz="1200" dirty="0"/>
+          <a:p/>
+          <a:p>
+            <a:r>
               <a:t>Und der zeitliche Aufbau: Training bis Oktober 2006. Danach 20 Handelstage Sperrzone, damit sich Trainings- und Testfenster nicht überlappen — sonst würde die Zielvariable vom letzten Trainingstag schon in den Testzeitraum hineinreichen. Der Test läuft dann unangetastet von November 2006 bis November 2017. Elf Jahre, die das Modell nie gesehen hat.</a:t>
             </a:r>
           </a:p>
-          <a:p>
-            <a:pPr>
-              <a:spcBef>
-                <a:spcPts val="400"/>
-              </a:spcBef>
-            </a:pPr>
-            <a:r>
-              <a:rPr lang="de-DE" sz="1200" dirty="0"/>
+          <a:p/>
+          <a:p>
+            <a:r>
               <a:t>Zusätzlich vier Walk-forward-Folds: Das Trainingsfenster wächst schrittweise mit, und jedes Mal wird auf dem nächsten Zeitabschnitt getestet. Damit prüfe ich, ob das Ergebnis über verschiedene Zeiträume stabil bleibt oder nur Zufall war.</a:t>
             </a:r>
           </a:p>
-          <a:p>
-            <a:pPr>
-              <a:spcBef>
-                <a:spcPts val="1200"/>
-              </a:spcBef>
-            </a:pPr>
-            <a:r>
-              <a:rPr lang="de-DE" sz="1200" b="1" dirty="0"/>
-              <a:t>REGIE</a:t>
-            </a:r>
-          </a:p>
-          <a:p>
-            <a:pPr>
-              <a:spcBef>
-                <a:spcPts val="400"/>
-              </a:spcBef>
-            </a:pPr>
-            <a:r>
-              <a:rPr lang="de-DE" sz="1200" dirty="0"/>
-              <a:t>Die Sperrzone ist ein Detail, das Prüfende schätzen. Kurz betonen.</a:t>
-            </a:r>
-          </a:p>
-          <a:p>
-            <a:pPr>
-              <a:spcBef>
-                <a:spcPts val="1200"/>
-              </a:spcBef>
-            </a:pPr>
-            <a:r>
-              <a:rPr lang="de-DE" sz="1200" b="1" dirty="0"/>
-              <a:t>ÜBERLEITUNG</a:t>
-            </a:r>
-          </a:p>
-          <a:p>
-            <a:pPr>
-              <a:spcBef>
-                <a:spcPts val="400"/>
-              </a:spcBef>
-            </a:pPr>
-            <a:r>
-              <a:rPr lang="de-DE" sz="1200" dirty="0"/>
+          <a:p/>
+          <a:p>
+            <a:r>
               <a:t>„Und jetzt das Ergebnis. Ich könnte hier eine schöne Zahl zeigen. Ich zeige euch die echte.“</a:t>
             </a:r>
           </a:p>
@@ -2015,123 +1269,37 @@
           <a:bodyPr/>
           <a:lstStyle/>
           <a:p>
-            <a:pPr>
-              <a:spcBef>
-                <a:spcPts val="1200"/>
-              </a:spcBef>
-            </a:pPr>
-            <a:r>
-              <a:rPr lang="de-DE" sz="1200" b="1" dirty="0"/>
-              <a:t>TIMING  14:50–15:35  ·  ca. 45 Sek</a:t>
-            </a:r>
-          </a:p>
-          <a:p>
-            <a:pPr>
-              <a:spcBef>
-                <a:spcPts val="1200"/>
-              </a:spcBef>
-            </a:pPr>
-            <a:r>
-              <a:rPr lang="de-DE" sz="1200" b="1" dirty="0"/>
-              <a:t>SPRECHTEXT</a:t>
-            </a:r>
-          </a:p>
-          <a:p>
-            <a:pPr>
-              <a:spcBef>
-                <a:spcPts val="400"/>
-              </a:spcBef>
-            </a:pPr>
-            <a:r>
-              <a:rPr lang="de-DE" sz="1200" dirty="0"/>
+            <a:r>
               <a:t>Accuracy, also die reine Trefferquote: Baseline 59,1 Prozent, Random Forest 51,9 Prozent. Das Modell ist damit schlechter als stumpfes Raten.</a:t>
             </a:r>
           </a:p>
-          <a:p>
-            <a:pPr>
-              <a:spcBef>
-                <a:spcPts val="400"/>
-              </a:spcBef>
-            </a:pPr>
-            <a:r>
-              <a:rPr lang="de-DE" sz="1200" dirty="0"/>
+          <a:p/>
+          <a:p>
+            <a:r>
               <a:t>Balanced Accuracy: 51,3 Prozent. Das ist die Trefferquote gemittelt über beide Klassen, damit die häufigere Klasse das Bild nicht verfälscht. Ein Zufallsmodell liegt hier bei 50.</a:t>
             </a:r>
           </a:p>
-          <a:p>
-            <a:pPr>
-              <a:spcBef>
-                <a:spcPts val="400"/>
-              </a:spcBef>
-            </a:pPr>
-            <a:r>
-              <a:rPr lang="de-DE" sz="1200" dirty="0"/>
+          <a:p/>
+          <a:p>
+            <a:r>
               <a:t>ROC-AUC: 0,519. Diese Kennzahl misst, wie gut das Modell steigende von fallenden Phasen trennt — unabhängig davon, wo man die Entscheidungsschwelle setzt. 0,5 ist Münzwurf, 1,0 wäre perfekt. Wir liegen bei 0,519.</a:t>
             </a:r>
           </a:p>
-          <a:p>
-            <a:pPr>
-              <a:spcBef>
-                <a:spcPts val="400"/>
-              </a:spcBef>
-            </a:pPr>
-            <a:r>
-              <a:rPr lang="de-DE" sz="1200" dirty="0"/>
+          <a:p/>
+          <a:p>
+            <a:r>
               <a:t>Im Klartext: H1 ist nicht bestätigt. Über vier Walk-forward-Folds liegt die AUC bei 0,514, also praktisch identisch. Das ist kein Ausrutscher, das ist stabil schwach.</a:t>
             </a:r>
           </a:p>
-          <a:p>
-            <a:pPr>
-              <a:spcBef>
-                <a:spcPts val="400"/>
-              </a:spcBef>
-            </a:pPr>
-            <a:r>
-              <a:rPr lang="de-DE" sz="1200" dirty="0"/>
+          <a:p/>
+          <a:p>
+            <a:r>
               <a:t>Komplexität ersetzt keine echte Information.</a:t>
             </a:r>
           </a:p>
-          <a:p>
-            <a:pPr>
-              <a:spcBef>
-                <a:spcPts val="1200"/>
-              </a:spcBef>
-            </a:pPr>
-            <a:r>
-              <a:rPr lang="de-DE" sz="1200" b="1" dirty="0"/>
-              <a:t>REGIE</a:t>
-            </a:r>
-          </a:p>
-          <a:p>
-            <a:pPr>
-              <a:spcBef>
-                <a:spcPts val="400"/>
-              </a:spcBef>
-            </a:pPr>
-            <a:r>
-              <a:rPr lang="de-DE" sz="1200" dirty="0"/>
-              <a:t>Nicht entschuldigend sprechen. Selbstbewusst: Das ist ein Befund, kein Scheitern. Die drei Zahlen ruhig nennen, dann Pause.</a:t>
-            </a:r>
-          </a:p>
-          <a:p>
-            <a:pPr>
-              <a:spcBef>
-                <a:spcPts val="1200"/>
-              </a:spcBef>
-            </a:pPr>
-            <a:r>
-              <a:rPr lang="de-DE" sz="1200" b="1" dirty="0"/>
-              <a:t>ÜBERLEITUNG</a:t>
-            </a:r>
-          </a:p>
-          <a:p>
-            <a:pPr>
-              <a:spcBef>
-                <a:spcPts val="400"/>
-              </a:spcBef>
-            </a:pPr>
-            <a:r>
-              <a:rPr lang="de-DE" sz="1200" dirty="0"/>
+          <a:p/>
+          <a:p>
+            <a:r>
               <a:t>„Jetzt könntet ihr denken: schwaches Projekt. Deshalb zeige ich euch, was ich stattdessen hätte zeigen können.“</a:t>
             </a:r>
           </a:p>
@@ -2208,145 +1376,37 @@
           <a:bodyPr/>
           <a:lstStyle/>
           <a:p>
-            <a:pPr>
-              <a:spcBef>
-                <a:spcPts val="1200"/>
-              </a:spcBef>
-            </a:pPr>
-            <a:r>
-              <a:rPr lang="de-DE" sz="1200" b="1" dirty="0"/>
-              <a:t>TIMING  15:35–16:20  ·  ca. 45 Sek</a:t>
-            </a:r>
-          </a:p>
-          <a:p>
-            <a:pPr>
-              <a:spcBef>
-                <a:spcPts val="1200"/>
-              </a:spcBef>
-            </a:pPr>
-            <a:r>
-              <a:rPr lang="de-DE" sz="1200" b="1" dirty="0"/>
-              <a:t>SPRECHTEXT</a:t>
-            </a:r>
-          </a:p>
-          <a:p>
-            <a:pPr>
-              <a:spcBef>
-                <a:spcPts val="400"/>
-              </a:spcBef>
-            </a:pPr>
-            <a:r>
-              <a:rPr lang="de-DE" sz="1200" dirty="0"/>
+            <a:r>
               <a:t>Ich habe dasselbe Modell auf denselben Daten noch zweimal trainiert und ausschließlich die Aufteilung geändert.</a:t>
             </a:r>
           </a:p>
-          <a:p>
-            <a:pPr>
-              <a:spcBef>
-                <a:spcPts val="400"/>
-              </a:spcBef>
-            </a:pPr>
-            <a:r>
-              <a:rPr lang="de-DE" sz="1200" dirty="0"/>
+          <a:p/>
+          <a:p>
+            <a:r>
               <a:t>Zeile eins ist meine Variante: zeitlich getrennt, mit zwanzig Handelstagen Sperrzone. AUC 0,519. Zeile zwei: Ich nehme nur die Sperrzone heraus, dann reichen die letzten Trainingslabels in den Testzeitraum hinein — AUC 0,524. Und Zeile drei ist, wie man es macht, wenn man über Zeit nicht nachdenkt: ein naiver Zufalls-Split, achtzig zu zwanzig, quer durch alle Jahre. AUC 0,581.</a:t>
             </a:r>
           </a:p>
-          <a:p>
-            <a:pPr>
-              <a:spcBef>
-                <a:spcPts val="400"/>
-              </a:spcBef>
-            </a:pPr>
-            <a:r>
-              <a:rPr lang="de-DE" sz="1200" dirty="0"/>
+          <a:p/>
+          <a:p>
+            <a:r>
               <a:t>Von 0,519 auf 0,581 klingt nach wenig. Aber gemessen am Zufallsniveau 0,5 ist das ein scheinbares Signal von 0,081 statt 0,019 — es sieht also 4,2-mal größer aus, als es ist. Und dafür braucht es keine bessere Idee, nur eine Zeile Code.</a:t>
             </a:r>
           </a:p>
-          <a:p>
-            <a:pPr>
-              <a:spcBef>
-                <a:spcPts val="400"/>
-              </a:spcBef>
-            </a:pPr>
-            <a:r>
-              <a:rPr lang="de-DE" sz="1200" dirty="0"/>
+          <a:p/>
+          <a:p>
+            <a:r>
               <a:t>Ich hätte euch heute also 0,581 zeigen können. Ich zeige euch 0,519, weil das die Zahl ist, die übrig bleibt, wenn man dem Modell die Zukunft wegnimmt.</a:t>
             </a:r>
           </a:p>
-          <a:p>
-            <a:pPr>
-              <a:spcBef>
-                <a:spcPts val="400"/>
-              </a:spcBef>
-            </a:pPr>
-            <a:r>
-              <a:rPr lang="de-DE" sz="1200" dirty="0"/>
+          <a:p/>
+          <a:p>
+            <a:r>
               <a:t>Und damit ist die niedrige Zahl nicht die Schwäche dieses Projekts. Sie ist der Beleg, dass der Fehler nicht gemacht wurde.</a:t>
             </a:r>
           </a:p>
-          <a:p>
-            <a:pPr>
-              <a:spcBef>
-                <a:spcPts val="1200"/>
-              </a:spcBef>
-            </a:pPr>
-            <a:r>
-              <a:rPr lang="de-DE" sz="1200" b="1" dirty="0"/>
-              <a:t>REGIE</a:t>
-            </a:r>
-          </a:p>
-          <a:p>
-            <a:pPr>
-              <a:spcBef>
-                <a:spcPts val="400"/>
-              </a:spcBef>
-            </a:pPr>
-            <a:r>
-              <a:rPr lang="de-DE" sz="1200" dirty="0"/>
-              <a:t>Die wichtigste Folie des Vortrags. Die drei Tabellenzeilen einzeln antippen. Der Satz „Ich hätte euch heute 0,581 zeigen können“ langsam und mit Blick ins Publikum — nicht auf die Folie. Danach zwei Sekunden Stille, bevor der Schlusssatz kommt.</a:t>
-            </a:r>
-          </a:p>
-          <a:p>
-            <a:pPr>
-              <a:spcBef>
-                <a:spcPts val="400"/>
-              </a:spcBef>
-            </a:pPr>
-            <a:r>
-              <a:rPr lang="de-DE" sz="1200" dirty="0"/>
-              <a:t>Falls jemand einwirft, 0,581 sei doch auch kaum besser als Zufall: zustimmen und nachlegen — „Richtig, und das ist der zweite Punkt: Selbst die geschönte Zahl trägt keine Strategie. Die Accuracy liegt auch dort mit 54,7 Prozent unter ihrer Baseline von 55,9 Prozent.“</a:t>
-            </a:r>
-          </a:p>
-          <a:p>
-            <a:pPr>
-              <a:spcBef>
-                <a:spcPts val="400"/>
-              </a:spcBef>
-            </a:pPr>
-            <a:r>
-              <a:rPr lang="de-DE" sz="1200" dirty="0"/>
-              <a:t>Falls nach der Reproduzierbarkeit gefragt wird: Die Tabelle stammt aus scripts/validation_experiments.py, die Zahlen liegen als models/validation_experiments.json im Repository.</a:t>
-            </a:r>
-          </a:p>
-          <a:p>
-            <a:pPr>
-              <a:spcBef>
-                <a:spcPts val="1200"/>
-              </a:spcBef>
-            </a:pPr>
-            <a:r>
-              <a:rPr lang="de-DE" sz="1200" b="1" dirty="0"/>
-              <a:t>ÜBERLEITUNG</a:t>
-            </a:r>
-          </a:p>
-          <a:p>
-            <a:pPr>
-              <a:spcBef>
-                <a:spcPts val="400"/>
-              </a:spcBef>
-            </a:pPr>
-            <a:r>
-              <a:rPr lang="de-DE" sz="1200" dirty="0"/>
+          <a:p/>
+          <a:p>
+            <a:r>
               <a:t>„Diese Zahlen zeige ich euch jetzt nicht auf Folien — sondern dort, wo sie herkommen. Ich wechsle in die App.“</a:t>
             </a:r>
           </a:p>
@@ -2423,101 +1483,25 @@
           <a:bodyPr/>
           <a:lstStyle/>
           <a:p>
-            <a:pPr>
-              <a:spcBef>
-                <a:spcPts val="1200"/>
-              </a:spcBef>
-            </a:pPr>
-            <a:r>
-              <a:rPr lang="de-DE" sz="1200" b="1" dirty="0"/>
-              <a:t>TIMING  0:25–0:55  ·  ca. 30 Sek</a:t>
-            </a:r>
-          </a:p>
-          <a:p>
-            <a:pPr>
-              <a:spcBef>
-                <a:spcPts val="1200"/>
-              </a:spcBef>
-            </a:pPr>
-            <a:r>
-              <a:rPr lang="de-DE" sz="1200" b="1" dirty="0"/>
-              <a:t>SPRECHTEXT</a:t>
-            </a:r>
-          </a:p>
-          <a:p>
-            <a:pPr>
-              <a:spcBef>
-                <a:spcPts val="400"/>
-              </a:spcBef>
-            </a:pPr>
-            <a:r>
-              <a:rPr lang="de-DE" sz="1200" dirty="0"/>
+            <a:r>
               <a:t>Kurz der Fahrplan. Zuerst das Problem und die Lösung — zusammen vier Minuten. Dann führe ich euch durch QUA³CK; das ist der wissenschaftliche Prozess, nach dem das ganze Projekt aufgebaut ist.</a:t>
             </a:r>
           </a:p>
-          <a:p>
-            <a:pPr>
-              <a:spcBef>
-                <a:spcPts val="400"/>
-              </a:spcBef>
-            </a:pPr>
-            <a:r>
-              <a:rPr lang="de-DE" sz="1200" dirty="0"/>
+          <a:p/>
+          <a:p>
+            <a:r>
               <a:t>In der Mitte, bei etwa sechzehn Minuten, klappe ich die Folien zu und wir gehen live in die App. Danach kommen Fazit und Grenzen.</a:t>
             </a:r>
           </a:p>
-          <a:p>
-            <a:pPr>
-              <a:spcBef>
-                <a:spcPts val="400"/>
-              </a:spcBef>
-            </a:pPr>
-            <a:r>
-              <a:rPr lang="de-DE" sz="1200" dirty="0"/>
+          <a:p/>
+          <a:p>
+            <a:r>
               <a:t>Und zu den Fragen: Verständnisfragen jederzeit dazwischen — ein Satz, eine Antwort. Alles Größere sammle ich in zwei kurzen Fragefenstern, die ihr hier im Zeitplan sehen könnt. Am Ende ist dann offene Runde.</a:t>
             </a:r>
           </a:p>
-          <a:p>
-            <a:pPr>
-              <a:spcBef>
-                <a:spcPts val="1200"/>
-              </a:spcBef>
-            </a:pPr>
-            <a:r>
-              <a:rPr lang="de-DE" sz="1200" b="1" dirty="0"/>
-              <a:t>REGIE</a:t>
-            </a:r>
-          </a:p>
-          <a:p>
-            <a:pPr>
-              <a:spcBef>
-                <a:spcPts val="400"/>
-              </a:spcBef>
-            </a:pPr>
-            <a:r>
-              <a:rPr lang="de-DE" sz="1200" dirty="0"/>
-              <a:t>Die Tabelle nicht vorlesen. Auf drei Punkte zeigen: den Demo-Block bei 16:20 und die zwei Fragefenster. Die Frageregel ausdrücklich ansagen — sie ist später deine Zeitversicherung.</a:t>
-            </a:r>
-          </a:p>
-          <a:p>
-            <a:pPr>
-              <a:spcBef>
-                <a:spcPts val="1200"/>
-              </a:spcBef>
-            </a:pPr>
-            <a:r>
-              <a:rPr lang="de-DE" sz="1200" b="1" dirty="0"/>
-              <a:t>ÜBERLEITUNG</a:t>
-            </a:r>
-          </a:p>
-          <a:p>
-            <a:pPr>
-              <a:spcBef>
-                <a:spcPts val="400"/>
-              </a:spcBef>
-            </a:pPr>
-            <a:r>
-              <a:rPr lang="de-DE" sz="1200" dirty="0"/>
+          <a:p/>
+          <a:p>
+            <a:r>
               <a:t>„Fangen wir mit dem Problem an — und zwar mit euren fünftausend Euro.“</a:t>
             </a:r>
           </a:p>
@@ -2594,365 +1578,145 @@
           <a:bodyPr/>
           <a:lstStyle/>
           <a:p>
-            <a:pPr>
-              <a:spcBef>
-                <a:spcPts val="1200"/>
-              </a:spcBef>
-            </a:pPr>
-            <a:r>
-              <a:rPr lang="de-DE" sz="1200" b="1" dirty="0"/>
-              <a:t>TIMING  16:20–20:50  ·  ca. 270 Sek</a:t>
-            </a:r>
-          </a:p>
-          <a:p>
-            <a:pPr>
-              <a:spcBef>
-                <a:spcPts val="1200"/>
-              </a:spcBef>
-            </a:pPr>
-            <a:r>
-              <a:rPr lang="de-DE" sz="1200" b="1" dirty="0"/>
-              <a:t>EINSTIEG  (ca. 10 Sek)</a:t>
-            </a:r>
-          </a:p>
-          <a:p>
-            <a:pPr>
-              <a:spcBef>
-                <a:spcPts val="400"/>
-              </a:spcBef>
-            </a:pPr>
-            <a:r>
-              <a:rPr lang="de-DE" sz="1200" dirty="0"/>
+            <a:r>
               <a:t>Phase sieben: Knowledge Transfer. Sechs Stationen, viereinhalb Minuten. Fragt hier gern direkt dazwischen — dafür ist Zeit eingeplant.</a:t>
             </a:r>
           </a:p>
-          <a:p>
-            <a:pPr>
-              <a:spcBef>
-                <a:spcPts val="1200"/>
-              </a:spcBef>
-            </a:pPr>
-            <a:r>
-              <a:rPr lang="de-DE" sz="1200" b="1" dirty="0"/>
-              <a:t>STATION 1 · START  (ca. 25 Sek)</a:t>
-            </a:r>
-          </a:p>
-          <a:p>
-            <a:pPr>
-              <a:spcBef>
-                <a:spcPts val="400"/>
-              </a:spcBef>
-            </a:pPr>
-            <a:r>
-              <a:rPr lang="de-DE" sz="1200" dirty="0"/>
+          <a:p/>
+          <a:p>
+            <a:r>
+              <a:t>STATION 1 · START</a:t>
+            </a:r>
+          </a:p>
+          <a:p/>
+          <a:p>
+            <a:r>
               <a:t>„Das ist die Startseite. Oben das aktuelle Signal, darunter die Kennzahlen und der Kursverlauf. Wichtig: Das Signal ist eine Einordnung, keine Kaufempfehlung — der Hinweis steht bewusst direkt daneben.“</a:t>
             </a:r>
           </a:p>
-          <a:p>
-            <a:pPr>
-              <a:spcBef>
-                <a:spcPts val="1200"/>
-              </a:spcBef>
-            </a:pPr>
-            <a:r>
-              <a:rPr lang="de-DE" sz="1200" b="1" dirty="0"/>
-              <a:t>STATION 2 · MARKTANALYSE  (ca. 30 Sek)</a:t>
-            </a:r>
-          </a:p>
-          <a:p>
-            <a:pPr>
-              <a:spcBef>
-                <a:spcPts val="400"/>
-              </a:spcBef>
-            </a:pPr>
-            <a:r>
-              <a:rPr lang="de-DE" sz="1200" dirty="0"/>
+          <a:p/>
+          <a:p>
+            <a:r>
+              <a:t>STATION 2 · MARKTANALYSE</a:t>
+            </a:r>
+          </a:p>
+          <a:p/>
+          <a:p>
+            <a:r>
               <a:t>„Der Candlestick-Chart: Jede Kerze ist ein Handelstag, der Körper zeigt Eröffnung und Schluss, die Dochte Hoch und Tief. Dazu die drei gleitenden Durchschnitte über 20, 50 und 200 Tage. Und darunter der Drawdown — der Abstand zum letzten Allzeithoch. Das sind zwei der acht Features, live berechnet.“</a:t>
             </a:r>
           </a:p>
-          <a:p>
-            <a:pPr>
-              <a:spcBef>
-                <a:spcPts val="1200"/>
-              </a:spcBef>
-            </a:pPr>
-            <a:r>
-              <a:rPr lang="de-DE" sz="1200" b="1" dirty="0"/>
-              <a:t>STATION 3 · ML-INSIGHTS: KORRELATION  (ca. 15 Sek)</a:t>
-            </a:r>
-          </a:p>
-          <a:p>
-            <a:pPr>
-              <a:spcBef>
-                <a:spcPts val="400"/>
-              </a:spcBef>
-            </a:pPr>
-            <a:r>
-              <a:rPr lang="de-DE" sz="1200" dirty="0"/>
+          <a:p/>
+          <a:p>
+            <a:r>
+              <a:t>STATION 3 · ML-INSIGHTS: KORRELATION</a:t>
+            </a:r>
+          </a:p>
+          <a:p/>
+          <a:p>
+            <a:r>
               <a:t>„Hier die Korrelationsmatrix. Je dunkler ein Feld, desto stärker hängen zwei Merkmale zusammen. Wichtig ist, was man hier NICHT sieht: keine tiefdunklen Blöcke abseits der Diagonale. Also kein Multikollinearitätsproblem.“</a:t>
             </a:r>
           </a:p>
-          <a:p>
-            <a:pPr>
-              <a:spcBef>
-                <a:spcPts val="1200"/>
-              </a:spcBef>
-            </a:pPr>
-            <a:r>
-              <a:rPr lang="de-DE" sz="1200" b="1" dirty="0"/>
-              <a:t>STATION 4 · KONFUSIONSMATRIX &amp; ROC  (ca. 40 Sek)  ← ersetzt die alte Folie</a:t>
-            </a:r>
-          </a:p>
-          <a:p>
-            <a:pPr>
-              <a:spcBef>
-                <a:spcPts val="400"/>
-              </a:spcBef>
-            </a:pPr>
-            <a:r>
-              <a:rPr lang="de-DE" sz="1200" dirty="0"/>
+          <a:p/>
+          <a:p>
+            <a:r>
+              <a:t>STATION 4 · KONFUSIONSMATRIX &amp; ROC</a:t>
+            </a:r>
+          </a:p>
+          <a:p/>
+          <a:p>
+            <a:r>
               <a:t>„Und hier sind die Zahlen von eben, interaktiv. Die Konfusionsmatrix zeigt, welche Art von Fehlern das Modell macht: Es tippt fast immer auf ‚steigend‘, weil 59 Prozent des Testzeitraums steigend waren. Genau deshalb ist Accuracy irreführend — sie belohnt das Nachplappern der Mehrheit.“</a:t>
             </a:r>
           </a:p>
-          <a:p>
-            <a:pPr>
-              <a:spcBef>
-                <a:spcPts val="400"/>
-              </a:spcBef>
-            </a:pPr>
-            <a:r>
-              <a:rPr lang="de-DE" sz="1200" dirty="0"/>
+          <a:p/>
+          <a:p>
+            <a:r>
               <a:t>„Daneben die ROC-Kurve. Die Diagonale hier ist der reine Zufall. Und unsere Kurve liegt fast darauf. Nicht dramatisch, aber eindeutig: ein sehr schwaches Trennsignal.“</a:t>
             </a:r>
           </a:p>
-          <a:p>
-            <a:pPr>
-              <a:spcBef>
-                <a:spcPts val="1200"/>
-              </a:spcBef>
-            </a:pPr>
-            <a:r>
-              <a:rPr lang="de-DE" sz="1200" b="1" dirty="0"/>
-              <a:t>STATION 5 · LERNKURVE  (ca. 40 Sek)  ← ersetzt die alte Folie</a:t>
-            </a:r>
-          </a:p>
-          <a:p>
-            <a:pPr>
-              <a:spcBef>
-                <a:spcPts val="400"/>
-              </a:spcBef>
-            </a:pPr>
-            <a:r>
-              <a:rPr lang="de-DE" sz="1200" dirty="0"/>
+          <a:p/>
+          <a:p>
+            <a:r>
+              <a:t>STATION 5 · LERNKURVE</a:t>
+            </a:r>
+          </a:p>
+          <a:p/>
+          <a:p>
+            <a:r>
               <a:t>„Die Lernkurve beantwortet die Frage: Liegt es am Modell oder an den Daten? Und hier sagt die App es selbst, lest die Diagnose mit: hohe Varianz, Overfitting-Tendenz. Trainings-AUC 0,637 gegen Validierung 0,525 — eine Lücke von 0,11. Das Modell lernt also Muster, die es nicht generalisieren kann.“</a:t>
             </a:r>
           </a:p>
-          <a:p>
-            <a:pPr>
-              <a:spcBef>
-                <a:spcPts val="400"/>
-              </a:spcBef>
-            </a:pPr>
-            <a:r>
-              <a:rPr lang="de-DE" sz="1200" dirty="0"/>
+          <a:p/>
+          <a:p>
+            <a:r>
               <a:t>„Jetzt kommt der interessante Teil. Normalerweise heißt Varianz: mehr Daten helfen. Hier nicht. Schaut auf die Validierungskurve — 0,530, dann 0,504, dann 0,498, dann 0,525. Über die 2,3-fache Datenmenge bewegt sie sich nicht. Die Lücke schließt sich von oben, weil der Trainings-Score fällt. Nicht von unten, weil das Modell besser wird.“</a:t>
             </a:r>
           </a:p>
-          <a:p>
-            <a:pPr>
-              <a:spcBef>
-                <a:spcPts val="400"/>
-              </a:spcBef>
-            </a:pPr>
-            <a:r>
-              <a:rPr lang="de-DE" sz="1200" dirty="0"/>
+          <a:p/>
+          <a:p>
+            <a:r>
               <a:t>„Was hier overfittet wird, ist also Rauschen — kein untersampeltes Signal. Genau das sagt die Effizienzmarkthypothese von Fama voraus.“</a:t>
             </a:r>
           </a:p>
-          <a:p>
-            <a:pPr>
-              <a:spcBef>
-                <a:spcPts val="1200"/>
-              </a:spcBef>
-            </a:pPr>
-            <a:r>
-              <a:rPr lang="de-DE" sz="1200" b="1" dirty="0"/>
-              <a:t>WICHTIG BEI DIESER STATION</a:t>
-            </a:r>
-          </a:p>
-          <a:p>
-            <a:pPr>
-              <a:spcBef>
-                <a:spcPts val="400"/>
-              </a:spcBef>
-            </a:pPr>
-            <a:r>
-              <a:rPr lang="de-DE" sz="1200" dirty="0"/>
-              <a:t>Die App zeigt hier sichtbar „Hohe Varianz (Overfitting-Tendenz)“. Benenne das selbst und zuerst — wer die Lücke im Chart sieht und dich sie zugeben hört, wertet es als Souveränität. Wer sie sieht, während du sie verschweigst, wertet es als Lücke im Verständnis.</a:t>
-            </a:r>
-          </a:p>
-          <a:p>
-            <a:pPr>
-              <a:spcBef>
-                <a:spcPts val="1200"/>
-              </a:spcBef>
-            </a:pPr>
-            <a:r>
-              <a:rPr lang="de-DE" sz="1200" b="1" dirty="0"/>
-              <a:t>STATION 6 · ERKLÄRBARKEIT / SHAP  (ca. 30 Sek)  ← ersetzt die alte Folie</a:t>
-            </a:r>
-          </a:p>
-          <a:p>
-            <a:pPr>
-              <a:spcBef>
-                <a:spcPts val="400"/>
-              </a:spcBef>
-            </a:pPr>
-            <a:r>
-              <a:rPr lang="de-DE" sz="1200" dirty="0"/>
+          <a:p/>
+          <a:p>
+            <a:r>
+              <a:t>STATION 6 · ERKLÄRBARKEIT / SHAP</a:t>
+            </a:r>
+          </a:p>
+          <a:p/>
+          <a:p>
+            <a:r>
               <a:t>„Zwei Sichten auf dieselbe Frage: Worauf schaut das Modell? Links die Feature Importance — vereinfacht, wie oft ein Merkmal für eine Trennung benutzt wurde. Rechts SHAP, ein Verfahren aus der Spieltheorie, das für jede einzelne Vorhersage ausrechnet, wie viel jedes Merkmal beigetragen hat.“</a:t>
             </a:r>
           </a:p>
-          <a:p>
-            <a:pPr>
-              <a:spcBef>
-                <a:spcPts val="400"/>
-              </a:spcBef>
-            </a:pPr>
-            <a:r>
-              <a:rPr lang="de-DE" sz="1200" dirty="0"/>
+          <a:p/>
+          <a:p>
+            <a:r>
               <a:t>„Beide sagen dasselbe: Drawdown und Volatilität prägen das Modell stärker als reine Renditen. Risiko schlägt Rendite. Aber Vorsicht — das erklärt, wie das Modell entscheidet. Es beweist keine Ursache und keinen wirtschaftlichen Nutzen.“</a:t>
             </a:r>
           </a:p>
-          <a:p>
-            <a:pPr>
-              <a:spcBef>
-                <a:spcPts val="1200"/>
-              </a:spcBef>
-            </a:pPr>
-            <a:r>
-              <a:rPr lang="de-DE" sz="1200" b="1" dirty="0"/>
-              <a:t>STATION 7 · KAPITAL-KOMPASS  (ca. 30 Sek)</a:t>
-            </a:r>
-          </a:p>
-          <a:p>
-            <a:pPr>
-              <a:spcBef>
-                <a:spcPts val="400"/>
-              </a:spcBef>
-            </a:pPr>
-            <a:r>
-              <a:rPr lang="de-DE" sz="1200" dirty="0"/>
+          <a:p/>
+          <a:p>
+            <a:r>
+              <a:t>STATION 7 · KAPITAL-KOMPASS</a:t>
+            </a:r>
+          </a:p>
+          <a:p/>
+          <a:p>
+            <a:r>
               <a:t>„Jetzt wird es praktisch. Ich gebe Kapital, Risikotoleranz und Stop-Loss-Distanz ein — ein Stop-Loss ist die Verlustgrenze, bei der automatisch verkauft wird. Die App rechnet live den maximalen Risikobetrag und die passende Positionsgröße aus. Das ist keine Prognose, das ist Risikomathematik — und die funktioniert unabhängig davon, wie schwach das Modell ist.“</a:t>
             </a:r>
           </a:p>
-          <a:p>
-            <a:pPr>
-              <a:spcBef>
-                <a:spcPts val="1200"/>
-              </a:spcBef>
-            </a:pPr>
-            <a:r>
-              <a:rPr lang="de-DE" sz="1200" b="1" dirty="0"/>
-              <a:t>STATION 8 · PORTFOLIO-SIMULATOR  (ca. 25 Sek)</a:t>
-            </a:r>
-          </a:p>
-          <a:p>
-            <a:pPr>
-              <a:spcBef>
-                <a:spcPts val="400"/>
-              </a:spcBef>
-            </a:pPr>
-            <a:r>
-              <a:rPr lang="de-DE" sz="1200" dirty="0"/>
+          <a:p/>
+          <a:p>
+            <a:r>
+              <a:t>STATION 8 · PORTFOLIO-SIMULATOR</a:t>
+            </a:r>
+          </a:p>
+          <a:p/>
+          <a:p>
+            <a:r>
               <a:t>„Kapital auf mehrere Titel verteilen, Gewichte live verändern. Der Herfindahl-Index unten misst die Konzentration: je höher, desto mehr hängt alles an einem einzigen Titel.“</a:t>
             </a:r>
           </a:p>
-          <a:p>
-            <a:pPr>
-              <a:spcBef>
-                <a:spcPts val="1200"/>
-              </a:spcBef>
-            </a:pPr>
-            <a:r>
-              <a:rPr lang="de-DE" sz="1200" b="1" dirty="0"/>
-              <a:t>STATION 9 · METHODIK &amp; EXPORT  (ca. 15 Sek)</a:t>
-            </a:r>
-          </a:p>
-          <a:p>
-            <a:pPr>
-              <a:spcBef>
-                <a:spcPts val="400"/>
-              </a:spcBef>
-            </a:pPr>
-            <a:r>
-              <a:rPr lang="de-DE" sz="1200" dirty="0"/>
+          <a:p/>
+          <a:p>
+            <a:r>
+              <a:t>STATION 9 · METHODIK &amp; EXPORT</a:t>
+            </a:r>
+          </a:p>
+          <a:p/>
+          <a:p>
+            <a:r>
               <a:t>„Und hier ist der QUA³CK-Prozess selbst interaktiv erklärt, plus Export des kompletten Berichts als PDF, CSV oder ZIP.“</a:t>
             </a:r>
           </a:p>
-          <a:p>
-            <a:pPr>
-              <a:spcBef>
-                <a:spcPts val="1200"/>
-              </a:spcBef>
-            </a:pPr>
-            <a:r>
-              <a:rPr lang="de-DE" sz="1200" b="1" dirty="0"/>
-              <a:t>REGIE / TECHNIK</a:t>
-            </a:r>
-          </a:p>
-          <a:p>
-            <a:pPr>
-              <a:spcBef>
-                <a:spcPts val="400"/>
-              </a:spcBef>
-            </a:pPr>
-            <a:r>
-              <a:rPr lang="de-DE" sz="1200" dirty="0"/>
-              <a:t>Vorher: App starten, Ticker SPY vorladen, Browser-Zoom 110 Prozent, Zeitraum 1 Jahr, ML-Insights-Seite einmal aufrufen, damit sie im Cache ist. Nicht scrollen, während gesprochen wird.</a:t>
-            </a:r>
-          </a:p>
-          <a:p>
-            <a:pPr>
-              <a:spcBef>
-                <a:spcPts val="400"/>
-              </a:spcBef>
-            </a:pPr>
-            <a:r>
-              <a:rPr lang="de-DE" sz="1200" dirty="0"/>
-              <a:t>Etwa 10 Sekunden Puffer für Zwischenfragen sind eingerechnet. Station 5 ist die längste — wenn du bei Station 6 über 21:40 liegst, Stationen 8 und 9 in je einem Satz abhandeln.</a:t>
-            </a:r>
-          </a:p>
-          <a:p>
-            <a:pPr>
-              <a:spcBef>
-                <a:spcPts val="400"/>
-              </a:spcBef>
-            </a:pPr>
-            <a:r>
-              <a:rPr lang="de-DE" sz="1200" dirty="0"/>
-              <a:t>AUSFALLPLAN: Bei Ladezeit über 3 Sekunden oder Fehlermeldung sofort auf die Backup-Folien im Anhang wechseln — Stationen 4 bis 6 liegen als Folien 29, 30 und 31, die App-Screenshots als Folien 32 bis 37. Nicht kommentieren, dass etwas ausgefallen ist. Einfach weitersprechen.</a:t>
-            </a:r>
-          </a:p>
-          <a:p>
-            <a:pPr>
-              <a:spcBef>
-                <a:spcPts val="1200"/>
-              </a:spcBef>
-            </a:pPr>
-            <a:r>
-              <a:rPr lang="de-DE" sz="1200" b="1" dirty="0"/>
-              <a:t>ÜBERLEITUNG</a:t>
-            </a:r>
-          </a:p>
-          <a:p>
-            <a:pPr>
-              <a:spcBef>
-                <a:spcPts val="400"/>
-              </a:spcBef>
-            </a:pPr>
-            <a:r>
-              <a:rPr lang="de-DE" sz="1200" dirty="0"/>
+          <a:p/>
+          <a:p>
+            <a:r>
               <a:t>„Zurück zu den Folien. Bevor ich das Fazit ziehe: Fragen zum Modell oder zur App?“</a:t>
             </a:r>
           </a:p>
@@ -3029,112 +1793,13 @@
           <a:bodyPr/>
           <a:lstStyle/>
           <a:p>
-            <a:pPr>
-              <a:spcBef>
-                <a:spcPts val="1200"/>
-              </a:spcBef>
-            </a:pPr>
-            <a:r>
-              <a:rPr lang="de-DE" sz="1200" b="1" dirty="0"/>
-              <a:t>TIMING  20:50–21:35  ·  ca. 45 Sek  ·  FRAGEFENSTER II</a:t>
-            </a:r>
-          </a:p>
-          <a:p>
-            <a:pPr>
-              <a:spcBef>
-                <a:spcPts val="1200"/>
-              </a:spcBef>
-            </a:pPr>
-            <a:r>
-              <a:rPr lang="de-DE" sz="1200" b="1" dirty="0"/>
-              <a:t>SPRECHTEXT</a:t>
-            </a:r>
-          </a:p>
-          <a:p>
-            <a:pPr>
-              <a:spcBef>
-                <a:spcPts val="400"/>
-              </a:spcBef>
-            </a:pPr>
-            <a:r>
-              <a:rPr lang="de-DE" sz="1200" dirty="0"/>
+            <a:r>
               <a:t>Ihr habt jetzt die Zahlen gesehen und die App bedient. Bevor ich das Fazit ziehe: Was möchtet ihr zum Modell oder zur Anwendung wissen?</a:t>
             </a:r>
           </a:p>
-          <a:p>
-            <a:pPr>
-              <a:spcBef>
-                <a:spcPts val="1200"/>
-              </a:spcBef>
-            </a:pPr>
-            <a:r>
-              <a:rPr lang="de-DE" sz="1200" b="1" dirty="0"/>
-              <a:t>MODERATION</a:t>
-            </a:r>
-          </a:p>
-          <a:p>
-            <a:pPr>
-              <a:spcBef>
-                <a:spcPts val="400"/>
-              </a:spcBef>
-            </a:pPr>
-            <a:r>
-              <a:rPr lang="de-DE" sz="1200" dirty="0"/>
-              <a:t>Das ist das wahrscheinlichste Fragefenster des Vortrags — hier kommt fast sicher „Warum nur 0,519?“. Die ausformulierte Antwort steht in den Notizen zu Folie 28. Belegfolien 29 bis 31 sind bereit.</a:t>
-            </a:r>
-          </a:p>
-          <a:p>
-            <a:pPr>
-              <a:spcBef>
-                <a:spcPts val="400"/>
-              </a:spcBef>
-            </a:pPr>
-            <a:r>
-              <a:rPr lang="de-DE" sz="1200" dirty="0"/>
-              <a:t>Wenn niemand fragt: „Was mich selbst am meisten überrascht hat, war, dass Drawdown und Volatilität wichtiger sind als die Renditen — Risiko trägt mehr Information als Ertrag.“ Das lädt zur Diskussion ein und leitet gleichzeitig weiter.</a:t>
-            </a:r>
-          </a:p>
-          <a:p>
-            <a:pPr>
-              <a:spcBef>
-                <a:spcPts val="1200"/>
-              </a:spcBef>
-            </a:pPr>
-            <a:r>
-              <a:rPr lang="de-DE" sz="1200" b="1" dirty="0"/>
-              <a:t>ZEITDISZIPLIN</a:t>
-            </a:r>
-          </a:p>
-          <a:p>
-            <a:pPr>
-              <a:spcBef>
-                <a:spcPts val="400"/>
-              </a:spcBef>
-            </a:pPr>
-            <a:r>
-              <a:rPr lang="de-DE" sz="1200" dirty="0"/>
-              <a:t>Harte Grenze 45 Sekunden. Alles Weitere in die offene Runde nach Folie 27 verschieben — die kommt in dreieinhalb Minuten.</a:t>
-            </a:r>
-          </a:p>
-          <a:p>
-            <a:pPr>
-              <a:spcBef>
-                <a:spcPts val="1200"/>
-              </a:spcBef>
-            </a:pPr>
-            <a:r>
-              <a:rPr lang="de-DE" sz="1200" b="1" dirty="0"/>
-              <a:t>ÜBERLEITUNG</a:t>
-            </a:r>
-          </a:p>
-          <a:p>
-            <a:pPr>
-              <a:spcBef>
-                <a:spcPts val="400"/>
-              </a:spcBef>
-            </a:pPr>
-            <a:r>
-              <a:rPr lang="de-DE" sz="1200" dirty="0"/>
+          <a:p/>
+          <a:p>
+            <a:r>
               <a:t>„Dann rechnen wir ab: Was ist aus meinen drei Hypothesen geworden?“</a:t>
             </a:r>
           </a:p>
@@ -3211,101 +1876,25 @@
           <a:bodyPr/>
           <a:lstStyle/>
           <a:p>
-            <a:pPr>
-              <a:spcBef>
-                <a:spcPts val="1200"/>
-              </a:spcBef>
-            </a:pPr>
-            <a:r>
-              <a:rPr lang="de-DE" sz="1200" b="1" dirty="0"/>
-              <a:t>TIMING  21:35–22:00  ·  ca. 25 Sek</a:t>
-            </a:r>
-          </a:p>
-          <a:p>
-            <a:pPr>
-              <a:spcBef>
-                <a:spcPts val="1200"/>
-              </a:spcBef>
-            </a:pPr>
-            <a:r>
-              <a:rPr lang="de-DE" sz="1200" b="1" dirty="0"/>
-              <a:t>SPRECHTEXT</a:t>
-            </a:r>
-          </a:p>
-          <a:p>
-            <a:pPr>
-              <a:spcBef>
-                <a:spcPts val="400"/>
-              </a:spcBef>
-            </a:pPr>
-            <a:r>
-              <a:rPr lang="de-DE" sz="1200" dirty="0"/>
+            <a:r>
               <a:t>Die drei Hypothesen im Urteil. H1 habt ihr eben auf der Ergebnisfolie gesehen — nicht bestätigt; ich wiederhole die Zahlen nicht.</a:t>
             </a:r>
           </a:p>
-          <a:p>
-            <a:pPr>
-              <a:spcBef>
-                <a:spcPts val="400"/>
-              </a:spcBef>
-            </a:pPr>
-            <a:r>
-              <a:rPr lang="de-DE" sz="1200" dirty="0"/>
+          <a:p/>
+          <a:p>
+            <a:r>
               <a:t>H2, der Wissenstransfer: bestätigt — ihr habt die App gerade bedient.</a:t>
             </a:r>
           </a:p>
-          <a:p>
-            <a:pPr>
-              <a:spcBef>
-                <a:spcPts val="400"/>
-              </a:spcBef>
-            </a:pPr>
-            <a:r>
-              <a:rPr lang="de-DE" sz="1200" dirty="0"/>
+          <a:p/>
+          <a:p>
+            <a:r>
               <a:t>H3, der Mehrwert der Kombination: nur teilweise. Die Orientierung wird besser, aber eine formale Nutzerstudie fehlt. Das wäre eigene Arbeit.</a:t>
             </a:r>
           </a:p>
-          <a:p>
-            <a:pPr>
-              <a:spcBef>
-                <a:spcPts val="1200"/>
-              </a:spcBef>
-            </a:pPr>
-            <a:r>
-              <a:rPr lang="de-DE" sz="1200" b="1" dirty="0"/>
-              <a:t>REGIE</a:t>
-            </a:r>
-          </a:p>
-          <a:p>
-            <a:pPr>
-              <a:spcBef>
-                <a:spcPts val="400"/>
-              </a:spcBef>
-            </a:pPr>
-            <a:r>
-              <a:rPr lang="de-DE" sz="1200" dirty="0"/>
-              <a:t>Genau in dieser Reihenfolge: erst die Absage, dann die beiden Erfolge. Bei H2 ans Publikum verweisen — die Demo ist gerade zwei Minuten her, das ist dein stärkster Beleg.</a:t>
-            </a:r>
-          </a:p>
-          <a:p>
-            <a:pPr>
-              <a:spcBef>
-                <a:spcPts val="1200"/>
-              </a:spcBef>
-            </a:pPr>
-            <a:r>
-              <a:rPr lang="de-DE" sz="1200" b="1" dirty="0"/>
-              <a:t>ÜBERLEITUNG</a:t>
-            </a:r>
-          </a:p>
-          <a:p>
-            <a:pPr>
-              <a:spcBef>
-                <a:spcPts val="400"/>
-              </a:spcBef>
-            </a:pPr>
-            <a:r>
-              <a:rPr lang="de-DE" sz="1200" dirty="0"/>
+          <a:p/>
+          <a:p>
+            <a:r>
               <a:t>„Dazu gehören vier Grenzen, die ich offen benenne.“</a:t>
             </a:r>
           </a:p>
@@ -3382,101 +1971,25 @@
           <a:bodyPr/>
           <a:lstStyle/>
           <a:p>
-            <a:pPr>
-              <a:spcBef>
-                <a:spcPts val="1200"/>
-              </a:spcBef>
-            </a:pPr>
-            <a:r>
-              <a:rPr lang="de-DE" sz="1200" b="1" dirty="0"/>
-              <a:t>TIMING  22:00–22:50  ·  ca. 50 Sek</a:t>
-            </a:r>
-          </a:p>
-          <a:p>
-            <a:pPr>
-              <a:spcBef>
-                <a:spcPts val="1200"/>
-              </a:spcBef>
-            </a:pPr>
-            <a:r>
-              <a:rPr lang="de-DE" sz="1200" b="1" dirty="0"/>
-              <a:t>SPRECHTEXT</a:t>
-            </a:r>
-          </a:p>
-          <a:p>
-            <a:pPr>
-              <a:spcBef>
-                <a:spcPts val="400"/>
-              </a:spcBef>
-            </a:pPr>
-            <a:r>
-              <a:rPr lang="de-DE" sz="1200" dirty="0"/>
+            <a:r>
               <a:t>Vier Grenzen — und jede zeigt direkt auf den nächsten Schritt. Makro und Geopolitik fehlen, das wären exogene Variablen. Nachrichten zeige ich an, modelliere sie aber nicht — das wäre Sentiment als Feature. Das Modell trainiert nicht nach — das wäre Online Learning.</a:t>
             </a:r>
           </a:p>
-          <a:p>
-            <a:pPr>
-              <a:spcBef>
-                <a:spcPts val="400"/>
-              </a:spcBef>
-            </a:pPr>
-            <a:r>
-              <a:rPr lang="de-DE" sz="1200" dirty="0"/>
+          <a:p/>
+          <a:p>
+            <a:r>
               <a:t>Die vierte Grenze bleibt bestehen: Historie ist keine Zukunft. Daran ändern auch bessere Daten nichts.</a:t>
             </a:r>
           </a:p>
-          <a:p>
-            <a:pPr>
-              <a:spcBef>
-                <a:spcPts val="400"/>
-              </a:spcBef>
-            </a:pPr>
-            <a:r>
-              <a:rPr lang="de-DE" sz="1200" dirty="0"/>
+          <a:p/>
+          <a:p>
+            <a:r>
               <a:t>Diese Grenzen sind kein Versagen. Sie sind der ehrliche Abschluss eines Projekts, das weiß, was es kann — und was nicht.</a:t>
             </a:r>
           </a:p>
-          <a:p>
-            <a:pPr>
-              <a:spcBef>
-                <a:spcPts val="1200"/>
-              </a:spcBef>
-            </a:pPr>
-            <a:r>
-              <a:rPr lang="de-DE" sz="1200" b="1" dirty="0"/>
-              <a:t>REGIE</a:t>
-            </a:r>
-          </a:p>
-          <a:p>
-            <a:pPr>
-              <a:spcBef>
-                <a:spcPts val="400"/>
-              </a:spcBef>
-            </a:pPr>
-            <a:r>
-              <a:rPr lang="de-DE" sz="1200" dirty="0"/>
-              <a:t>Kurze Pause vor dem Schlusssatz.</a:t>
-            </a:r>
-          </a:p>
-          <a:p>
-            <a:pPr>
-              <a:spcBef>
-                <a:spcPts val="1200"/>
-              </a:spcBef>
-            </a:pPr>
-            <a:r>
-              <a:rPr lang="de-DE" sz="1200" b="1" dirty="0"/>
-              <a:t>ÜBERLEITUNG</a:t>
-            </a:r>
-          </a:p>
-          <a:p>
-            <a:pPr>
-              <a:spcBef>
-                <a:spcPts val="400"/>
-              </a:spcBef>
-            </a:pPr>
-            <a:r>
-              <a:rPr lang="de-DE" sz="1200" dirty="0"/>
+          <a:p/>
+          <a:p>
+            <a:r>
               <a:t>„Was bleibt also?“</a:t>
             </a:r>
           </a:p>
@@ -3553,123 +2066,37 @@
           <a:bodyPr/>
           <a:lstStyle/>
           <a:p>
-            <a:pPr>
-              <a:spcBef>
-                <a:spcPts val="1200"/>
-              </a:spcBef>
-            </a:pPr>
-            <a:r>
-              <a:rPr lang="de-DE" sz="1200" b="1" dirty="0"/>
-              <a:t>TIMING  22:50–23:45  ·  ca. 55 Sek</a:t>
-            </a:r>
-          </a:p>
-          <a:p>
-            <a:pPr>
-              <a:spcBef>
-                <a:spcPts val="1200"/>
-              </a:spcBef>
-            </a:pPr>
-            <a:r>
-              <a:rPr lang="de-DE" sz="1200" b="1" dirty="0"/>
-              <a:t>SPRECHTEXT</a:t>
-            </a:r>
-          </a:p>
-          <a:p>
-            <a:pPr>
-              <a:spcBef>
-                <a:spcPts val="400"/>
-              </a:spcBef>
-            </a:pPr>
-            <a:r>
-              <a:rPr lang="de-DE" sz="1200" dirty="0"/>
+            <a:r>
               <a:t>Was bleibt?</a:t>
             </a:r>
           </a:p>
-          <a:p>
-            <a:pPr>
-              <a:spcBef>
-                <a:spcPts val="400"/>
-              </a:spcBef>
-            </a:pPr>
-            <a:r>
-              <a:rPr lang="de-DE" sz="1200" dirty="0"/>
+          <a:p/>
+          <a:p>
+            <a:r>
               <a:t>Der Satz oben ist mein Kernsatz: Ein ehrliches Modell, das im Out-of-Time-Test kaum besser als Zufall ist, ist wissenschaftlich wertvoller als ein beeindruckender Wert, der nur durch Zukunftswissen zustande kam. Und heute habe ich euch beide Zahlen gezeigt — 0,519 und 0,581. Der Unterschied war kein Modell, sondern Methodik.</a:t>
             </a:r>
           </a:p>
-          <a:p>
-            <a:pPr>
-              <a:spcBef>
-                <a:spcPts val="400"/>
-              </a:spcBef>
-            </a:pPr>
-            <a:r>
-              <a:rPr lang="de-DE" sz="1200" dirty="0"/>
+          <a:p/>
+          <a:p>
+            <a:r>
               <a:t>Damit ist das Ergebnis dieses Projekts nicht das Modell. Es ist eine Messung: Wie viel verwertbare Information steckt in rein kursbasierten technischen Indikatoren? Antwort: fast keine — und das gemessen an 190.527 Beobachtungen mit elf Jahren unangetasteter Zukunft. Das ist eine Replikation der Effizienzmarkthypothese von Fama, nicht zitiert, sondern nachgerechnet.</a:t>
             </a:r>
           </a:p>
-          <a:p>
-            <a:pPr>
-              <a:spcBef>
-                <a:spcPts val="400"/>
-              </a:spcBef>
-            </a:pPr>
-            <a:r>
-              <a:rPr lang="de-DE" sz="1200" dirty="0"/>
+          <a:p/>
+          <a:p>
+            <a:r>
               <a:t>Technisch bleibt eine modulare Architektur mit über zwanzig fachlich getrennten Modulen statt einem Monolithen, acht vollständig kommentierte Jupyter-Notebooks — und die Zahlen 51,9 Prozent und 0,519, jederzeit reproduzierbar.</a:t>
             </a:r>
           </a:p>
-          <a:p>
-            <a:pPr>
-              <a:spcBef>
-                <a:spcPts val="400"/>
-              </a:spcBef>
-            </a:pPr>
-            <a:r>
-              <a:rPr lang="de-DE" sz="1200" dirty="0"/>
+          <a:p/>
+          <a:p>
+            <a:r>
               <a:t>Und der größere Punkt: Moderne KI beschleunigt Entwicklung und Erklärung enorm. Wissenschaftliche Qualität entsteht aber genau wie früher — durch saubere Fragen, zeitliche Trennung, Baselines, reproduzierbare Tests und das offene Benennen von Grenzen.</a:t>
             </a:r>
           </a:p>
-          <a:p>
-            <a:pPr>
-              <a:spcBef>
-                <a:spcPts val="1200"/>
-              </a:spcBef>
-            </a:pPr>
-            <a:r>
-              <a:rPr lang="de-DE" sz="1200" b="1" dirty="0"/>
-              <a:t>REGIE</a:t>
-            </a:r>
-          </a:p>
-          <a:p>
-            <a:pPr>
-              <a:spcBef>
-                <a:spcPts val="400"/>
-              </a:spcBef>
-            </a:pPr>
-            <a:r>
-              <a:rPr lang="de-DE" sz="1200" dirty="0"/>
-              <a:t>Langsamste Folie des Vortrags. Das Zitat oben tatsächlich vorlesen — es ist die Botschaft, die hängenbleiben soll.</a:t>
-            </a:r>
-          </a:p>
-          <a:p>
-            <a:pPr>
-              <a:spcBef>
-                <a:spcPts val="1200"/>
-              </a:spcBef>
-            </a:pPr>
-            <a:r>
-              <a:rPr lang="de-DE" sz="1200" b="1" dirty="0"/>
-              <a:t>ÜBERLEITUNG</a:t>
-            </a:r>
-          </a:p>
-          <a:p>
-            <a:pPr>
-              <a:spcBef>
-                <a:spcPts val="400"/>
-              </a:spcBef>
-            </a:pPr>
-            <a:r>
-              <a:rPr lang="de-DE" sz="1200" dirty="0"/>
+          <a:p/>
+          <a:p>
+            <a:r>
               <a:t>„Zum Schluss die Grundlage, auf der das alles steht.“</a:t>
             </a:r>
           </a:p>
@@ -3746,123 +2173,37 @@
           <a:bodyPr/>
           <a:lstStyle/>
           <a:p>
-            <a:pPr>
-              <a:spcBef>
-                <a:spcPts val="1200"/>
-              </a:spcBef>
-            </a:pPr>
-            <a:r>
-              <a:rPr lang="de-DE" sz="1200" b="1" dirty="0"/>
-              <a:t>ANHANG · BACKUP — zählt nicht zur Redezeit</a:t>
-            </a:r>
-          </a:p>
-          <a:p>
-            <a:pPr>
-              <a:spcBef>
-                <a:spcPts val="1200"/>
-              </a:spcBef>
-            </a:pPr>
-            <a:r>
-              <a:rPr lang="de-DE" sz="1200" b="1" dirty="0"/>
-              <a:t>SPRECHTEXT</a:t>
-            </a:r>
-          </a:p>
-          <a:p>
-            <a:pPr>
-              <a:spcBef>
-                <a:spcPts val="400"/>
-              </a:spcBef>
-            </a:pPr>
-            <a:r>
-              <a:rPr lang="de-DE" sz="1200" dirty="0"/>
+            <a:r>
               <a:t>Vier Ausbaustufen.</a:t>
             </a:r>
           </a:p>
-          <a:p>
-            <a:pPr>
-              <a:spcBef>
-                <a:spcPts val="400"/>
-              </a:spcBef>
-            </a:pPr>
-            <a:r>
-              <a:rPr lang="de-DE" sz="1200" dirty="0"/>
+          <a:p/>
+          <a:p>
+            <a:r>
               <a:t>Erstens Online Learning: Das Modell aktualisiert sich automatisch mit jedem neuen Kurstag, statt auf dem Stand des Trainings einzufrieren.</a:t>
             </a:r>
           </a:p>
-          <a:p>
-            <a:pPr>
-              <a:spcBef>
-                <a:spcPts val="400"/>
-              </a:spcBef>
-            </a:pPr>
-            <a:r>
-              <a:rPr lang="de-DE" sz="1200" dirty="0"/>
+          <a:p/>
+          <a:p>
+            <a:r>
               <a:t>Zweitens Sentiment-Integration: die Tonalität von Nachrichten als zusätzliches Feature. Das wäre Information, die nicht schon im Kurs steckt — und damit der aussichtsreichste Hebel von allen vier.</a:t>
             </a:r>
           </a:p>
-          <a:p>
-            <a:pPr>
-              <a:spcBef>
-                <a:spcPts val="400"/>
-              </a:spcBef>
-            </a:pPr>
-            <a:r>
-              <a:rPr lang="de-DE" sz="1200" dirty="0"/>
+          <a:p/>
+          <a:p>
+            <a:r>
               <a:t>Drittens Multiklassen-Klassifikation: nicht nur auf oder ab, sondern stark, mäßig, neutral.</a:t>
             </a:r>
           </a:p>
-          <a:p>
-            <a:pPr>
-              <a:spcBef>
-                <a:spcPts val="400"/>
-              </a:spcBef>
-            </a:pPr>
-            <a:r>
-              <a:rPr lang="de-DE" sz="1200" dirty="0"/>
+          <a:p/>
+          <a:p>
+            <a:r>
               <a:t>Und viertens eine erweiterte Backtesting-Engine, die simulierte Handelsstrategien auf historischen Daten durchrechnet.</a:t>
             </a:r>
           </a:p>
-          <a:p>
-            <a:pPr>
-              <a:spcBef>
-                <a:spcPts val="1200"/>
-              </a:spcBef>
-            </a:pPr>
-            <a:r>
-              <a:rPr lang="de-DE" sz="1200" b="1" dirty="0"/>
-              <a:t>REGIE</a:t>
-            </a:r>
-          </a:p>
-          <a:p>
-            <a:pPr>
-              <a:spcBef>
-                <a:spcPts val="400"/>
-              </a:spcBef>
-            </a:pPr>
-            <a:r>
-              <a:rPr lang="de-DE" sz="1200" dirty="0"/>
-              <a:t>Zügig. Punkt zwei kurz begründen — das zeigt, dass die Roadmap durchdacht ist und nicht nur eine Wunschliste.</a:t>
-            </a:r>
-          </a:p>
-          <a:p>
-            <a:pPr>
-              <a:spcBef>
-                <a:spcPts val="1200"/>
-              </a:spcBef>
-            </a:pPr>
-            <a:r>
-              <a:rPr lang="de-DE" sz="1200" b="1" dirty="0"/>
-              <a:t>ÜBERLEITUNG</a:t>
-            </a:r>
-          </a:p>
-          <a:p>
-            <a:pPr>
-              <a:spcBef>
-                <a:spcPts val="400"/>
-              </a:spcBef>
-            </a:pPr>
-            <a:r>
-              <a:rPr lang="de-DE" sz="1200" dirty="0"/>
+          <a:p/>
+          <a:p>
+            <a:r>
               <a:t>„Ganz kurz die wissenschaftliche Grundlage.“</a:t>
             </a:r>
           </a:p>
@@ -3939,90 +2280,19 @@
           <a:bodyPr/>
           <a:lstStyle/>
           <a:p>
-            <a:pPr>
-              <a:spcBef>
-                <a:spcPts val="1200"/>
-              </a:spcBef>
-            </a:pPr>
-            <a:r>
-              <a:rPr lang="de-DE" sz="1200" b="1" dirty="0"/>
-              <a:t>TIMING  23:45–24:00  ·  ca. 15 Sek</a:t>
-            </a:r>
-          </a:p>
-          <a:p>
-            <a:pPr>
-              <a:spcBef>
-                <a:spcPts val="1200"/>
-              </a:spcBef>
-            </a:pPr>
-            <a:r>
-              <a:rPr lang="de-DE" sz="1200" b="1" dirty="0"/>
-              <a:t>SPRECHTEXT</a:t>
-            </a:r>
-          </a:p>
-          <a:p>
-            <a:pPr>
-              <a:spcBef>
-                <a:spcPts val="400"/>
-              </a:spcBef>
-            </a:pPr>
-            <a:r>
-              <a:rPr lang="de-DE" sz="1200" dirty="0"/>
+            <a:r>
               <a:t>Kurslehrbuch ist der Géron, Kapitel 1 bis 9 — Klassifikationsmetriken, Pipelines, Support Vector Machines, Entscheidungsbäume, Random Forests, ROC und zeitliche Validierung. Alles davon steckt im Projekt.</a:t>
             </a:r>
           </a:p>
-          <a:p>
-            <a:pPr>
-              <a:spcBef>
-                <a:spcPts val="400"/>
-              </a:spcBef>
-            </a:pPr>
-            <a:r>
-              <a:rPr lang="de-DE" sz="1200" dirty="0"/>
+          <a:p/>
+          <a:p>
+            <a:r>
               <a:t>Dazu fünf wissenschaftliche Quellen: Fama zur Markteffizienz, Lundberg und Lee zu SHAP, Li zur Imputation, Pinheiro zur Skalierung und Stock zum QUA³CK-Prozess. Die Datenbasis ist CC0, also gemeinfrei.</a:t>
             </a:r>
           </a:p>
-          <a:p>
-            <a:pPr>
-              <a:spcBef>
-                <a:spcPts val="1200"/>
-              </a:spcBef>
-            </a:pPr>
-            <a:r>
-              <a:rPr lang="de-DE" sz="1200" b="1" dirty="0"/>
-              <a:t>REGIE</a:t>
-            </a:r>
-          </a:p>
-          <a:p>
-            <a:pPr>
-              <a:spcBef>
-                <a:spcPts val="400"/>
-              </a:spcBef>
-            </a:pPr>
-            <a:r>
-              <a:rPr lang="de-DE" sz="1200" dirty="0"/>
-              <a:t>Nicht vorlesen. Nur die Brücke zum Kurs benennen, die Folie steht als Beleg.</a:t>
-            </a:r>
-          </a:p>
-          <a:p>
-            <a:pPr>
-              <a:spcBef>
-                <a:spcPts val="1200"/>
-              </a:spcBef>
-            </a:pPr>
-            <a:r>
-              <a:rPr lang="de-DE" sz="1200" b="1" dirty="0"/>
-              <a:t>ÜBERLEITUNG</a:t>
-            </a:r>
-          </a:p>
-          <a:p>
-            <a:pPr>
-              <a:spcBef>
-                <a:spcPts val="400"/>
-              </a:spcBef>
-            </a:pPr>
-            <a:r>
-              <a:rPr lang="de-DE" sz="1200" dirty="0"/>
+          <a:p/>
+          <a:p>
+            <a:r>
               <a:t>„Damit bin ich am Ende.“</a:t>
             </a:r>
           </a:p>
@@ -4099,90 +2369,25 @@
           <a:bodyPr/>
           <a:lstStyle/>
           <a:p>
-            <a:pPr>
-              <a:spcBef>
-                <a:spcPts val="1200"/>
-              </a:spcBef>
-            </a:pPr>
-            <a:r>
-              <a:rPr lang="de-DE" sz="1200" b="1" dirty="0"/>
-              <a:t>TIMING  24:00–24:15  ·  ca. 15 Sek</a:t>
-            </a:r>
-          </a:p>
-          <a:p>
-            <a:pPr>
-              <a:spcBef>
-                <a:spcPts val="1200"/>
-              </a:spcBef>
-            </a:pPr>
-            <a:r>
-              <a:rPr lang="de-DE" sz="1200" b="1" dirty="0"/>
-              <a:t>SPRECHTEXT</a:t>
-            </a:r>
-          </a:p>
-          <a:p>
-            <a:pPr>
-              <a:spcBef>
-                <a:spcPts val="400"/>
-              </a:spcBef>
-            </a:pPr>
-            <a:r>
-              <a:rPr lang="de-DE" sz="1200" dirty="0"/>
+            <a:r>
               <a:t>Fünftausend Euro, acht Merkmale, fünf Modelle und elf Jahre unangetastete Testdaten — und die vielleicht wichtigste Erkenntnis daraus: Manchmal ist das ehrlichste Ergebnis das wertvollste.</a:t>
             </a:r>
           </a:p>
-          <a:p>
-            <a:pPr>
-              <a:spcBef>
-                <a:spcPts val="400"/>
-              </a:spcBef>
-            </a:pPr>
-            <a:r>
-              <a:rPr lang="de-DE" sz="1200" dirty="0"/>
+          <a:p/>
+          <a:p>
+            <a:r>
               <a:t>Vielen Dank für eure Aufmerksamkeit. Jetzt habe ich alle Zeit für eure Fragen.</a:t>
             </a:r>
           </a:p>
-          <a:p>
-            <a:pPr>
-              <a:spcBef>
-                <a:spcPts val="1200"/>
-              </a:spcBef>
-            </a:pPr>
-            <a:r>
-              <a:rPr lang="de-DE" sz="1200" b="1" dirty="0"/>
-              <a:t>REGIE</a:t>
-            </a:r>
-          </a:p>
-          <a:p>
-            <a:pPr>
-              <a:spcBef>
-                <a:spcPts val="400"/>
-              </a:spcBef>
-            </a:pPr>
-            <a:r>
-              <a:rPr lang="de-DE" sz="1200" dirty="0"/>
-              <a:t>Klammer zum Einstieg schließen. Nach „Danke“ stehenbleiben, nicht sofort zum Laptop greifen. Publikum anschauen und die erste Frage abwarten.</a:t>
-            </a:r>
-          </a:p>
-          <a:p>
-            <a:pPr>
-              <a:spcBef>
-                <a:spcPts val="1200"/>
-              </a:spcBef>
-            </a:pPr>
-            <a:r>
-              <a:rPr lang="de-DE" sz="1200" b="1" dirty="0"/>
+          <a:p/>
+          <a:p>
+            <a:r>
               <a:t>FÜR DIE FRAGERUNDE</a:t>
             </a:r>
           </a:p>
-          <a:p>
-            <a:pPr>
-              <a:spcBef>
-                <a:spcPts val="400"/>
-              </a:spcBef>
-            </a:pPr>
-            <a:r>
-              <a:rPr lang="de-DE" sz="1200" dirty="0"/>
+          <a:p/>
+          <a:p>
+            <a:r>
               <a:t>Folie 28 hält die vier wahrscheinlichsten Prüferfragen mit ausformulierten Antworten. Belegfolien: 29 Konfusionsmatrix &amp; ROC, 30 Lernkurve, 31 Erklärbarkeit. App-Screenshots: 32 bis 37. Im Präsentationsmodus Foliennummer eintippen und Enter drücken, um direkt dorthin zu springen.</a:t>
             </a:r>
           </a:p>
@@ -4259,288 +2464,139 @@
           <a:bodyPr/>
           <a:lstStyle/>
           <a:p>
-            <a:pPr>
-              <a:spcBef>
-                <a:spcPts val="1200"/>
-              </a:spcBef>
-            </a:pPr>
-            <a:r>
-              <a:rPr lang="de-DE" sz="1200" b="1" dirty="0"/>
-              <a:t>ANHANG  ·  Q&amp;A  ·  NICHT VORLESEN</a:t>
-            </a:r>
-          </a:p>
-          <a:p>
-            <a:pPr>
-              <a:spcBef>
-                <a:spcPts val="1200"/>
-              </a:spcBef>
-            </a:pPr>
-            <a:r>
-              <a:rPr lang="de-DE" sz="1200" b="1" dirty="0"/>
-              <a:t>EINSATZ</a:t>
-            </a:r>
-          </a:p>
-          <a:p>
-            <a:pPr>
-              <a:spcBef>
-                <a:spcPts val="400"/>
-              </a:spcBef>
-            </a:pPr>
-            <a:r>
-              <a:rPr lang="de-DE" sz="1200" dirty="0"/>
-              <a:t>Backup-Folie für die Fragerunde. Nur einblenden, wenn eine dieser Fragen tatsächlich gestellt wird.</a:t>
-            </a:r>
-          </a:p>
-          <a:p>
-            <a:pPr>
-              <a:spcBef>
-                <a:spcPts val="1200"/>
-              </a:spcBef>
-            </a:pPr>
-            <a:r>
-              <a:rPr lang="de-DE" sz="1200" b="1" dirty="0"/>
+            <a:r>
               <a:t>ANTWORT · „Warum nur ROC-AUC 0,519?“</a:t>
             </a:r>
           </a:p>
-          <a:p>
-            <a:pPr>
-              <a:spcBef>
-                <a:spcPts val="400"/>
-              </a:spcBef>
-            </a:pPr>
-            <a:r>
-              <a:rPr lang="de-DE" sz="1200" dirty="0"/>
+          <a:p/>
+          <a:p>
+            <a:r>
               <a:t>„Weil der Test zeitlich unangetastet ist. Sobald man Zukunftswissen entfernt, bleibt mit reinen historischen Kursmerkmalen gemäß Effizienzmarkthypothese nur ein sehr schwaches Signal übrig. 0,519 ist genau das — und die Walk-forward-Folds bestätigen es mit 0,514.“</a:t>
             </a:r>
           </a:p>
-          <a:p>
-            <a:pPr>
-              <a:spcBef>
-                <a:spcPts val="1200"/>
-              </a:spcBef>
-            </a:pPr>
-            <a:r>
-              <a:rPr lang="de-DE" sz="1200" b="1" dirty="0"/>
+          <a:p/>
+          <a:p>
+            <a:r>
               <a:t>ANTWORT · „Was ist Data Leakage und wie habt ihr es verhindert?“</a:t>
             </a:r>
           </a:p>
-          <a:p>
-            <a:pPr>
-              <a:spcBef>
-                <a:spcPts val="400"/>
-              </a:spcBef>
-            </a:pPr>
-            <a:r>
-              <a:rPr lang="de-DE" sz="1200" dirty="0"/>
+          <a:p/>
+          <a:p>
+            <a:r>
               <a:t>„Leakage heißt, dass Information aus der Testperiode ins Training sickert. Drei Schutzmaßnahmen: strikte Zeitordnung, 20 Handelstage Sperrzone zwischen Training und Test, und eine Pipeline, in der Imputer und Scaler ausschließlich im jeweiligen Trainingsfenster gefittet werden.“</a:t>
             </a:r>
           </a:p>
-          <a:p>
-            <a:pPr>
-              <a:spcBef>
-                <a:spcPts val="1200"/>
-              </a:spcBef>
-            </a:pPr>
-            <a:r>
-              <a:rPr lang="de-DE" sz="1200" b="1" dirty="0"/>
+          <a:p/>
+          <a:p>
+            <a:r>
               <a:t>LEAKAGE-GEGENRECHNUNG  (Zahlen zum Zitieren)</a:t>
             </a:r>
           </a:p>
-          <a:p>
-            <a:pPr>
-              <a:spcBef>
-                <a:spcPts val="400"/>
-              </a:spcBef>
-            </a:pPr>
-            <a:r>
-              <a:rPr lang="de-DE" sz="1200" dirty="0"/>
+          <a:p/>
+          <a:p>
+            <a:r>
               <a:t>Random Forest, identische Parameter und Datenbasis, nur die Aufteilung variiert:</a:t>
             </a:r>
           </a:p>
-          <a:p>
-            <a:pPr>
-              <a:spcBef>
-                <a:spcPts val="400"/>
-              </a:spcBef>
-            </a:pPr>
-            <a:r>
-              <a:rPr lang="de-DE" sz="1200" dirty="0"/>
+          <a:p/>
+          <a:p>
+            <a:r>
               <a:t>zeitlich + 20 Tage Sperrzone (v1.0): AUC 0,5192 · BalAcc 0,5129 · Acc 0,5187 (Baseline 0,5915)   —   zeitlich ohne Sperrzone: AUC 0,5240 · BalAcc 0,5172 · Acc 0,5308   —   naiver Zufalls-Split 80/20: AUC 0,5813 · BalAcc 0,5512 · Acc 0,5467 (Baseline 0,5592)</a:t>
             </a:r>
           </a:p>
-          <a:p>
-            <a:pPr>
-              <a:spcBef>
-                <a:spcPts val="400"/>
-              </a:spcBef>
-            </a:pPr>
-            <a:r>
-              <a:rPr lang="de-DE" sz="1200" dirty="0"/>
+          <a:p/>
+          <a:p>
+            <a:r>
               <a:t>Kernaussage: Gemessen am Zufallsniveau 0,5 erscheint das Signal beim Zufalls-Split mit 0,081 statt 0,019 — also 4,2-mal größer. Bemerkenswert: Selbst dort liegt die Accuracy mit 0,5467 noch unter ihrer Baseline von 0,5592. Die Sperrzone allein macht 0,005 aus, der Split-Typ 0,062.</a:t>
             </a:r>
           </a:p>
-          <a:p>
-            <a:pPr>
-              <a:spcBef>
-                <a:spcPts val="1200"/>
-              </a:spcBef>
-            </a:pPr>
-            <a:r>
-              <a:rPr lang="de-DE" sz="1200" b="1" dirty="0"/>
+          <a:p/>
+          <a:p>
+            <a:r>
               <a:t>ANTWORT · „Warum binäre Klassifikation statt Regression?“</a:t>
             </a:r>
           </a:p>
-          <a:p>
-            <a:pPr>
-              <a:spcBef>
-                <a:spcPts val="400"/>
-              </a:spcBef>
-            </a:pPr>
-            <a:r>
-              <a:rPr lang="de-DE" sz="1200" dirty="0"/>
+          <a:p/>
+          <a:p>
+            <a:r>
               <a:t>„Weil die exakte Kurshöhe an effizienten Märkten praktisch nicht vorhersagbar ist. Die Richtungsfrage ist die realistischere Fragestellung und lässt sich mit Accuracy, Balanced Accuracy und ROC-AUC sauber bewerten.“</a:t>
             </a:r>
           </a:p>
-          <a:p>
-            <a:pPr>
-              <a:spcBef>
-                <a:spcPts val="1200"/>
-              </a:spcBef>
-            </a:pPr>
-            <a:r>
-              <a:rPr lang="de-DE" sz="1200" b="1" dirty="0"/>
+          <a:p/>
+          <a:p>
+            <a:r>
               <a:t>ANTWORT · „Warum Random Forest statt neuronalem Netz?“</a:t>
             </a:r>
           </a:p>
-          <a:p>
-            <a:pPr>
-              <a:spcBef>
-                <a:spcPts val="400"/>
-              </a:spcBef>
-            </a:pPr>
-            <a:r>
-              <a:rPr lang="de-DE" sz="1200" dirty="0"/>
+          <a:p/>
+          <a:p>
+            <a:r>
               <a:t>„Ich habe bewusst fünf Modellgenerationen verglichen. Der Random Forest bringt Nichtlinearität und Erklärbarkeit zusammen. Kein Modell erzeugt aber ein belastbares Signal — und bei acht Features rechtfertigt das kein neuronales Netz. Occam’s Razor.“</a:t>
             </a:r>
           </a:p>
-          <a:p>
-            <a:pPr>
-              <a:spcBef>
-                <a:spcPts val="1200"/>
-              </a:spcBef>
-            </a:pPr>
-            <a:r>
-              <a:rPr lang="de-DE" sz="1200" b="1" dirty="0"/>
+          <a:p/>
+          <a:p>
+            <a:r>
               <a:t>ANTWORT · „Ihre Lernkurve zeigt doch klares Overfitting?“  (WICHTIG)</a:t>
             </a:r>
           </a:p>
-          <a:p>
-            <a:pPr>
-              <a:spcBef>
-                <a:spcPts val="400"/>
-              </a:spcBef>
-            </a:pPr>
-            <a:r>
-              <a:rPr lang="de-DE" sz="1200" dirty="0"/>
+          <a:p/>
+          <a:p>
+            <a:r>
               <a:t>„Ja, völlig richtig — Trainings-AUC 0,637 gegen Validierung 0,525, Lücke 0,11. Die App weist das selbst als hohe Varianz aus. Der Punkt ist: Es ist hier nicht behebbar. Ich habe beide Standardhebel geprüft.“</a:t>
             </a:r>
           </a:p>
-          <a:p>
-            <a:pPr>
-              <a:spcBef>
-                <a:spcPts val="400"/>
-              </a:spcBef>
-            </a:pPr>
-            <a:r>
-              <a:rPr lang="de-DE" sz="1200" dirty="0"/>
+          <a:p/>
+          <a:p>
+            <a:r>
               <a:t>„Erster Hebel, mehr Daten: Die Validierungskurve läuft über die 2,3-fache Datenmenge von 0,530 auf 0,525 — sie bewegt sich nicht. Die Lücke schließt sich nur, weil der Trainings-Score fällt.“</a:t>
             </a:r>
           </a:p>
-          <a:p>
-            <a:pPr>
-              <a:spcBef>
-                <a:spcPts val="400"/>
-              </a:spcBef>
-            </a:pPr>
-            <a:r>
-              <a:rPr lang="de-DE" sz="1200" dirty="0"/>
+          <a:p/>
+          <a:p>
+            <a:r>
               <a:t>„Zweiter Hebel, stärkere Regularisierung: Ich habe sieben Konfigurationen auf demselben Out-of-Time-Fenster gerechnet. Ein unbeschränkter Forest erreicht Trainings-AUC 1,0 — er lernt alle 120.920 Zeilen perfekt auswendig — und im Test 0,512. Ganz am anderen Ende, bei Tiefe 2 und 200 Beobachtungen pro Blatt, schrumpft die Lücke auf 0,03, und der Test-AUC liegt bei 0,513. Über den kompletten Komplexitätsbereich bewegt sich der Test-AUC zwischen 0,512 und 0,519.“</a:t>
             </a:r>
           </a:p>
-          <a:p>
-            <a:pPr>
-              <a:spcBef>
-                <a:spcPts val="400"/>
-              </a:spcBef>
-            </a:pPr>
-            <a:r>
-              <a:rPr lang="de-DE" sz="1200" dirty="0"/>
+          <a:p/>
+          <a:p>
+            <a:r>
               <a:t>„Das heißt: Die Obergrenze setzt der Informationsgehalt der Features, nicht die Modellkapazität. Was overfittet wird, ist Rauschen. Und die gewählten Parameter — Tiefe 8, 5 pro Blatt — sind in diesem Vergleich mit 0,5192 der beste Wert.“</a:t>
             </a:r>
           </a:p>
-          <a:p>
-            <a:pPr>
-              <a:spcBef>
-                <a:spcPts val="1200"/>
-              </a:spcBef>
-            </a:pPr>
-            <a:r>
-              <a:rPr lang="de-DE" sz="1200" b="1" dirty="0"/>
+          <a:p/>
+          <a:p>
+            <a:r>
               <a:t>ABLATIONSTABELLE  (Zahlen zum Zitieren)</a:t>
             </a:r>
           </a:p>
-          <a:p>
-            <a:pPr>
-              <a:spcBef>
-                <a:spcPts val="400"/>
-              </a:spcBef>
-            </a:pPr>
-            <a:r>
-              <a:rPr lang="de-DE" sz="1200" dirty="0"/>
+          <a:p/>
+          <a:p>
+            <a:r>
               <a:t>Random Forest, 200 Bäume, identisches purged-OOT-Fenster — Train-AUC / Test-AUC / Lücke:</a:t>
             </a:r>
           </a:p>
-          <a:p>
-            <a:pPr>
-              <a:spcBef>
-                <a:spcPts val="400"/>
-              </a:spcBef>
-            </a:pPr>
-            <a:r>
-              <a:rPr lang="de-DE" sz="1200" dirty="0"/>
+          <a:p/>
+          <a:p>
+            <a:r>
               <a:t>unbeschränkt: 1,0000 / 0,5121 / 0,488   ·   Tiefe 16, Blatt 2: 0,9044 / 0,5180 / 0,386   ·   Tiefe 8, Blatt 5 (v1.0): 0,6327 / 0,5192 / 0,114   ·   Tiefe 6, Blatt 20: 0,5948 / 0,5158 / 0,079   ·   Tiefe 4, Blatt 50: 0,5672 / 0,5146 / 0,053   ·   Tiefe 3, Blatt 100: 0,5548 / 0,5161 / 0,039   ·   Tiefe 2, Blatt 200: 0,5426 / 0,5129 / 0,030</a:t>
             </a:r>
           </a:p>
-          <a:p>
-            <a:pPr>
-              <a:spcBef>
-                <a:spcPts val="400"/>
-              </a:spcBef>
-            </a:pPr>
-            <a:r>
-              <a:rPr lang="de-DE" sz="1200" dirty="0"/>
+          <a:p/>
+          <a:p>
+            <a:r>
               <a:t>Einschränkung, falls nachgefragt: gemessen auf dem OOT-Holdout, nicht zusätzlich über die vier Walk-forward-Folds. Bei einer Gesamtspanne von 0,007 ändert das die Aussage nicht.</a:t>
             </a:r>
           </a:p>
-          <a:p>
-            <a:pPr>
-              <a:spcBef>
-                <a:spcPts val="1200"/>
-              </a:spcBef>
-            </a:pPr>
-            <a:r>
-              <a:rPr lang="de-DE" sz="1200" b="1" dirty="0"/>
+          <a:p/>
+          <a:p>
+            <a:r>
               <a:t>WEITERE WAHRSCHEINLICHE FRAGEN</a:t>
             </a:r>
           </a:p>
-          <a:p>
-            <a:pPr>
-              <a:spcBef>
-                <a:spcPts val="400"/>
-              </a:spcBef>
-            </a:pPr>
-            <a:r>
-              <a:rPr lang="de-DE" sz="1200" dirty="0"/>
+          <a:p/>
+          <a:p>
+            <a:r>
               <a:t>Survivorship-Bias: offen zugeben, siehe Folie 10.  ·  Warum 20 Handelstage Horizont: rund ein Handelsmonat — lang genug für Trendwirkung, kurz genug für genügend Beobachtungen.  ·  Warum kein Hyperparameter-Tuning per Grid Search: siehe Ablationstabelle oben — der Test-AUC ist über den gesamten Komplexitätsbereich flach, Tuning würde nur Rauschen optimieren.  ·  Warum ist der Entscheidungsbaum im Walk-forward besser (0,5153 gegen 0,5141)? Differenz im Rauschbereich; der Random Forest ist als Demonstrator gewählt wegen Erklärbarkeit und Varianzreduktion, nicht wegen der besten Einzelmetrik.</a:t>
             </a:r>
           </a:p>
@@ -4617,80 +2673,8 @@
           <a:bodyPr/>
           <a:lstStyle/>
           <a:p>
-            <a:pPr>
-              <a:spcBef>
-                <a:spcPts val="1200"/>
-              </a:spcBef>
-            </a:pPr>
-            <a:r>
-              <a:rPr lang="de-DE" sz="1200" b="1" dirty="0"/>
-              <a:t>ANHANG  ·  BELEGFOLIE  ·  nicht im Vortragsablauf</a:t>
-            </a:r>
-          </a:p>
-          <a:p>
-            <a:pPr>
-              <a:spcBef>
-                <a:spcPts val="1200"/>
-              </a:spcBef>
-            </a:pPr>
-            <a:r>
-              <a:rPr lang="de-DE" sz="1200" b="1" dirty="0"/>
-              <a:t>EINSATZ</a:t>
-            </a:r>
-          </a:p>
-          <a:p>
-            <a:pPr>
-              <a:spcBef>
-                <a:spcPts val="400"/>
-              </a:spcBef>
-            </a:pPr>
-            <a:r>
-              <a:rPr lang="de-DE" sz="1200" dirty="0"/>
-              <a:t>Diese Folie war früher im Hauptteil. Der Inhalt läuft jetzt live in der Demo (Station 4 der Live-Demo). Hier nur noch für zwei Fälle: als Ausfallplan, wenn die App nicht startet, oder als Beleg auf eine Nachfrage in der Fragerunde.</a:t>
-            </a:r>
-          </a:p>
-          <a:p>
-            <a:pPr>
-              <a:spcBef>
-                <a:spcPts val="1200"/>
-              </a:spcBef>
-            </a:pPr>
-            <a:r>
-              <a:rPr lang="de-DE" sz="1200" b="1" dirty="0"/>
-              <a:t>SPRECHTEXT (falls gezeigt)</a:t>
-            </a:r>
-          </a:p>
-          <a:p>
-            <a:pPr>
-              <a:spcBef>
-                <a:spcPts val="400"/>
-              </a:spcBef>
-            </a:pPr>
-            <a:r>
-              <a:rPr lang="de-DE" sz="1200" dirty="0"/>
+            <a:r>
               <a:t>„Die Konfusionsmatrix zeigt, welche Art von Fehlern das Modell macht: Es tippt fast immer auf ‚steigend‘, weil 59,1 Prozent des Testzeitraums steigend waren. Genau deshalb ist Accuracy eine irreführende Kennzahl — sie belohnt das Nachplappern der Mehrheit. Die ROC-Kurve liegt fast auf der Diagonalen, und die Diagonale ist der reine Zufall.“</a:t>
-            </a:r>
-          </a:p>
-          <a:p>
-            <a:pPr>
-              <a:spcBef>
-                <a:spcPts val="1200"/>
-              </a:spcBef>
-            </a:pPr>
-            <a:r>
-              <a:rPr lang="de-DE" sz="1200" b="1" dirty="0"/>
-              <a:t>REGIE</a:t>
-            </a:r>
-          </a:p>
-          <a:p>
-            <a:pPr>
-              <a:spcBef>
-                <a:spcPts val="400"/>
-              </a:spcBef>
-            </a:pPr>
-            <a:r>
-              <a:rPr lang="de-DE" sz="1200" dirty="0"/>
-              <a:t>Im Präsentationsmodus Foliennummer eintippen und Enter — direkter Sprung, ohne durchzublättern.</a:t>
             </a:r>
           </a:p>
         </p:txBody>
@@ -4766,123 +2750,37 @@
           <a:bodyPr/>
           <a:lstStyle/>
           <a:p>
-            <a:pPr>
-              <a:spcBef>
-                <a:spcPts val="1200"/>
-              </a:spcBef>
-            </a:pPr>
-            <a:r>
-              <a:rPr lang="de-DE" sz="1200" b="1" dirty="0"/>
-              <a:t>TIMING  0:55–2:00  ·  ca. 65 Sek</a:t>
-            </a:r>
-          </a:p>
-          <a:p>
-            <a:pPr>
-              <a:spcBef>
-                <a:spcPts val="1200"/>
-              </a:spcBef>
-            </a:pPr>
-            <a:r>
-              <a:rPr lang="de-DE" sz="1200" b="1" dirty="0"/>
-              <a:t>SPRECHTEXT</a:t>
-            </a:r>
-          </a:p>
-          <a:p>
-            <a:pPr>
-              <a:spcBef>
-                <a:spcPts val="400"/>
-              </a:spcBef>
-            </a:pPr>
-            <a:r>
-              <a:rPr lang="de-DE" sz="1200" dirty="0"/>
+            <a:r>
               <a:t>Also: Fünftausend Euro sind da. Die Inflation frisst das Sparkonto auf. Ihr wollt investieren — aber wohin schaut ihr?</a:t>
             </a:r>
           </a:p>
-          <a:p>
-            <a:pPr>
-              <a:spcBef>
-                <a:spcPts val="400"/>
-              </a:spcBef>
-            </a:pPr>
-            <a:r>
-              <a:rPr lang="de-DE" sz="1200" dirty="0"/>
+          <a:p/>
+          <a:p>
+            <a:r>
               <a:t>Yahoo Finance zeigt euch einen Chart mit tausend Zahlen und null Einordnung. Bloomberg hat die professionellen Daten — aber ein Terminal kostet im Jahr etwa so viel wie ein Kleinwagen. ChatGPT sagt euch: „Ich kann keine Finanzberatung geben.“ Und der Bankberater? Der empfiehlt den hauseigenen Fonds mit der höchsten Provision.</a:t>
             </a:r>
           </a:p>
-          <a:p>
-            <a:pPr>
-              <a:spcBef>
-                <a:spcPts val="400"/>
-              </a:spcBef>
-            </a:pPr>
-            <a:r>
-              <a:rPr lang="de-DE" sz="1200" dirty="0"/>
+          <a:p/>
+          <a:p>
+            <a:r>
               <a:t>Vier Türen, vier Sackgassen.</a:t>
             </a:r>
           </a:p>
-          <a:p>
-            <a:pPr>
-              <a:spcBef>
-                <a:spcPts val="400"/>
-              </a:spcBef>
-            </a:pPr>
-            <a:r>
-              <a:rPr lang="de-DE" sz="1200" dirty="0"/>
+          <a:p/>
+          <a:p>
+            <a:r>
               <a:t>Das ist die Lücke: Es gibt keine zugängliche, transparente, datengetriebene Plattform, die einem Privatanleger zeigt, was hinter den Zahlen steckt — und die dabei ehrlich über ihre eigenen Grenzen ist.</a:t>
             </a:r>
           </a:p>
-          <a:p>
-            <a:pPr>
-              <a:spcBef>
-                <a:spcPts val="400"/>
-              </a:spcBef>
-            </a:pPr>
-            <a:r>
-              <a:rPr lang="de-DE" sz="1200" dirty="0"/>
+          <a:p/>
+          <a:p>
+            <a:r>
               <a:t>Merkt euch dieses eine Wort: ehrlich. Es zieht sich durch den kompletten Vortrag.</a:t>
             </a:r>
           </a:p>
-          <a:p>
-            <a:pPr>
-              <a:spcBef>
-                <a:spcPts val="1200"/>
-              </a:spcBef>
-            </a:pPr>
-            <a:r>
-              <a:rPr lang="de-DE" sz="1200" b="1" dirty="0"/>
-              <a:t>REGIE</a:t>
-            </a:r>
-          </a:p>
-          <a:p>
-            <a:pPr>
-              <a:spcBef>
-                <a:spcPts val="400"/>
-              </a:spcBef>
-            </a:pPr>
-            <a:r>
-              <a:rPr lang="de-DE" sz="1200" dirty="0"/>
-              <a:t>Die vier Kacheln einzeln antippen, je ca. 8 Sekunden. Bei „Bankberater“ darf ein Schmunzeln rein.</a:t>
-            </a:r>
-          </a:p>
-          <a:p>
-            <a:pPr>
-              <a:spcBef>
-                <a:spcPts val="1200"/>
-              </a:spcBef>
-            </a:pPr>
-            <a:r>
-              <a:rPr lang="de-DE" sz="1200" b="1" dirty="0"/>
-              <a:t>ÜBERLEITUNG</a:t>
-            </a:r>
-          </a:p>
-          <a:p>
-            <a:pPr>
-              <a:spcBef>
-                <a:spcPts val="400"/>
-              </a:spcBef>
-            </a:pPr>
-            <a:r>
-              <a:rPr lang="de-DE" sz="1200" dirty="0"/>
+          <a:p/>
+          <a:p>
+            <a:r>
               <a:t>„Genau in diese Lücke geht WealthScope AI.“</a:t>
             </a:r>
           </a:p>
@@ -4959,80 +2857,8 @@
           <a:bodyPr/>
           <a:lstStyle/>
           <a:p>
-            <a:pPr>
-              <a:spcBef>
-                <a:spcPts val="1200"/>
-              </a:spcBef>
-            </a:pPr>
-            <a:r>
-              <a:rPr lang="de-DE" sz="1200" b="1" dirty="0"/>
-              <a:t>ANHANG  ·  BELEGFOLIE  ·  nicht im Vortragsablauf</a:t>
-            </a:r>
-          </a:p>
-          <a:p>
-            <a:pPr>
-              <a:spcBef>
-                <a:spcPts val="1200"/>
-              </a:spcBef>
-            </a:pPr>
-            <a:r>
-              <a:rPr lang="de-DE" sz="1200" b="1" dirty="0"/>
-              <a:t>EINSATZ</a:t>
-            </a:r>
-          </a:p>
-          <a:p>
-            <a:pPr>
-              <a:spcBef>
-                <a:spcPts val="400"/>
-              </a:spcBef>
-            </a:pPr>
-            <a:r>
-              <a:rPr lang="de-DE" sz="1200" dirty="0"/>
-              <a:t>Diese Folie war früher im Hauptteil. Der Inhalt läuft jetzt live in der Demo (Station 5 der Live-Demo). Hier nur noch für zwei Fälle: als Ausfallplan, wenn die App nicht startet, oder als Beleg auf eine Nachfrage in der Fragerunde.</a:t>
-            </a:r>
-          </a:p>
-          <a:p>
-            <a:pPr>
-              <a:spcBef>
-                <a:spcPts val="1200"/>
-              </a:spcBef>
-            </a:pPr>
-            <a:r>
-              <a:rPr lang="de-DE" sz="1200" b="1" dirty="0"/>
-              <a:t>SPRECHTEXT (falls gezeigt)</a:t>
-            </a:r>
-          </a:p>
-          <a:p>
-            <a:pPr>
-              <a:spcBef>
-                <a:spcPts val="400"/>
-              </a:spcBef>
-            </a:pPr>
-            <a:r>
-              <a:rPr lang="de-DE" sz="1200" dirty="0"/>
+            <a:r>
               <a:t>„Die Antwort ist eindeutig Varianz: Trainings-AUC 0,637 gegen Validierung 0,525, Lücke 0,11 — das ist Overfitting, und die App weist es selbst so aus. Entscheidend ist aber, dass es hier nicht behebbar ist: Über die 2,3-fache Datenmenge bewegt sich die Validierung nicht von rund 0,51 weg, und über sieben Regularisierungsstufen bleibt der Test-AUC zwischen 0,512 und 0,519. Was overfittet wird, ist Rauschen — genau das erwartet die Effizienzmarkthypothese.“</a:t>
-            </a:r>
-          </a:p>
-          <a:p>
-            <a:pPr>
-              <a:spcBef>
-                <a:spcPts val="1200"/>
-              </a:spcBef>
-            </a:pPr>
-            <a:r>
-              <a:rPr lang="de-DE" sz="1200" b="1" dirty="0"/>
-              <a:t>REGIE</a:t>
-            </a:r>
-          </a:p>
-          <a:p>
-            <a:pPr>
-              <a:spcBef>
-                <a:spcPts val="400"/>
-              </a:spcBef>
-            </a:pPr>
-            <a:r>
-              <a:rPr lang="de-DE" sz="1200" dirty="0"/>
-              <a:t>Im Präsentationsmodus Foliennummer eintippen und Enter — direkter Sprung, ohne durchzublättern.</a:t>
             </a:r>
           </a:p>
         </p:txBody>
@@ -5108,80 +2934,8 @@
           <a:bodyPr/>
           <a:lstStyle/>
           <a:p>
-            <a:pPr>
-              <a:spcBef>
-                <a:spcPts val="1200"/>
-              </a:spcBef>
-            </a:pPr>
-            <a:r>
-              <a:rPr lang="de-DE" sz="1200" b="1" dirty="0"/>
-              <a:t>ANHANG  ·  BELEGFOLIE  ·  nicht im Vortragsablauf</a:t>
-            </a:r>
-          </a:p>
-          <a:p>
-            <a:pPr>
-              <a:spcBef>
-                <a:spcPts val="1200"/>
-              </a:spcBef>
-            </a:pPr>
-            <a:r>
-              <a:rPr lang="de-DE" sz="1200" b="1" dirty="0"/>
-              <a:t>EINSATZ</a:t>
-            </a:r>
-          </a:p>
-          <a:p>
-            <a:pPr>
-              <a:spcBef>
-                <a:spcPts val="400"/>
-              </a:spcBef>
-            </a:pPr>
-            <a:r>
-              <a:rPr lang="de-DE" sz="1200" dirty="0"/>
-              <a:t>Diese Folie war früher im Hauptteil. Der Inhalt läuft jetzt live in der Demo (Station 6 der Live-Demo). Hier nur noch für zwei Fälle: als Ausfallplan, wenn die App nicht startet, oder als Beleg auf eine Nachfrage in der Fragerunde.</a:t>
-            </a:r>
-          </a:p>
-          <a:p>
-            <a:pPr>
-              <a:spcBef>
-                <a:spcPts val="1200"/>
-              </a:spcBef>
-            </a:pPr>
-            <a:r>
-              <a:rPr lang="de-DE" sz="1200" b="1" dirty="0"/>
-              <a:t>SPRECHTEXT (falls gezeigt)</a:t>
-            </a:r>
-          </a:p>
-          <a:p>
-            <a:pPr>
-              <a:spcBef>
-                <a:spcPts val="400"/>
-              </a:spcBef>
-            </a:pPr>
-            <a:r>
-              <a:rPr lang="de-DE" sz="1200" dirty="0"/>
+            <a:r>
               <a:t>„Links die Feature Importance des Random Forest, rechts SHAP — ein Verfahren aus der Spieltheorie, das je Vorhersage den Beitrag jedes Merkmals berechnet. Beide zeigen: Drawdown und Volatilität prägen das Modell stärker als reine Renditen. Erklärbarkeit erklärt aber nur, wie entschieden wird — sie beweist keine Kausalität.“</a:t>
-            </a:r>
-          </a:p>
-          <a:p>
-            <a:pPr>
-              <a:spcBef>
-                <a:spcPts val="1200"/>
-              </a:spcBef>
-            </a:pPr>
-            <a:r>
-              <a:rPr lang="de-DE" sz="1200" b="1" dirty="0"/>
-              <a:t>REGIE</a:t>
-            </a:r>
-          </a:p>
-          <a:p>
-            <a:pPr>
-              <a:spcBef>
-                <a:spcPts val="400"/>
-              </a:spcBef>
-            </a:pPr>
-            <a:r>
-              <a:rPr lang="de-DE" sz="1200" dirty="0"/>
-              <a:t>Im Präsentationsmodus Foliennummer eintippen und Enter — direkter Sprung, ohne durchzublättern.</a:t>
             </a:r>
           </a:p>
         </p:txBody>
@@ -5257,80 +3011,8 @@
           <a:bodyPr/>
           <a:lstStyle/>
           <a:p>
-            <a:pPr>
-              <a:spcBef>
-                <a:spcPts val="1200"/>
-              </a:spcBef>
-            </a:pPr>
-            <a:r>
-              <a:rPr lang="de-DE" sz="1200" b="1" dirty="0"/>
-              <a:t>ANHANG  ·  AUSFALLPLAN LIVE-DEMO  ·  normalerweise übersprungen</a:t>
-            </a:r>
-          </a:p>
-          <a:p>
-            <a:pPr>
-              <a:spcBef>
-                <a:spcPts val="1200"/>
-              </a:spcBef>
-            </a:pPr>
-            <a:r>
-              <a:rPr lang="de-DE" sz="1200" b="1" dirty="0"/>
-              <a:t>EINSATZ</a:t>
-            </a:r>
-          </a:p>
-          <a:p>
-            <a:pPr>
-              <a:spcBef>
-                <a:spcPts val="400"/>
-              </a:spcBef>
-            </a:pPr>
-            <a:r>
-              <a:rPr lang="de-DE" sz="1200" dirty="0"/>
-              <a:t>Screenshot-Ersatz für „Marktanalyse 1/2“ (Station 2 der Live-Demo), falls Netz, App oder Beamer nicht mitspielen.</a:t>
-            </a:r>
-          </a:p>
-          <a:p>
-            <a:pPr>
-              <a:spcBef>
-                <a:spcPts val="1200"/>
-              </a:spcBef>
-            </a:pPr>
-            <a:r>
-              <a:rPr lang="de-DE" sz="1200" b="1" dirty="0"/>
-              <a:t>SPRECHTEXT (falls gezeigt)</a:t>
-            </a:r>
-          </a:p>
-          <a:p>
-            <a:pPr>
-              <a:spcBef>
-                <a:spcPts val="400"/>
-              </a:spcBef>
-            </a:pPr>
-            <a:r>
-              <a:rPr lang="de-DE" sz="1200" dirty="0"/>
+            <a:r>
               <a:t>„SPY über ein Jahr, Schlusskurs mit den gleitenden Durchschnitten über 20, 50 und 200 Tage. Der Kurs liegt über allen dreien — ein intakter Aufwärtstrend, und genau der speist den hohen Trend-Score in der App.“</a:t>
-            </a:r>
-          </a:p>
-          <a:p>
-            <a:pPr>
-              <a:spcBef>
-                <a:spcPts val="1200"/>
-              </a:spcBef>
-            </a:pPr>
-            <a:r>
-              <a:rPr lang="de-DE" sz="1200" b="1" dirty="0"/>
-              <a:t>REGIE</a:t>
-            </a:r>
-          </a:p>
-          <a:p>
-            <a:pPr>
-              <a:spcBef>
-                <a:spcPts val="400"/>
-              </a:spcBef>
-            </a:pPr>
-            <a:r>
-              <a:rPr lang="de-DE" sz="1200" dirty="0"/>
-              <a:t>Foliennummer eintippen und Enter. Nicht kommentieren, dass die Demo ausgefallen ist — einfach weitersprechen.</a:t>
             </a:r>
           </a:p>
         </p:txBody>
@@ -5406,80 +3088,8 @@
           <a:bodyPr/>
           <a:lstStyle/>
           <a:p>
-            <a:pPr>
-              <a:spcBef>
-                <a:spcPts val="1200"/>
-              </a:spcBef>
-            </a:pPr>
-            <a:r>
-              <a:rPr lang="de-DE" sz="1200" b="1" dirty="0"/>
-              <a:t>ANHANG  ·  AUSFALLPLAN LIVE-DEMO  ·  normalerweise übersprungen</a:t>
-            </a:r>
-          </a:p>
-          <a:p>
-            <a:pPr>
-              <a:spcBef>
-                <a:spcPts val="1200"/>
-              </a:spcBef>
-            </a:pPr>
-            <a:r>
-              <a:rPr lang="de-DE" sz="1200" b="1" dirty="0"/>
-              <a:t>EINSATZ</a:t>
-            </a:r>
-          </a:p>
-          <a:p>
-            <a:pPr>
-              <a:spcBef>
-                <a:spcPts val="400"/>
-              </a:spcBef>
-            </a:pPr>
-            <a:r>
-              <a:rPr lang="de-DE" sz="1200" dirty="0"/>
-              <a:t>Screenshot-Ersatz für „Marktanalyse 2/2“ (Station 2 der Live-Demo), falls Netz, App oder Beamer nicht mitspielen.</a:t>
-            </a:r>
-          </a:p>
-          <a:p>
-            <a:pPr>
-              <a:spcBef>
-                <a:spcPts val="1200"/>
-              </a:spcBef>
-            </a:pPr>
-            <a:r>
-              <a:rPr lang="de-DE" sz="1200" b="1" dirty="0"/>
-              <a:t>SPRECHTEXT (falls gezeigt)</a:t>
-            </a:r>
-          </a:p>
-          <a:p>
-            <a:pPr>
-              <a:spcBef>
-                <a:spcPts val="400"/>
-              </a:spcBef>
-            </a:pPr>
-            <a:r>
-              <a:rPr lang="de-DE" sz="1200" dirty="0"/>
+            <a:r>
               <a:t>„Links die Candlesticks: Jede Kerze ist ein Handelstag, Körper gleich Eröffnung bis Schluss, Dochte gleich Hoch und Tief. Rechts der Drawdown, also der Abstand zum letzten Allzeithoch — die Grundlage des Risiko-Scores.“</a:t>
-            </a:r>
-          </a:p>
-          <a:p>
-            <a:pPr>
-              <a:spcBef>
-                <a:spcPts val="1200"/>
-              </a:spcBef>
-            </a:pPr>
-            <a:r>
-              <a:rPr lang="de-DE" sz="1200" b="1" dirty="0"/>
-              <a:t>REGIE</a:t>
-            </a:r>
-          </a:p>
-          <a:p>
-            <a:pPr>
-              <a:spcBef>
-                <a:spcPts val="400"/>
-              </a:spcBef>
-            </a:pPr>
-            <a:r>
-              <a:rPr lang="de-DE" sz="1200" dirty="0"/>
-              <a:t>Foliennummer eintippen und Enter. Nicht kommentieren, dass die Demo ausgefallen ist — einfach weitersprechen.</a:t>
             </a:r>
           </a:p>
         </p:txBody>
@@ -5555,80 +3165,8 @@
           <a:bodyPr/>
           <a:lstStyle/>
           <a:p>
-            <a:pPr>
-              <a:spcBef>
-                <a:spcPts val="1200"/>
-              </a:spcBef>
-            </a:pPr>
-            <a:r>
-              <a:rPr lang="de-DE" sz="1200" b="1" dirty="0"/>
-              <a:t>ANHANG  ·  AUSFALLPLAN LIVE-DEMO  ·  normalerweise übersprungen</a:t>
-            </a:r>
-          </a:p>
-          <a:p>
-            <a:pPr>
-              <a:spcBef>
-                <a:spcPts val="1200"/>
-              </a:spcBef>
-            </a:pPr>
-            <a:r>
-              <a:rPr lang="de-DE" sz="1200" b="1" dirty="0"/>
-              <a:t>EINSATZ</a:t>
-            </a:r>
-          </a:p>
-          <a:p>
-            <a:pPr>
-              <a:spcBef>
-                <a:spcPts val="400"/>
-              </a:spcBef>
-            </a:pPr>
-            <a:r>
-              <a:rPr lang="de-DE" sz="1200" dirty="0"/>
-              <a:t>Screenshot-Ersatz für „ML-Insights 1/2“ (Stationen 3 und 4 der Live-Demo), falls Netz, App oder Beamer nicht mitspielen.</a:t>
-            </a:r>
-          </a:p>
-          <a:p>
-            <a:pPr>
-              <a:spcBef>
-                <a:spcPts val="1200"/>
-              </a:spcBef>
-            </a:pPr>
-            <a:r>
-              <a:rPr lang="de-DE" sz="1200" b="1" dirty="0"/>
-              <a:t>SPRECHTEXT (falls gezeigt)</a:t>
-            </a:r>
-          </a:p>
-          <a:p>
-            <a:pPr>
-              <a:spcBef>
-                <a:spcPts val="400"/>
-              </a:spcBef>
-            </a:pPr>
-            <a:r>
-              <a:rPr lang="de-DE" sz="1200" dirty="0"/>
+            <a:r>
               <a:t>„Links alle fünf Modellgenerationen unter identischen Zeitfenstern. Rechts die Fehleranalyse im Out-of-Time-Test: Accuracy unter der Majority-Baseline, AUC 0,519. Transparent statt beschönigt.“</a:t>
-            </a:r>
-          </a:p>
-          <a:p>
-            <a:pPr>
-              <a:spcBef>
-                <a:spcPts val="1200"/>
-              </a:spcBef>
-            </a:pPr>
-            <a:r>
-              <a:rPr lang="de-DE" sz="1200" b="1" dirty="0"/>
-              <a:t>REGIE</a:t>
-            </a:r>
-          </a:p>
-          <a:p>
-            <a:pPr>
-              <a:spcBef>
-                <a:spcPts val="400"/>
-              </a:spcBef>
-            </a:pPr>
-            <a:r>
-              <a:rPr lang="de-DE" sz="1200" dirty="0"/>
-              <a:t>Foliennummer eintippen und Enter. Nicht kommentieren, dass die Demo ausgefallen ist — einfach weitersprechen.</a:t>
             </a:r>
           </a:p>
         </p:txBody>
@@ -5704,80 +3242,8 @@
           <a:bodyPr/>
           <a:lstStyle/>
           <a:p>
-            <a:pPr>
-              <a:spcBef>
-                <a:spcPts val="1200"/>
-              </a:spcBef>
-            </a:pPr>
-            <a:r>
-              <a:rPr lang="de-DE" sz="1200" b="1" dirty="0"/>
-              <a:t>ANHANG  ·  AUSFALLPLAN LIVE-DEMO  ·  normalerweise übersprungen</a:t>
-            </a:r>
-          </a:p>
-          <a:p>
-            <a:pPr>
-              <a:spcBef>
-                <a:spcPts val="1200"/>
-              </a:spcBef>
-            </a:pPr>
-            <a:r>
-              <a:rPr lang="de-DE" sz="1200" b="1" dirty="0"/>
-              <a:t>EINSATZ</a:t>
-            </a:r>
-          </a:p>
-          <a:p>
-            <a:pPr>
-              <a:spcBef>
-                <a:spcPts val="400"/>
-              </a:spcBef>
-            </a:pPr>
-            <a:r>
-              <a:rPr lang="de-DE" sz="1200" dirty="0"/>
-              <a:t>Screenshot-Ersatz für „ML-Insights 2/2“ (Stationen 5 und 6 der Live-Demo), falls Netz, App oder Beamer nicht mitspielen.</a:t>
-            </a:r>
-          </a:p>
-          <a:p>
-            <a:pPr>
-              <a:spcBef>
-                <a:spcPts val="1200"/>
-              </a:spcBef>
-            </a:pPr>
-            <a:r>
-              <a:rPr lang="de-DE" sz="1200" b="1" dirty="0"/>
-              <a:t>SPRECHTEXT (falls gezeigt)</a:t>
-            </a:r>
-          </a:p>
-          <a:p>
-            <a:pPr>
-              <a:spcBef>
-                <a:spcPts val="400"/>
-              </a:spcBef>
-            </a:pPr>
-            <a:r>
-              <a:rPr lang="de-DE" sz="1200" dirty="0"/>
+            <a:r>
               <a:t>„Links die Lernkurve: Mehr Daten schließen die Lücke nur begrenzt. Rechts die Erklärbarkeit: Sie zeigt, welche Variablen das schwache Signal treiben — ohne eine Ursache zu behaupten.“</a:t>
-            </a:r>
-          </a:p>
-          <a:p>
-            <a:pPr>
-              <a:spcBef>
-                <a:spcPts val="1200"/>
-              </a:spcBef>
-            </a:pPr>
-            <a:r>
-              <a:rPr lang="de-DE" sz="1200" b="1" dirty="0"/>
-              <a:t>REGIE</a:t>
-            </a:r>
-          </a:p>
-          <a:p>
-            <a:pPr>
-              <a:spcBef>
-                <a:spcPts val="400"/>
-              </a:spcBef>
-            </a:pPr>
-            <a:r>
-              <a:rPr lang="de-DE" sz="1200" dirty="0"/>
-              <a:t>Foliennummer eintippen und Enter. Nicht kommentieren, dass die Demo ausgefallen ist — einfach weitersprechen.</a:t>
             </a:r>
           </a:p>
         </p:txBody>
@@ -5853,80 +3319,8 @@
           <a:bodyPr/>
           <a:lstStyle/>
           <a:p>
-            <a:pPr>
-              <a:spcBef>
-                <a:spcPts val="1200"/>
-              </a:spcBef>
-            </a:pPr>
-            <a:r>
-              <a:rPr lang="de-DE" sz="1200" b="1" dirty="0"/>
-              <a:t>ANHANG  ·  AUSFALLPLAN LIVE-DEMO  ·  normalerweise übersprungen</a:t>
-            </a:r>
-          </a:p>
-          <a:p>
-            <a:pPr>
-              <a:spcBef>
-                <a:spcPts val="1200"/>
-              </a:spcBef>
-            </a:pPr>
-            <a:r>
-              <a:rPr lang="de-DE" sz="1200" b="1" dirty="0"/>
-              <a:t>EINSATZ</a:t>
-            </a:r>
-          </a:p>
-          <a:p>
-            <a:pPr>
-              <a:spcBef>
-                <a:spcPts val="400"/>
-              </a:spcBef>
-            </a:pPr>
-            <a:r>
-              <a:rPr lang="de-DE" sz="1200" dirty="0"/>
-              <a:t>Screenshot-Ersatz für „Kapital-Kompass“ (Station 7 der Live-Demo), falls Netz, App oder Beamer nicht mitspielen.</a:t>
-            </a:r>
-          </a:p>
-          <a:p>
-            <a:pPr>
-              <a:spcBef>
-                <a:spcPts val="1200"/>
-              </a:spcBef>
-            </a:pPr>
-            <a:r>
-              <a:rPr lang="de-DE" sz="1200" b="1" dirty="0"/>
-              <a:t>SPRECHTEXT (falls gezeigt)</a:t>
-            </a:r>
-          </a:p>
-          <a:p>
-            <a:pPr>
-              <a:spcBef>
-                <a:spcPts val="400"/>
-              </a:spcBef>
-            </a:pPr>
-            <a:r>
-              <a:rPr lang="de-DE" sz="1200" dirty="0"/>
+            <a:r>
               <a:t>„Aus Kapital, Risikotoleranz und Stop-Loss-Distanz berechnet die App live den Risikobetrag und die maximale Positionsgröße — abgestimmt auf die Volatilitätsklasse der Aktie.“</a:t>
-            </a:r>
-          </a:p>
-          <a:p>
-            <a:pPr>
-              <a:spcBef>
-                <a:spcPts val="1200"/>
-              </a:spcBef>
-            </a:pPr>
-            <a:r>
-              <a:rPr lang="de-DE" sz="1200" b="1" dirty="0"/>
-              <a:t>REGIE</a:t>
-            </a:r>
-          </a:p>
-          <a:p>
-            <a:pPr>
-              <a:spcBef>
-                <a:spcPts val="400"/>
-              </a:spcBef>
-            </a:pPr>
-            <a:r>
-              <a:rPr lang="de-DE" sz="1200" dirty="0"/>
-              <a:t>Foliennummer eintippen und Enter. Nicht kommentieren, dass die Demo ausgefallen ist — einfach weitersprechen.</a:t>
             </a:r>
           </a:p>
         </p:txBody>
@@ -6002,80 +3396,8 @@
           <a:bodyPr/>
           <a:lstStyle/>
           <a:p>
-            <a:pPr>
-              <a:spcBef>
-                <a:spcPts val="1200"/>
-              </a:spcBef>
-            </a:pPr>
-            <a:r>
-              <a:rPr lang="de-DE" sz="1200" b="1" dirty="0"/>
-              <a:t>ANHANG  ·  AUSFALLPLAN LIVE-DEMO  ·  normalerweise übersprungen</a:t>
-            </a:r>
-          </a:p>
-          <a:p>
-            <a:pPr>
-              <a:spcBef>
-                <a:spcPts val="1200"/>
-              </a:spcBef>
-            </a:pPr>
-            <a:r>
-              <a:rPr lang="de-DE" sz="1200" b="1" dirty="0"/>
-              <a:t>EINSATZ</a:t>
-            </a:r>
-          </a:p>
-          <a:p>
-            <a:pPr>
-              <a:spcBef>
-                <a:spcPts val="400"/>
-              </a:spcBef>
-            </a:pPr>
-            <a:r>
-              <a:rPr lang="de-DE" sz="1200" dirty="0"/>
-              <a:t>Screenshot-Ersatz für „Portfolio-Simulator“ (Station 8 der Live-Demo), falls Netz, App oder Beamer nicht mitspielen.</a:t>
-            </a:r>
-          </a:p>
-          <a:p>
-            <a:pPr>
-              <a:spcBef>
-                <a:spcPts val="1200"/>
-              </a:spcBef>
-            </a:pPr>
-            <a:r>
-              <a:rPr lang="de-DE" sz="1200" b="1" dirty="0"/>
-              <a:t>SPRECHTEXT (falls gezeigt)</a:t>
-            </a:r>
-          </a:p>
-          <a:p>
-            <a:pPr>
-              <a:spcBef>
-                <a:spcPts val="400"/>
-              </a:spcBef>
-            </a:pPr>
-            <a:r>
-              <a:rPr lang="de-DE" sz="1200" dirty="0"/>
+            <a:r>
               <a:t>„Kapital wird über mehrere Titel verteilt, die Allokation ist live editierbar. Tortendiagramm und Herfindahl-Index zeigen sofort, wie konzentriert das Portfolio ist.“</a:t>
-            </a:r>
-          </a:p>
-          <a:p>
-            <a:pPr>
-              <a:spcBef>
-                <a:spcPts val="1200"/>
-              </a:spcBef>
-            </a:pPr>
-            <a:r>
-              <a:rPr lang="de-DE" sz="1200" b="1" dirty="0"/>
-              <a:t>REGIE</a:t>
-            </a:r>
-          </a:p>
-          <a:p>
-            <a:pPr>
-              <a:spcBef>
-                <a:spcPts val="400"/>
-              </a:spcBef>
-            </a:pPr>
-            <a:r>
-              <a:rPr lang="de-DE" sz="1200" dirty="0"/>
-              <a:t>Foliennummer eintippen und Enter. Nicht kommentieren, dass die Demo ausgefallen ist — einfach weitersprechen.</a:t>
             </a:r>
           </a:p>
         </p:txBody>
@@ -6151,101 +3473,25 @@
           <a:bodyPr/>
           <a:lstStyle/>
           <a:p>
-            <a:pPr>
-              <a:spcBef>
-                <a:spcPts val="1200"/>
-              </a:spcBef>
-            </a:pPr>
-            <a:r>
-              <a:rPr lang="de-DE" sz="1200" b="1" dirty="0"/>
-              <a:t>TIMING  2:00–2:32  ·  ca. 32 Sek</a:t>
-            </a:r>
-          </a:p>
-          <a:p>
-            <a:pPr>
-              <a:spcBef>
-                <a:spcPts val="1200"/>
-              </a:spcBef>
-            </a:pPr>
-            <a:r>
-              <a:rPr lang="de-DE" sz="1200" b="1" dirty="0"/>
-              <a:t>SPRECHTEXT</a:t>
-            </a:r>
-          </a:p>
-          <a:p>
-            <a:pPr>
-              <a:spcBef>
-                <a:spcPts val="400"/>
-              </a:spcBef>
-            </a:pPr>
-            <a:r>
-              <a:rPr lang="de-DE" sz="1200" dirty="0"/>
+            <a:r>
               <a:t>WealthScope AI ist eine Streamlit-App — die Bauform kennt ihr aus euren eigenen Projekten, deshalb halte ich mich hier nicht auf.</a:t>
             </a:r>
           </a:p>
-          <a:p>
-            <a:pPr>
-              <a:spcBef>
-                <a:spcPts val="400"/>
-              </a:spcBef>
-            </a:pPr>
-            <a:r>
-              <a:rPr lang="de-DE" sz="1200" dirty="0"/>
+          <a:p/>
+          <a:p>
+            <a:r>
               <a:t>Was sie macht: Sie verbindet historische Aktienmarktdaten mit Machine Learning. Was sie nicht ist: kein Wundermittel und kein Handelssystem. Sie ist ein Analyse-Werkzeug.</a:t>
             </a:r>
           </a:p>
-          <a:p>
-            <a:pPr>
-              <a:spcBef>
-                <a:spcPts val="400"/>
-              </a:spcBef>
-            </a:pPr>
-            <a:r>
-              <a:rPr lang="de-DE" sz="1200" dirty="0"/>
+          <a:p/>
+          <a:p>
+            <a:r>
               <a:t>Die Datenbasis rechts: 192.119 Datenpunkte, 26 Blue Chips, 1962 bis 2017, dazu Live-Kurse über yfinance. Nur die Größenordnung — die Daten selbst kommen in der Understanding-Phase.</a:t>
             </a:r>
           </a:p>
-          <a:p>
-            <a:pPr>
-              <a:spcBef>
-                <a:spcPts val="1200"/>
-              </a:spcBef>
-            </a:pPr>
-            <a:r>
-              <a:rPr lang="de-DE" sz="1200" b="1" dirty="0"/>
-              <a:t>REGIE</a:t>
-            </a:r>
-          </a:p>
-          <a:p>
-            <a:pPr>
-              <a:spcBef>
-                <a:spcPts val="400"/>
-              </a:spcBef>
-            </a:pPr>
-            <a:r>
-              <a:rPr lang="de-DE" sz="1200" dirty="0"/>
-              <a:t>Die drei großen Kennzahlen mit der Hand markieren, nicht einzeln vorlesen.</a:t>
-            </a:r>
-          </a:p>
-          <a:p>
-            <a:pPr>
-              <a:spcBef>
-                <a:spcPts val="1200"/>
-              </a:spcBef>
-            </a:pPr>
-            <a:r>
-              <a:rPr lang="de-DE" sz="1200" b="1" dirty="0"/>
-              <a:t>ÜBERLEITUNG</a:t>
-            </a:r>
-          </a:p>
-          <a:p>
-            <a:pPr>
-              <a:spcBef>
-                <a:spcPts val="400"/>
-              </a:spcBef>
-            </a:pPr>
-            <a:r>
-              <a:rPr lang="de-DE" sz="1200" dirty="0"/>
+          <a:p/>
+          <a:p>
+            <a:r>
               <a:t>„Wie kommen die Daten überhaupt in diese App? Der Weg in einem Bild.“</a:t>
             </a:r>
           </a:p>
@@ -6322,90 +3568,19 @@
           <a:bodyPr/>
           <a:lstStyle/>
           <a:p>
-            <a:pPr>
-              <a:spcBef>
-                <a:spcPts val="1200"/>
-              </a:spcBef>
-            </a:pPr>
-            <a:r>
-              <a:rPr lang="de-DE" sz="1200" b="1" dirty="0"/>
-              <a:t>ANHANG · BACKUP — zählt nicht zur Redezeit</a:t>
-            </a:r>
-          </a:p>
-          <a:p>
-            <a:pPr>
-              <a:spcBef>
-                <a:spcPts val="1200"/>
-              </a:spcBef>
-            </a:pPr>
-            <a:r>
-              <a:rPr lang="de-DE" sz="1200" b="1" dirty="0"/>
-              <a:t>SPRECHTEXT</a:t>
-            </a:r>
-          </a:p>
-          <a:p>
-            <a:pPr>
-              <a:spcBef>
-                <a:spcPts val="400"/>
-              </a:spcBef>
-            </a:pPr>
-            <a:r>
-              <a:rPr lang="de-DE" sz="1200" dirty="0"/>
+            <a:r>
               <a:t>Fünf Bausteine. Marktanalyse: Kurscharts und Trendindikatoren. ML-Insights: alles, was das Modell erklärt — Korrelationen, Lernkurve, SHAP. Der Kapital-Kompass rechnet aus, wie groß eine Position überhaupt sein darf. Der Portfolio-Simulator verteilt Kapital auf mehrere Titel. Und die Methodik-Seite erklärt den Prozess und exportiert den Bericht.</a:t>
             </a:r>
           </a:p>
-          <a:p>
-            <a:pPr>
-              <a:spcBef>
-                <a:spcPts val="400"/>
-              </a:spcBef>
-            </a:pPr>
-            <a:r>
-              <a:rPr lang="de-DE" sz="1200" dirty="0"/>
+          <a:p/>
+          <a:p>
+            <a:r>
               <a:t>Backup-Folie. Einblenden, wenn nach dem Funktionsumfang gefragt wird — in der Demo hast du diese fünf Bausteine bereits gezeigt. Der entscheidende Satz steht unten: Das Besondere ist nicht, dass die App bessere Prognosen macht, sondern dass sie zeigt, warum Machine Learning bei Aktienkursen an seine Grenzen stößt.</a:t>
             </a:r>
           </a:p>
-          <a:p>
-            <a:pPr>
-              <a:spcBef>
-                <a:spcPts val="1200"/>
-              </a:spcBef>
-            </a:pPr>
-            <a:r>
-              <a:rPr lang="de-DE" sz="1200" b="1" dirty="0"/>
-              <a:t>REGIE</a:t>
-            </a:r>
-          </a:p>
-          <a:p>
-            <a:pPr>
-              <a:spcBef>
-                <a:spcPts val="400"/>
-              </a:spcBef>
-            </a:pPr>
-            <a:r>
-              <a:rPr lang="de-DE" sz="1200" dirty="0"/>
-              <a:t>Beim Schlusssatz das Tempo bewusst herausnehmen. Das ist die These des Vortrags.</a:t>
-            </a:r>
-          </a:p>
-          <a:p>
-            <a:pPr>
-              <a:spcBef>
-                <a:spcPts val="1200"/>
-              </a:spcBef>
-            </a:pPr>
-            <a:r>
-              <a:rPr lang="de-DE" sz="1200" b="1" dirty="0"/>
-              <a:t>ÜBERLEITUNG</a:t>
-            </a:r>
-          </a:p>
-          <a:p>
-            <a:pPr>
-              <a:spcBef>
-                <a:spcPts val="400"/>
-              </a:spcBef>
-            </a:pPr>
-            <a:r>
-              <a:rPr lang="de-DE" sz="1200" dirty="0"/>
+          <a:p/>
+          <a:p>
+            <a:r>
               <a:t>„Wie kommen die Daten dahin? In einem Bild.“</a:t>
             </a:r>
           </a:p>
@@ -6482,90 +3657,19 @@
           <a:bodyPr/>
           <a:lstStyle/>
           <a:p>
-            <a:pPr>
-              <a:spcBef>
-                <a:spcPts val="1200"/>
-              </a:spcBef>
-            </a:pPr>
-            <a:r>
-              <a:rPr lang="de-DE" sz="1200" b="1" dirty="0"/>
-              <a:t>TIMING  2:32–2:50  ·  ca. 18 Sek</a:t>
-            </a:r>
-          </a:p>
-          <a:p>
-            <a:pPr>
-              <a:spcBef>
-                <a:spcPts val="1200"/>
-              </a:spcBef>
-            </a:pPr>
-            <a:r>
-              <a:rPr lang="de-DE" sz="1200" b="1" dirty="0"/>
-              <a:t>SPRECHTEXT</a:t>
-            </a:r>
-          </a:p>
-          <a:p>
-            <a:pPr>
-              <a:spcBef>
-                <a:spcPts val="400"/>
-              </a:spcBef>
-            </a:pPr>
-            <a:r>
-              <a:rPr lang="de-DE" sz="1200" dirty="0"/>
+            <a:r>
               <a:t>Der Weg der Daten von links nach rechts — die Kette erklärt sich selbst.</a:t>
             </a:r>
           </a:p>
-          <a:p>
-            <a:pPr>
-              <a:spcBef>
-                <a:spcPts val="400"/>
-              </a:spcBef>
-            </a:pPr>
-            <a:r>
-              <a:rPr lang="de-DE" sz="1200" dirty="0"/>
+          <a:p/>
+          <a:p>
+            <a:r>
               <a:t>Ein Punkt ist wichtig: der Diagnostik-Cache. Alle Kennzahlen werden einmalig offline berechnet und als JSON abgelegt. Die App trainiert beim Seitenaufruf nichts. Deshalb können App, Ausarbeitung und Poster gar nicht auseinanderlaufen.</a:t>
             </a:r>
           </a:p>
-          <a:p>
-            <a:pPr>
-              <a:spcBef>
-                <a:spcPts val="1200"/>
-              </a:spcBef>
-            </a:pPr>
-            <a:r>
-              <a:rPr lang="de-DE" sz="1200" b="1" dirty="0"/>
-              <a:t>REGIE</a:t>
-            </a:r>
-          </a:p>
-          <a:p>
-            <a:pPr>
-              <a:spcBef>
-                <a:spcPts val="400"/>
-              </a:spcBef>
-            </a:pPr>
-            <a:r>
-              <a:rPr lang="de-DE" sz="1200" dirty="0"/>
-              <a:t>Mit der Hand der Pfeilkette von links nach rechts folgen.</a:t>
-            </a:r>
-          </a:p>
-          <a:p>
-            <a:pPr>
-              <a:spcBef>
-                <a:spcPts val="1200"/>
-              </a:spcBef>
-            </a:pPr>
-            <a:r>
-              <a:rPr lang="de-DE" sz="1200" b="1" dirty="0"/>
-              <a:t>ÜBERLEITUNG</a:t>
-            </a:r>
-          </a:p>
-          <a:p>
-            <a:pPr>
-              <a:spcBef>
-                <a:spcPts val="400"/>
-              </a:spcBef>
-            </a:pPr>
-            <a:r>
-              <a:rPr lang="de-DE" sz="1200" dirty="0"/>
+          <a:p/>
+          <a:p>
+            <a:r>
               <a:t>„Jetzt zur Methode — dem roten Faden für den ganzen Rest.“</a:t>
             </a:r>
           </a:p>
@@ -6642,90 +3746,19 @@
           <a:bodyPr/>
           <a:lstStyle/>
           <a:p>
-            <a:pPr>
-              <a:spcBef>
-                <a:spcPts val="1200"/>
-              </a:spcBef>
-            </a:pPr>
-            <a:r>
-              <a:rPr lang="de-DE" sz="1200" b="1" dirty="0"/>
-              <a:t>ANHANG · BACKUP — zählt nicht zur Redezeit</a:t>
-            </a:r>
-          </a:p>
-          <a:p>
-            <a:pPr>
-              <a:spcBef>
-                <a:spcPts val="1200"/>
-              </a:spcBef>
-            </a:pPr>
-            <a:r>
-              <a:rPr lang="de-DE" sz="1200" b="1" dirty="0"/>
-              <a:t>SPRECHTEXT</a:t>
-            </a:r>
-          </a:p>
-          <a:p>
-            <a:pPr>
-              <a:spcBef>
-                <a:spcPts val="400"/>
-              </a:spcBef>
-            </a:pPr>
-            <a:r>
-              <a:rPr lang="de-DE" sz="1200" dirty="0"/>
+            <a:r>
               <a:t>Backup-Folie für die Frage „Womit hast du das gebaut?“. Python und Streamlit für die App, pandas und Parquet für die Daten, scikit-learn für die Modelle, Plotly für die Charts, SHAP für die Erklärbarkeit, pytest für die Tests. Alles Open Source, alles reproduzierbar.</a:t>
             </a:r>
           </a:p>
-          <a:p>
-            <a:pPr>
-              <a:spcBef>
-                <a:spcPts val="400"/>
-              </a:spcBef>
-            </a:pPr>
-            <a:r>
-              <a:rPr lang="de-DE" sz="1200" dirty="0"/>
+          <a:p/>
+          <a:p>
+            <a:r>
               <a:t>Alles Open Source, alles reproduzierbar.</a:t>
             </a:r>
           </a:p>
-          <a:p>
-            <a:pPr>
-              <a:spcBef>
-                <a:spcPts val="1200"/>
-              </a:spcBef>
-            </a:pPr>
-            <a:r>
-              <a:rPr lang="de-DE" sz="1200" b="1" dirty="0"/>
-              <a:t>REGIE</a:t>
-            </a:r>
-          </a:p>
-          <a:p>
-            <a:pPr>
-              <a:spcBef>
-                <a:spcPts val="400"/>
-              </a:spcBef>
-            </a:pPr>
-            <a:r>
-              <a:rPr lang="de-DE" sz="1200" dirty="0"/>
-              <a:t>Bewusst zügig. Nicht alle acht Zeilen vorlesen — die Folie spricht für sich. Wenn du im Zeitdruck bist: Diese Folie ist die erste, die du überspringen kannst.</a:t>
-            </a:r>
-          </a:p>
-          <a:p>
-            <a:pPr>
-              <a:spcBef>
-                <a:spcPts val="1200"/>
-              </a:spcBef>
-            </a:pPr>
-            <a:r>
-              <a:rPr lang="de-DE" sz="1200" b="1" dirty="0"/>
-              <a:t>ÜBERLEITUNG</a:t>
-            </a:r>
-          </a:p>
-          <a:p>
-            <a:pPr>
-              <a:spcBef>
-                <a:spcPts val="400"/>
-              </a:spcBef>
-            </a:pPr>
-            <a:r>
-              <a:rPr lang="de-DE" sz="1200" dirty="0"/>
+          <a:p/>
+          <a:p>
+            <a:r>
               <a:t>„Jetzt zur Methode — dem roten Faden für den ganzen Rest.“</a:t>
             </a:r>
           </a:p>
@@ -6802,101 +3835,25 @@
           <a:bodyPr/>
           <a:lstStyle/>
           <a:p>
-            <a:pPr>
-              <a:spcBef>
-                <a:spcPts val="1200"/>
-              </a:spcBef>
-            </a:pPr>
-            <a:r>
-              <a:rPr lang="de-DE" sz="1200" b="1" dirty="0"/>
-              <a:t>TIMING  2:50–3:10  ·  ca. 20 Sek</a:t>
-            </a:r>
-          </a:p>
-          <a:p>
-            <a:pPr>
-              <a:spcBef>
-                <a:spcPts val="1200"/>
-              </a:spcBef>
-            </a:pPr>
-            <a:r>
-              <a:rPr lang="de-DE" sz="1200" b="1" dirty="0"/>
-              <a:t>SPRECHTEXT</a:t>
-            </a:r>
-          </a:p>
-          <a:p>
-            <a:pPr>
-              <a:spcBef>
-                <a:spcPts val="400"/>
-              </a:spcBef>
-            </a:pPr>
-            <a:r>
-              <a:rPr lang="de-DE" sz="1200" dirty="0"/>
+            <a:r>
               <a:t>QUA³CK kennt ihr — ich buchstabiere es nicht durch.</a:t>
             </a:r>
           </a:p>
-          <a:p>
-            <a:pPr>
-              <a:spcBef>
-                <a:spcPts val="400"/>
-              </a:spcBef>
-            </a:pPr>
-            <a:r>
-              <a:rPr lang="de-DE" sz="1200" dirty="0"/>
+          <a:p/>
+          <a:p>
+            <a:r>
               <a:t>Zwei Sätze zur Einordnung: Der Prozess kommt vom KIT, Stock und Kollegen 2021, und er verhindert genau einen Fehler — modellieren, bevor man die Daten verstanden hat.</a:t>
             </a:r>
           </a:p>
-          <a:p>
-            <a:pPr>
-              <a:spcBef>
-                <a:spcPts val="400"/>
-              </a:spcBef>
-            </a:pPr>
-            <a:r>
-              <a:rPr lang="de-DE" sz="1200" dirty="0"/>
+          <a:p/>
+          <a:p>
+            <a:r>
               <a:t>Jede Phase ist bei mir durch ein eigenes Notebook dokumentiert. Ihr seht die aktuelle Phase ab jetzt oben links auf jeder Folie.</a:t>
             </a:r>
           </a:p>
-          <a:p>
-            <a:pPr>
-              <a:spcBef>
-                <a:spcPts val="1200"/>
-              </a:spcBef>
-            </a:pPr>
-            <a:r>
-              <a:rPr lang="de-DE" sz="1200" b="1" dirty="0"/>
-              <a:t>REGIE</a:t>
-            </a:r>
-          </a:p>
-          <a:p>
-            <a:pPr>
-              <a:spcBef>
-                <a:spcPts val="400"/>
-              </a:spcBef>
-            </a:pPr>
-            <a:r>
-              <a:rPr lang="de-DE" sz="1200" dirty="0"/>
-              <a:t>Nicht abschreiten, nur kurz auf die Kette zeigen. Tempo halten — hier wird bewusst Zeit gespart.</a:t>
-            </a:r>
-          </a:p>
-          <a:p>
-            <a:pPr>
-              <a:spcBef>
-                <a:spcPts val="1200"/>
-              </a:spcBef>
-            </a:pPr>
-            <a:r>
-              <a:rPr lang="de-DE" sz="1200" b="1" dirty="0"/>
-              <a:t>ÜBERLEITUNG</a:t>
-            </a:r>
-          </a:p>
-          <a:p>
-            <a:pPr>
-              <a:spcBef>
-                <a:spcPts val="400"/>
-              </a:spcBef>
-            </a:pPr>
-            <a:r>
-              <a:rPr lang="de-DE" sz="1200" dirty="0"/>
+          <a:p/>
+          <a:p>
+            <a:r>
               <a:t>„Phase eins: die Frage.“</a:t>
             </a:r>
           </a:p>
@@ -6973,134 +3930,43 @@
           <a:bodyPr/>
           <a:lstStyle/>
           <a:p>
-            <a:pPr>
-              <a:spcBef>
-                <a:spcPts val="1200"/>
-              </a:spcBef>
-            </a:pPr>
-            <a:r>
-              <a:rPr lang="de-DE" sz="1200" b="1" dirty="0"/>
-              <a:t>TIMING  3:10–4:40  ·  ca. 90 Sek</a:t>
-            </a:r>
-          </a:p>
-          <a:p>
-            <a:pPr>
-              <a:spcBef>
-                <a:spcPts val="1200"/>
-              </a:spcBef>
-            </a:pPr>
-            <a:r>
-              <a:rPr lang="de-DE" sz="1200" b="1" dirty="0"/>
-              <a:t>SPRECHTEXT</a:t>
-            </a:r>
-          </a:p>
-          <a:p>
-            <a:pPr>
-              <a:spcBef>
-                <a:spcPts val="400"/>
-              </a:spcBef>
-            </a:pPr>
-            <a:r>
-              <a:rPr lang="de-DE" sz="1200" dirty="0"/>
+            <a:r>
               <a:t>Die Leitfrage lautet: Wie können historische US-Aktienmarktdaten genutzt werden, um mit Machine Learning eine interaktive Finanzanalyse-App zu entwickeln, die technische Marktanalyse, ML-basierte Signalgebung und risikobasierte Positionsplanung nachvollziehbar kombiniert?</a:t>
             </a:r>
           </a:p>
-          <a:p>
-            <a:pPr>
-              <a:spcBef>
-                <a:spcPts val="400"/>
-              </a:spcBef>
-            </a:pPr>
-            <a:r>
-              <a:rPr lang="de-DE" sz="1200" dirty="0"/>
+          <a:p/>
+          <a:p>
+            <a:r>
               <a:t>Daraus habe ich drei Hypothesen abgeleitet — drei Behauptungen, die am Ende überprüfbar sein müssen.</a:t>
             </a:r>
           </a:p>
-          <a:p>
-            <a:pPr>
-              <a:spcBef>
-                <a:spcPts val="400"/>
-              </a:spcBef>
-            </a:pPr>
-            <a:r>
-              <a:rPr lang="de-DE" sz="1200" dirty="0"/>
+          <a:p/>
+          <a:p>
+            <a:r>
               <a:t>H1, die Modellhypothese: Ein Random-Forest-Modell wird gegen eine Baseline und vier Alternativen geprüft, und zwar in einem Out-of-Time-Test. Out-of-Time heißt: Ich trainiere ausschließlich auf der Vergangenheit und teste ausschließlich auf einer Zukunft, die das Modell nie gesehen hat. Merkt euch das — daran entscheidet sich später alles.</a:t>
             </a:r>
           </a:p>
-          <a:p>
-            <a:pPr>
-              <a:spcBef>
-                <a:spcPts val="400"/>
-              </a:spcBef>
-            </a:pPr>
-            <a:r>
-              <a:rPr lang="de-DE" sz="1200" dirty="0"/>
+          <a:p/>
+          <a:p>
+            <a:r>
               <a:t>H2, die Vermittlungshypothese: Die App macht die Methodik für Nicht-Experten verständlich zugänglich. Über die urteilt ihr nachher selbst, wenn ihr die App gesehen habt.</a:t>
             </a:r>
           </a:p>
-          <a:p>
-            <a:pPr>
-              <a:spcBef>
-                <a:spcPts val="400"/>
-              </a:spcBef>
-            </a:pPr>
-            <a:r>
-              <a:rPr lang="de-DE" sz="1200" dirty="0"/>
+          <a:p/>
+          <a:p>
+            <a:r>
               <a:t>H3, die Kombinationshypothese: Technische Indikatoren plus ML-Signal plus Risikorechner sind zusammen nützlicher als jedes Werkzeug allein.</a:t>
             </a:r>
           </a:p>
-          <a:p>
-            <a:pPr>
-              <a:spcBef>
-                <a:spcPts val="400"/>
-              </a:spcBef>
-            </a:pPr>
-            <a:r>
-              <a:rPr lang="de-DE" sz="1200" dirty="0"/>
+          <a:p/>
+          <a:p>
+            <a:r>
               <a:t>Und ganz wichtig, was das Projekt ausdrücklich nicht ist: kein Handelsbot, keine Anlageberatung, kein Kursprognose-Tool. Ein wissenschaftlicher Prototyp.</a:t>
             </a:r>
           </a:p>
-          <a:p>
-            <a:pPr>
-              <a:spcBef>
-                <a:spcPts val="1200"/>
-              </a:spcBef>
-            </a:pPr>
-            <a:r>
-              <a:rPr lang="de-DE" sz="1200" b="1" dirty="0"/>
-              <a:t>REGIE</a:t>
-            </a:r>
-          </a:p>
-          <a:p>
-            <a:pPr>
-              <a:spcBef>
-                <a:spcPts val="400"/>
-              </a:spcBef>
-            </a:pPr>
-            <a:r>
-              <a:rPr lang="de-DE" sz="1200" dirty="0"/>
-              <a:t>Die Leitfrage nicht Wort für Wort ablesen — sinngemäß sprechen, das Publikum liest mit. Bei H1 kurz innehalten. Der Zusatz bei H2 bindet das Publikum an die Demo.</a:t>
-            </a:r>
-          </a:p>
-          <a:p>
-            <a:pPr>
-              <a:spcBef>
-                <a:spcPts val="1200"/>
-              </a:spcBef>
-            </a:pPr>
-            <a:r>
-              <a:rPr lang="de-DE" sz="1200" b="1" dirty="0"/>
-              <a:t>ÜBERLEITUNG</a:t>
-            </a:r>
-          </a:p>
-          <a:p>
-            <a:pPr>
-              <a:spcBef>
-                <a:spcPts val="400"/>
-              </a:spcBef>
-            </a:pPr>
-            <a:r>
-              <a:rPr lang="de-DE" sz="1200" dirty="0"/>
+          <a:p/>
+          <a:p>
+            <a:r>
               <a:t>„Phase zwei: Bevor man modelliert, muss man die Daten kennen.“</a:t>
             </a:r>
           </a:p>
